--- a/docs/capacitacion/capacitacion-pinturas-liz.pptx
+++ b/docs/capacitacion/capacitacion-pinturas-liz.pptx
@@ -38,9 +38,12 @@
     <p:sldId id="286" r:id="rId32"/>
     <p:sldId id="287" r:id="rId33"/>
     <p:sldId id="288" r:id="rId34"/>
+    <p:sldId id="289" r:id="rId35"/>
+    <p:sldId id="290" r:id="rId36"/>
+    <p:sldId id="291" r:id="rId37"/>
   </p:sldIdLst>
   <p:notesMasterIdLst>
-    <p:notesMasterId r:id="rId35"/>
+    <p:notesMasterId r:id="rId38"/>
   </p:notesMasterIdLst>
   <p:sldSz cx="9144000" cy="5143500"/>
   <p:notesSz cx="5143500" cy="9144000"/>
@@ -139,7 +142,7 @@
   <p:extLst>
     <p:ext uri="{521415D9-36F7-43E2-AB2F-B90AF26B5E84}">
       <p14:sectionLst xmlns:p14="http://schemas.microsoft.com/office/powerpoint/2010/main">
-        <p14:section name="Bienvenida" id="{ee0b4348-f5aa-c4dc-5043-6b3da1e7b6d9}">
+        <p14:section name="Bienvenida" id="{e6d1a816-52e3-804b-cd8f-3b69e3a6a16b}">
           <p14:sldIdLst>
             <p14:sldId id="256"/>
             <p14:sldId id="257"/>
@@ -151,7 +154,7 @@
             <p14:sldId id="263"/>
           </p14:sldIdLst>
         </p14:section>
-        <p14:section name="Vendedor" id="{d5fbc947-0168-c5d5-e056-0cdd0fca3f5f}">
+        <p14:section name="Vendedor" id="{79d1b71c-9baf-7cb8-f9f0-d80b955dd6c4}">
           <p14:sldIdLst>
             <p14:sldId id="264"/>
             <p14:sldId id="265"/>
@@ -162,7 +165,7 @@
             <p14:sldId id="270"/>
           </p14:sldIdLst>
         </p14:section>
-        <p14:section name="Administración" id="{e997707b-1279-a7a9-3bf6-83ab9026b04d}">
+        <p14:section name="Administración" id="{c97cea4d-aeec-1d4e-d6a7-0591309c62cc}">
           <p14:sldIdLst>
             <p14:sldId id="271"/>
             <p14:sldId id="272"/>
@@ -170,38 +173,41 @@
             <p14:sldId id="274"/>
             <p14:sldId id="275"/>
             <p14:sldId id="276"/>
+            <p14:sldId id="277"/>
+            <p14:sldId id="278"/>
           </p14:sldIdLst>
         </p14:section>
-        <p14:section name="Socios y Desarrollador" id="{effdd34e-ae34-0984-1f0d-561ab0c1f8b7}">
+        <p14:section name="Socios y Desarrollador" id="{235188cc-3075-0c1c-ca64-01036cab9809}">
           <p14:sldIdLst>
-            <p14:sldId id="277"/>
-            <p14:sldId id="278"/>
             <p14:sldId id="279"/>
-          </p14:sldIdLst>
-        </p14:section>
-        <p14:section name="Taller" id="{8aaa5c94-956e-74e5-1f78-d2a0ea1c2766}">
-          <p14:sldIdLst>
             <p14:sldId id="280"/>
             <p14:sldId id="281"/>
             <p14:sldId id="282"/>
           </p14:sldIdLst>
         </p14:section>
-        <p14:section name="Despacho" id="{0f35b5aa-81f4-2265-57a6-9bd38af9bb01}">
+        <p14:section name="Taller" id="{3d6c7dfb-dab2-d12b-ee17-e6b11c15f92e}">
           <p14:sldIdLst>
             <p14:sldId id="283"/>
             <p14:sldId id="284"/>
+            <p14:sldId id="285"/>
           </p14:sldIdLst>
         </p14:section>
-        <p14:section name="Laboratorio" id="{516287fa-bcd9-e02b-a595-51e650effeea}">
+        <p14:section name="Despacho" id="{fc6fdfb7-01ff-d8a8-fbb4-f198e5d857b8}">
           <p14:sldIdLst>
-            <p14:sldId id="285"/>
             <p14:sldId id="286"/>
+            <p14:sldId id="287"/>
           </p14:sldIdLst>
         </p14:section>
-        <p14:section name="Cierre" id="{4b0b46e7-bc6e-2c23-1b7e-4546895b6379}">
+        <p14:section name="Laboratorio" id="{aa737989-3b45-2c62-2169-e105b9d226a4}">
           <p14:sldIdLst>
-            <p14:sldId id="287"/>
             <p14:sldId id="288"/>
+            <p14:sldId id="289"/>
+          </p14:sldIdLst>
+        </p14:section>
+        <p14:section name="Cierre" id="{c52e3c5e-bbc1-2bec-4f89-1e414f9e283f}">
+          <p14:sldIdLst>
+            <p14:sldId id="290"/>
+            <p14:sldId id="291"/>
           </p14:sldIdLst>
         </p14:section>
       </p14:sectionLst>
@@ -1840,7 +1846,7 @@
           <a:p>
             <a:r>
               <a:rPr lang="en-US" dirty="0"/>
-              <a:t>Los socios tienen acceso total. El Desarrollador tiene los mismos permisos y recibe las sugerencias de mejora.</a:t>
+              <a:t>Módulo nuevo en 0.8.0. Mostrar el filtro de período y explicar qué es del período y qué es de hoy. Tocar una barra para ver el detalle.</a:t>
             </a:r>
             <a:endParaRPr lang="en-US" dirty="0"/>
           </a:p>
@@ -1928,7 +1934,7 @@
           <a:p>
             <a:r>
               <a:rPr lang="en-US" dirty="0"/>
-              <a:t>Resolver las alertas de datos del Excel poco a poco. Las de precio se cierran solas al registrar el precio.</a:t>
+              <a:t>La deuda por cliente es la foto de hoy: compara con el límite de crédito. En Almacén, la lista Reponer dice qué comprar.</a:t>
             </a:r>
             <a:endParaRPr lang="en-US" dirty="0"/>
           </a:p>
@@ -2016,7 +2022,7 @@
           <a:p>
             <a:r>
               <a:rPr lang="en-US" dirty="0"/>
-              <a:t>Mostrar Mi cuenta → Administrar usuarios. Nadie puede quitarse su propio perfil de socio o desarrollador.</a:t>
+              <a:t>Los socios tienen acceso total. El Desarrollador tiene los mismos permisos y recibe las sugerencias de mejora.</a:t>
             </a:r>
             <a:endParaRPr lang="en-US" dirty="0"/>
           </a:p>
@@ -2104,7 +2110,7 @@
           <a:p>
             <a:r>
               <a:rPr lang="en-US" dirty="0"/>
-              <a:t>Desde esta versión el Taller también despacha y marca entregado.</a:t>
+              <a:t>Resolver las alertas de datos del Excel poco a poco. Las de precio se cierran solas al registrar el precio.</a:t>
             </a:r>
             <a:endParaRPr lang="en-US" dirty="0"/>
           </a:p>
@@ -2192,7 +2198,7 @@
           <a:p>
             <a:r>
               <a:rPr lang="en-US" dirty="0"/>
-              <a:t>Por envasar compara lo que piden los pedidos con lo ya envasado. Registrar el envasado descuenta granel y materiales solos.</a:t>
+              <a:t>Mostrar Mi cuenta → Administrar usuarios. Nadie puede quitarse su propio perfil de socio o desarrollador.</a:t>
             </a:r>
             <a:endParaRPr lang="en-US" dirty="0"/>
           </a:p>
@@ -2280,7 +2286,7 @@
           <a:p>
             <a:r>
               <a:rPr lang="en-US" dirty="0"/>
-              <a:t>El empaque del pedido dice cómo armar las bolsas. Si hay un problema, Enviar a revisión: lo ve Administración.</a:t>
+              <a:t>Solo socios, Desarrollador y Administración ven Análisis. Útil para la reunión semanal: ventas por vendedor y canal, deuda vencida y producción.</a:t>
             </a:r>
             <a:endParaRPr lang="en-US" dirty="0"/>
           </a:p>
@@ -2368,7 +2374,7 @@
           <a:p>
             <a:r>
               <a:rPr lang="en-US" dirty="0"/>
-              <a:t>Despacho no envasa ni mueve almacenes; solo ve el producto envasado.</a:t>
+              <a:t>Desde esta versión el Taller también despacha y marca entregado.</a:t>
             </a:r>
             <a:endParaRPr lang="en-US" dirty="0"/>
           </a:p>
@@ -2456,7 +2462,7 @@
           <a:p>
             <a:r>
               <a:rPr lang="en-US" dirty="0"/>
-              <a:t>La lista se abre en los pedidos Listos. Revisar la agencia y el empaque antes de despachar.</a:t>
+              <a:t>Por envasar compara lo que piden los pedidos con lo ya envasado. Registrar el envasado descuenta granel y materiales solos.</a:t>
             </a:r>
             <a:endParaRPr lang="en-US" dirty="0"/>
           </a:p>
@@ -2632,7 +2638,7 @@
           <a:p>
             <a:r>
               <a:rPr lang="en-US" dirty="0"/>
-              <a:t>Sección del Laboratorio: órdenes, lotes, validación, entrega e insumos.</a:t>
+              <a:t>El empaque del pedido dice cómo armar las bolsas. Si hay un problema, Enviar a revisión: lo ve Administración.</a:t>
             </a:r>
             <a:endParaRPr lang="en-US" dirty="0"/>
           </a:p>
@@ -2720,7 +2726,7 @@
           <a:p>
             <a:r>
               <a:rPr lang="en-US" dirty="0"/>
-              <a:t>Al registrar un lote salen los insumos; al aprobar entra a Granel Laboratorio; al entregar pasa al Taller.</a:t>
+              <a:t>Despacho no envasa ni mueve almacenes; solo ve el producto envasado.</a:t>
             </a:r>
             <a:endParaRPr lang="en-US" dirty="0"/>
           </a:p>
@@ -2808,7 +2814,7 @@
           <a:p>
             <a:r>
               <a:rPr lang="en-US" dirty="0"/>
-              <a:t>Repasar las cinco reglas. Pedir que cada uno pruebe su flujo hoy mismo con un pedido de prueba.</a:t>
+              <a:t>La lista se abre en los pedidos Listos. Revisar la agencia y el empaque antes de despachar.</a:t>
             </a:r>
             <a:endParaRPr lang="en-US" dirty="0"/>
           </a:p>
@@ -2896,7 +2902,7 @@
           <a:p>
             <a:r>
               <a:rPr lang="en-US" dirty="0"/>
-              <a:t>Cierre: abrir preguntas. Recordar dónde está la ayuda.</a:t>
+              <a:t>Sección del Laboratorio: órdenes, lotes, validación, entrega e insumos.</a:t>
             </a:r>
             <a:endParaRPr lang="en-US" dirty="0"/>
           </a:p>
@@ -2920,6 +2926,270 @@
             <a:fld id="{F7021451-1387-4CA6-816F-3879F97B5CBC}" type="slidenum">
               <a:rPr lang="en-US"/>
               <a:t>33</a:t>
+            </a:fld>
+            <a:endParaRPr lang="en-US"/>
+          </a:p>
+        </p:txBody>
+      </p:sp>
+    </p:spTree>
+    <p:extLst>
+      <p:ext uri="{BB962C8B-B14F-4D97-AF65-F5344CB8AC3E}">
+        <p14:creationId xmlns:p14="http://schemas.microsoft.com/office/powerpoint/2010/main" val="1024086991"/>
+      </p:ext>
+    </p:extLst>
+  </p:cSld>
+  <p:clrMapOvr>
+    <a:masterClrMapping/>
+  </p:clrMapOvr>
+</p:notes>
+</file>
+
+<file path=ppt/notesSlides/notesSlide34.xml><?xml version="1.0" encoding="utf-8"?>
+<p:notes xmlns:a="http://schemas.openxmlformats.org/drawingml/2006/main" xmlns:r="http://schemas.openxmlformats.org/officeDocument/2006/relationships" xmlns:p="http://schemas.openxmlformats.org/presentationml/2006/main">
+  <p:cSld>
+    <p:spTree>
+      <p:nvGrpSpPr>
+        <p:cNvPr id="1" name=""/>
+        <p:cNvGrpSpPr/>
+        <p:nvPr/>
+      </p:nvGrpSpPr>
+      <p:grpSpPr>
+        <a:xfrm>
+          <a:off x="0" y="0"/>
+          <a:ext cx="0" cy="0"/>
+          <a:chOff x="0" y="0"/>
+          <a:chExt cx="0" cy="0"/>
+        </a:xfrm>
+      </p:grpSpPr>
+      <p:sp>
+        <p:nvSpPr>
+          <p:cNvPr id="2" name="Slide Image Placeholder 1"/>
+          <p:cNvSpPr>
+            <a:spLocks noGrp="1" noRot="1" noChangeAspect="1"/>
+          </p:cNvSpPr>
+          <p:nvPr>
+            <p:ph type="sldImg"/>
+          </p:nvPr>
+        </p:nvSpPr>
+        <p:spPr/>
+      </p:sp>
+      <p:sp>
+        <p:nvSpPr>
+          <p:cNvPr id="3" name="Notes Placeholder 2"/>
+          <p:cNvSpPr>
+            <a:spLocks noGrp="1"/>
+          </p:cNvSpPr>
+          <p:nvPr>
+            <p:ph type="body" idx="1"/>
+          </p:nvPr>
+        </p:nvSpPr>
+        <p:spPr/>
+        <p:txBody>
+          <a:bodyPr/>
+          <a:lstStyle/>
+          <a:p>
+            <a:r>
+              <a:rPr lang="en-US" dirty="0"/>
+              <a:t>Al registrar un lote salen los insumos; al aprobar entra a Granel Laboratorio; al entregar pasa al Taller.</a:t>
+            </a:r>
+            <a:endParaRPr lang="en-US" dirty="0"/>
+          </a:p>
+        </p:txBody>
+      </p:sp>
+      <p:sp>
+        <p:nvSpPr>
+          <p:cNvPr id="4" name="Slide Number Placeholder 3"/>
+          <p:cNvSpPr>
+            <a:spLocks noGrp="1"/>
+          </p:cNvSpPr>
+          <p:nvPr>
+            <p:ph type="sldNum" sz="quarter" idx="10"/>
+          </p:nvPr>
+        </p:nvSpPr>
+        <p:spPr/>
+        <p:txBody>
+          <a:bodyPr/>
+          <a:lstStyle/>
+          <a:p>
+            <a:fld id="{F7021451-1387-4CA6-816F-3879F97B5CBC}" type="slidenum">
+              <a:rPr lang="en-US"/>
+              <a:t>34</a:t>
+            </a:fld>
+            <a:endParaRPr lang="en-US"/>
+          </a:p>
+        </p:txBody>
+      </p:sp>
+    </p:spTree>
+    <p:extLst>
+      <p:ext uri="{BB962C8B-B14F-4D97-AF65-F5344CB8AC3E}">
+        <p14:creationId xmlns:p14="http://schemas.microsoft.com/office/powerpoint/2010/main" val="1024086991"/>
+      </p:ext>
+    </p:extLst>
+  </p:cSld>
+  <p:clrMapOvr>
+    <a:masterClrMapping/>
+  </p:clrMapOvr>
+</p:notes>
+</file>
+
+<file path=ppt/notesSlides/notesSlide35.xml><?xml version="1.0" encoding="utf-8"?>
+<p:notes xmlns:a="http://schemas.openxmlformats.org/drawingml/2006/main" xmlns:r="http://schemas.openxmlformats.org/officeDocument/2006/relationships" xmlns:p="http://schemas.openxmlformats.org/presentationml/2006/main">
+  <p:cSld>
+    <p:spTree>
+      <p:nvGrpSpPr>
+        <p:cNvPr id="1" name=""/>
+        <p:cNvGrpSpPr/>
+        <p:nvPr/>
+      </p:nvGrpSpPr>
+      <p:grpSpPr>
+        <a:xfrm>
+          <a:off x="0" y="0"/>
+          <a:ext cx="0" cy="0"/>
+          <a:chOff x="0" y="0"/>
+          <a:chExt cx="0" cy="0"/>
+        </a:xfrm>
+      </p:grpSpPr>
+      <p:sp>
+        <p:nvSpPr>
+          <p:cNvPr id="2" name="Slide Image Placeholder 1"/>
+          <p:cNvSpPr>
+            <a:spLocks noGrp="1" noRot="1" noChangeAspect="1"/>
+          </p:cNvSpPr>
+          <p:nvPr>
+            <p:ph type="sldImg"/>
+          </p:nvPr>
+        </p:nvSpPr>
+        <p:spPr/>
+      </p:sp>
+      <p:sp>
+        <p:nvSpPr>
+          <p:cNvPr id="3" name="Notes Placeholder 2"/>
+          <p:cNvSpPr>
+            <a:spLocks noGrp="1"/>
+          </p:cNvSpPr>
+          <p:nvPr>
+            <p:ph type="body" idx="1"/>
+          </p:nvPr>
+        </p:nvSpPr>
+        <p:spPr/>
+        <p:txBody>
+          <a:bodyPr/>
+          <a:lstStyle/>
+          <a:p>
+            <a:r>
+              <a:rPr lang="en-US" dirty="0"/>
+              <a:t>Repasar las cinco reglas. Pedir que cada uno pruebe su flujo hoy mismo con un pedido de prueba.</a:t>
+            </a:r>
+            <a:endParaRPr lang="en-US" dirty="0"/>
+          </a:p>
+        </p:txBody>
+      </p:sp>
+      <p:sp>
+        <p:nvSpPr>
+          <p:cNvPr id="4" name="Slide Number Placeholder 3"/>
+          <p:cNvSpPr>
+            <a:spLocks noGrp="1"/>
+          </p:cNvSpPr>
+          <p:nvPr>
+            <p:ph type="sldNum" sz="quarter" idx="10"/>
+          </p:nvPr>
+        </p:nvSpPr>
+        <p:spPr/>
+        <p:txBody>
+          <a:bodyPr/>
+          <a:lstStyle/>
+          <a:p>
+            <a:fld id="{F7021451-1387-4CA6-816F-3879F97B5CBC}" type="slidenum">
+              <a:rPr lang="en-US"/>
+              <a:t>35</a:t>
+            </a:fld>
+            <a:endParaRPr lang="en-US"/>
+          </a:p>
+        </p:txBody>
+      </p:sp>
+    </p:spTree>
+    <p:extLst>
+      <p:ext uri="{BB962C8B-B14F-4D97-AF65-F5344CB8AC3E}">
+        <p14:creationId xmlns:p14="http://schemas.microsoft.com/office/powerpoint/2010/main" val="1024086991"/>
+      </p:ext>
+    </p:extLst>
+  </p:cSld>
+  <p:clrMapOvr>
+    <a:masterClrMapping/>
+  </p:clrMapOvr>
+</p:notes>
+</file>
+
+<file path=ppt/notesSlides/notesSlide36.xml><?xml version="1.0" encoding="utf-8"?>
+<p:notes xmlns:a="http://schemas.openxmlformats.org/drawingml/2006/main" xmlns:r="http://schemas.openxmlformats.org/officeDocument/2006/relationships" xmlns:p="http://schemas.openxmlformats.org/presentationml/2006/main">
+  <p:cSld>
+    <p:spTree>
+      <p:nvGrpSpPr>
+        <p:cNvPr id="1" name=""/>
+        <p:cNvGrpSpPr/>
+        <p:nvPr/>
+      </p:nvGrpSpPr>
+      <p:grpSpPr>
+        <a:xfrm>
+          <a:off x="0" y="0"/>
+          <a:ext cx="0" cy="0"/>
+          <a:chOff x="0" y="0"/>
+          <a:chExt cx="0" cy="0"/>
+        </a:xfrm>
+      </p:grpSpPr>
+      <p:sp>
+        <p:nvSpPr>
+          <p:cNvPr id="2" name="Slide Image Placeholder 1"/>
+          <p:cNvSpPr>
+            <a:spLocks noGrp="1" noRot="1" noChangeAspect="1"/>
+          </p:cNvSpPr>
+          <p:nvPr>
+            <p:ph type="sldImg"/>
+          </p:nvPr>
+        </p:nvSpPr>
+        <p:spPr/>
+      </p:sp>
+      <p:sp>
+        <p:nvSpPr>
+          <p:cNvPr id="3" name="Notes Placeholder 2"/>
+          <p:cNvSpPr>
+            <a:spLocks noGrp="1"/>
+          </p:cNvSpPr>
+          <p:nvPr>
+            <p:ph type="body" idx="1"/>
+          </p:nvPr>
+        </p:nvSpPr>
+        <p:spPr/>
+        <p:txBody>
+          <a:bodyPr/>
+          <a:lstStyle/>
+          <a:p>
+            <a:r>
+              <a:rPr lang="en-US" dirty="0"/>
+              <a:t>Cierre: abrir preguntas. Recordar dónde está la ayuda.</a:t>
+            </a:r>
+            <a:endParaRPr lang="en-US" dirty="0"/>
+          </a:p>
+        </p:txBody>
+      </p:sp>
+      <p:sp>
+        <p:nvSpPr>
+          <p:cNvPr id="4" name="Slide Number Placeholder 3"/>
+          <p:cNvSpPr>
+            <a:spLocks noGrp="1"/>
+          </p:cNvSpPr>
+          <p:nvPr>
+            <p:ph type="sldNum" sz="quarter" idx="10"/>
+          </p:nvPr>
+        </p:nvSpPr>
+        <p:spPr/>
+        <p:txBody>
+          <a:bodyPr/>
+          <a:lstStyle/>
+          <a:p>
+            <a:fld id="{F7021451-1387-4CA6-816F-3879F97B5CBC}" type="slidenum">
+              <a:rPr lang="en-US"/>
+              <a:t>36</a:t>
             </a:fld>
             <a:endParaRPr lang="en-US"/>
           </a:p>
@@ -3738,7 +4008,7 @@
                   <a:schemeClr val="bg1"/>
                 </a:solidFill>
               </a:rPr>
-              <a:t>Pinturas Liz · Capacitación · versión 0.7.0</a:t>
+              <a:t>Pinturas Liz · Capacitación · versión 0.8.0</a:t>
             </a:r>
             <a:endParaRPr lang="en-US" sz="900" dirty="0"/>
           </a:p>
@@ -3869,7 +4139,7 @@
                   <a:schemeClr val="accent6"/>
                 </a:solidFill>
               </a:rPr>
-              <a:t>Pinturas Liz · Capacitación · versión 0.7.0</a:t>
+              <a:t>Pinturas Liz · Capacitación · versión 0.8.0</a:t>
             </a:r>
             <a:endParaRPr lang="en-US" sz="900" dirty="0"/>
           </a:p>
@@ -4340,7 +4610,7 @@
                   <a:schemeClr val="bg1"/>
                 </a:solidFill>
               </a:rPr>
-              <a:t>Capacitación de usuarios · versión 0.7.0</a:t>
+              <a:t>Capacitación de usuarios · versión 0.8.0</a:t>
             </a:r>
             <a:endParaRPr lang="en-US" sz="1800" dirty="0"/>
           </a:p>
@@ -11525,8 +11795,8 @@
         </p:nvSpPr>
         <p:spPr>
           <a:xfrm>
-            <a:off x="548640" y="1371600"/>
-            <a:ext cx="5669280" cy="914400"/>
+            <a:off x="457200" y="256032"/>
+            <a:ext cx="7863840" cy="594360"/>
           </a:xfrm>
           <a:prstGeom prst="rect">
             <a:avLst/>
@@ -11535,92 +11805,61 @@
           <a:ln/>
         </p:spPr>
         <p:txBody>
-          <a:bodyPr wrap="square" lIns="0" tIns="0" rIns="0" bIns="0" rtlCol="0" anchor="b"/>
+          <a:bodyPr wrap="square" lIns="0" tIns="0" rIns="0" bIns="0" rtlCol="0" anchor="ctr"/>
           <a:lstStyle/>
           <a:p>
             <a:pPr algn="l" indent="0" marL="0">
               <a:buNone/>
             </a:pPr>
             <a:r>
-              <a:rPr lang="en-US" sz="4000" b="1" dirty="0">
-                <a:solidFill>
-                  <a:schemeClr val="bg1"/>
-                </a:solidFill>
-              </a:rPr>
-              <a:t>Socios y Desarrollador</a:t>
-            </a:r>
-            <a:endParaRPr lang="en-US" sz="4000" dirty="0"/>
-          </a:p>
-        </p:txBody>
-      </p:sp>
-      <p:sp>
-        <p:nvSpPr>
-          <p:cNvPr id="3" name="Text 0"/>
+              <a:rPr lang="en-US" sz="2800" b="1" dirty="0">
+                <a:solidFill>
+                  <a:schemeClr val="tx2"/>
+                </a:solidFill>
+              </a:rPr>
+              <a:t>Análisis: cómo va la empresa</a:t>
+            </a:r>
+            <a:endParaRPr lang="en-US" sz="2800" dirty="0"/>
+          </a:p>
+        </p:txBody>
+      </p:sp>
+      <p:sp>
+        <p:nvSpPr>
+          <p:cNvPr id="4" name="Marco an-resumen"/>
           <p:cNvSpPr/>
-          <p:nvPr>
-            <p:ph idx="101" type="body" hasCustomPrompt="1"/>
-          </p:nvPr>
-        </p:nvSpPr>
-        <p:spPr>
-          <a:xfrm>
-            <a:off x="548640" y="2423160"/>
-            <a:ext cx="5669280" cy="1463040"/>
-          </a:xfrm>
-          <a:prstGeom prst="rect">
-            <a:avLst/>
-          </a:prstGeom>
-          <a:noFill/>
-          <a:ln/>
-        </p:spPr>
-        <p:txBody>
-          <a:bodyPr wrap="square" lIns="0" tIns="0" rIns="0" bIns="0" rtlCol="0" anchor="t"/>
-          <a:lstStyle/>
-          <a:p>
-            <a:pPr indent="0" marL="0">
-              <a:buNone/>
-            </a:pPr>
-            <a:r>
-              <a:rPr lang="en-US" sz="1800" dirty="0">
-                <a:solidFill>
-                  <a:schemeClr val="bg1"/>
-                </a:solidFill>
-              </a:rPr>
-              <a:t>Ven y pueden hacer todo. Además: perfiles, medidas nuevas, límites de crédito y alertas. El Desarrollador evalúa las mejoras.</a:t>
-            </a:r>
-            <a:endParaRPr lang="en-US" sz="1800" dirty="0"/>
-          </a:p>
-        </p:txBody>
-      </p:sp>
-      <p:sp>
-        <p:nvSpPr>
-          <p:cNvPr id="4" name="Tarjeta perfil"/>
-          <p:cNvSpPr/>
-          <p:nvPr/>
-        </p:nvSpPr>
-        <p:spPr>
-          <a:xfrm>
-            <a:off x="6583680" y="1417320"/>
-            <a:ext cx="2011680" cy="2377440"/>
+          <p:nvPr/>
+        </p:nvSpPr>
+        <p:spPr>
+          <a:xfrm>
+            <a:off x="420624" y="923544"/>
+            <a:ext cx="3815812" cy="2587752"/>
           </a:xfrm>
           <a:prstGeom prst="roundRect">
             <a:avLst>
-              <a:gd name="adj" fmla="val 6818"/>
+              <a:gd name="adj" fmla="val 2120"/>
             </a:avLst>
           </a:prstGeom>
           <a:solidFill>
             <a:schemeClr val="bg1"/>
           </a:solidFill>
-          <a:ln w="12700">
+          <a:ln w="9525">
             <a:solidFill>
-              <a:schemeClr val="bg1"/>
+              <a:srgbClr val="D3DCEC"/>
             </a:solidFill>
             <a:prstDash val="solid"/>
           </a:ln>
+          <a:effectLst>
+            <a:outerShdw sx="100000" sy="100000" kx="0" ky="0" algn="bl" rotWithShape="0" blurRad="76200" dist="25400" dir="5400000">
+              <a:srgbClr val="0F1E3D">
+                <a:alpha val="18000"/>
+              </a:srgbClr>
+            </a:outerShdw>
+          </a:effectLst>
         </p:spPr>
       </p:sp>
       <p:pic>
         <p:nvPicPr>
-          <p:cNvPr id="5" name="Logo" descr="/home/claude/pinturas-liz-app/public/logo.png">    </p:cNvPr>
+          <p:cNvPr id="5" name="Captura an-resumen" descr="Pantalla de la aplicación: an resumen">    </p:cNvPr>
           <p:cNvPicPr>
             <a:picLocks noChangeAspect="1"/>
           </p:cNvPicPr>
@@ -11634,8 +11873,8 @@
         </p:blipFill>
         <p:spPr>
           <a:xfrm>
-            <a:off x="6812280" y="1600200"/>
-            <a:ext cx="1554480" cy="1161288"/>
+            <a:off x="457200" y="960120"/>
+            <a:ext cx="3742660" cy="2514600"/>
           </a:xfrm>
           <a:prstGeom prst="rect">
             <a:avLst/>
@@ -11644,14 +11883,39 @@
       </p:pic>
       <p:sp>
         <p:nvSpPr>
-          <p:cNvPr id="6" name="Quién"/>
+          <p:cNvPr id="6" name="Paso 1"/>
+          <p:cNvSpPr/>
+          <p:nvPr/>
+        </p:nvSpPr>
+        <p:spPr>
+          <a:xfrm>
+            <a:off x="4937760" y="1005840"/>
+            <a:ext cx="384048" cy="384048"/>
+          </a:xfrm>
+          <a:prstGeom prst="ellipse">
+            <a:avLst/>
+          </a:prstGeom>
+          <a:solidFill>
+            <a:schemeClr val="accent1"/>
+          </a:solidFill>
+          <a:ln w="12700">
+            <a:solidFill>
+              <a:schemeClr val="accent1"/>
+            </a:solidFill>
+            <a:prstDash val="solid"/>
+          </a:ln>
+        </p:spPr>
+      </p:sp>
+      <p:sp>
+        <p:nvSpPr>
+          <p:cNvPr id="7" name="Número 1"/>
           <p:cNvSpPr txBox="1"/>
           <p:nvPr/>
         </p:nvSpPr>
         <p:spPr>
           <a:xfrm>
-            <a:off x="6675120" y="2880360"/>
-            <a:ext cx="1828800" cy="822960"/>
+            <a:off x="4937760" y="1005840"/>
+            <a:ext cx="384048" cy="384048"/>
           </a:xfrm>
           <a:prstGeom prst="rect">
             <a:avLst/>
@@ -11667,28 +11931,549 @@
               <a:buNone/>
             </a:pPr>
             <a:r>
-              <a:rPr lang="en-US" sz="1300" b="1" dirty="0">
+              <a:rPr lang="en-US" sz="1400" b="1" dirty="0">
+                <a:solidFill>
+                  <a:schemeClr val="bg1"/>
+                </a:solidFill>
+              </a:rPr>
+              <a:t>1</a:t>
+            </a:r>
+            <a:endParaRPr lang="en-US" sz="1400" dirty="0"/>
+          </a:p>
+        </p:txBody>
+      </p:sp>
+      <p:sp>
+        <p:nvSpPr>
+          <p:cNvPr id="8" name="Texto paso 1"/>
+          <p:cNvSpPr txBox="1"/>
+          <p:nvPr/>
+        </p:nvSpPr>
+        <p:spPr>
+          <a:xfrm>
+            <a:off x="5458968" y="969264"/>
+            <a:ext cx="3227832" cy="868680"/>
+          </a:xfrm>
+          <a:prstGeom prst="rect">
+            <a:avLst/>
+          </a:prstGeom>
+          <a:noFill/>
+          <a:ln/>
+        </p:spPr>
+        <p:txBody>
+          <a:bodyPr wrap="square" lIns="0" tIns="0" rIns="0" bIns="0" rtlCol="0" anchor="t"/>
+          <a:lstStyle/>
+          <a:p>
+            <a:pPr indent="0" marL="0">
+              <a:spcAft>
+                <a:spcPts val="200"/>
+              </a:spcAft>
+              <a:buNone/>
+            </a:pPr>
+            <a:r>
+              <a:rPr lang="en-US" sz="1400" b="1" dirty="0">
                 <a:solidFill>
                   <a:schemeClr val="tx2"/>
                 </a:solidFill>
               </a:rPr>
-              <a:t>Giovanni · Liz · Bryan</a:t>
-            </a:r>
-            <a:endParaRPr lang="en-US" sz="1300" dirty="0"/>
-          </a:p>
+              <a:t>Abre Análisis</a:t>
+            </a:r>
+            <a:endParaRPr lang="en-US" sz="1400" dirty="0"/>
+          </a:p>
+          <a:p>
+            <a:pPr indent="0" marL="0">
+              <a:spcAft>
+                <a:spcPts val="200"/>
+              </a:spcAft>
+              <a:buNone/>
+            </a:pPr>
+            <a:r>
+              <a:rPr lang="en-US" sz="1400" dirty="0">
+                <a:solidFill>
+                  <a:schemeClr val="tx1"/>
+                </a:solidFill>
+              </a:rPr>
+              <a:t>Último módulo del menú</a:t>
+            </a:r>
+            <a:endParaRPr lang="en-US" sz="1400" dirty="0"/>
+          </a:p>
+        </p:txBody>
+      </p:sp>
+      <p:sp>
+        <p:nvSpPr>
+          <p:cNvPr id="9" name="Paso 2"/>
+          <p:cNvSpPr/>
+          <p:nvPr/>
+        </p:nvSpPr>
+        <p:spPr>
+          <a:xfrm>
+            <a:off x="4937760" y="1874520"/>
+            <a:ext cx="384048" cy="384048"/>
+          </a:xfrm>
+          <a:prstGeom prst="ellipse">
+            <a:avLst/>
+          </a:prstGeom>
+          <a:solidFill>
+            <a:schemeClr val="accent5"/>
+          </a:solidFill>
+          <a:ln w="12700">
+            <a:solidFill>
+              <a:schemeClr val="accent5"/>
+            </a:solidFill>
+            <a:prstDash val="solid"/>
+          </a:ln>
+        </p:spPr>
+      </p:sp>
+      <p:sp>
+        <p:nvSpPr>
+          <p:cNvPr id="10" name="Número 2"/>
+          <p:cNvSpPr txBox="1"/>
+          <p:nvPr/>
+        </p:nvSpPr>
+        <p:spPr>
+          <a:xfrm>
+            <a:off x="4937760" y="1874520"/>
+            <a:ext cx="384048" cy="384048"/>
+          </a:xfrm>
+          <a:prstGeom prst="rect">
+            <a:avLst/>
+          </a:prstGeom>
+          <a:noFill/>
+          <a:ln/>
+        </p:spPr>
+        <p:txBody>
+          <a:bodyPr wrap="square" lIns="0" tIns="0" rIns="0" bIns="0" rtlCol="0" anchor="ctr"/>
+          <a:lstStyle/>
           <a:p>
             <a:pPr algn="ctr" indent="0" marL="0">
               <a:buNone/>
             </a:pPr>
             <a:r>
-              <a:rPr lang="en-US" sz="1300" b="1" dirty="0">
+              <a:rPr lang="en-US" sz="1400" b="1" dirty="0">
+                <a:solidFill>
+                  <a:schemeClr val="bg1"/>
+                </a:solidFill>
+              </a:rPr>
+              <a:t>2</a:t>
+            </a:r>
+            <a:endParaRPr lang="en-US" sz="1400" dirty="0"/>
+          </a:p>
+        </p:txBody>
+      </p:sp>
+      <p:sp>
+        <p:nvSpPr>
+          <p:cNvPr id="11" name="Texto paso 2"/>
+          <p:cNvSpPr txBox="1"/>
+          <p:nvPr/>
+        </p:nvSpPr>
+        <p:spPr>
+          <a:xfrm>
+            <a:off x="5458968" y="1837944"/>
+            <a:ext cx="3227832" cy="868680"/>
+          </a:xfrm>
+          <a:prstGeom prst="rect">
+            <a:avLst/>
+          </a:prstGeom>
+          <a:noFill/>
+          <a:ln/>
+        </p:spPr>
+        <p:txBody>
+          <a:bodyPr wrap="square" lIns="0" tIns="0" rIns="0" bIns="0" rtlCol="0" anchor="t"/>
+          <a:lstStyle/>
+          <a:p>
+            <a:pPr indent="0" marL="0">
+              <a:spcAft>
+                <a:spcPts val="200"/>
+              </a:spcAft>
+              <a:buNone/>
+            </a:pPr>
+            <a:r>
+              <a:rPr lang="en-US" sz="1400" b="1" dirty="0">
                 <a:solidFill>
                   <a:schemeClr val="tx2"/>
                 </a:solidFill>
               </a:rPr>
-              <a:t>Jordan (Desarrollador)</a:t>
-            </a:r>
-            <a:endParaRPr lang="en-US" sz="1300" dirty="0"/>
+              <a:t>Elige el período</a:t>
+            </a:r>
+            <a:endParaRPr lang="en-US" sz="1400" dirty="0"/>
+          </a:p>
+          <a:p>
+            <a:pPr indent="0" marL="0">
+              <a:spcAft>
+                <a:spcPts val="200"/>
+              </a:spcAft>
+              <a:buNone/>
+            </a:pPr>
+            <a:r>
+              <a:rPr lang="en-US" sz="1400" dirty="0">
+                <a:solidFill>
+                  <a:schemeClr val="tx1"/>
+                </a:solidFill>
+              </a:rPr>
+              <a:t>Este mes, 30 o 90 días, este año o todo</a:t>
+            </a:r>
+            <a:endParaRPr lang="en-US" sz="1400" dirty="0"/>
+          </a:p>
+        </p:txBody>
+      </p:sp>
+      <p:sp>
+        <p:nvSpPr>
+          <p:cNvPr id="12" name="Paso 3"/>
+          <p:cNvSpPr/>
+          <p:nvPr/>
+        </p:nvSpPr>
+        <p:spPr>
+          <a:xfrm>
+            <a:off x="4937760" y="2743200"/>
+            <a:ext cx="384048" cy="384048"/>
+          </a:xfrm>
+          <a:prstGeom prst="ellipse">
+            <a:avLst/>
+          </a:prstGeom>
+          <a:solidFill>
+            <a:schemeClr val="accent2"/>
+          </a:solidFill>
+          <a:ln w="12700">
+            <a:solidFill>
+              <a:schemeClr val="accent2"/>
+            </a:solidFill>
+            <a:prstDash val="solid"/>
+          </a:ln>
+        </p:spPr>
+      </p:sp>
+      <p:sp>
+        <p:nvSpPr>
+          <p:cNvPr id="13" name="Número 3"/>
+          <p:cNvSpPr txBox="1"/>
+          <p:nvPr/>
+        </p:nvSpPr>
+        <p:spPr>
+          <a:xfrm>
+            <a:off x="4937760" y="2743200"/>
+            <a:ext cx="384048" cy="384048"/>
+          </a:xfrm>
+          <a:prstGeom prst="rect">
+            <a:avLst/>
+          </a:prstGeom>
+          <a:noFill/>
+          <a:ln/>
+        </p:spPr>
+        <p:txBody>
+          <a:bodyPr wrap="square" lIns="0" tIns="0" rIns="0" bIns="0" rtlCol="0" anchor="ctr"/>
+          <a:lstStyle/>
+          <a:p>
+            <a:pPr algn="ctr" indent="0" marL="0">
+              <a:buNone/>
+            </a:pPr>
+            <a:r>
+              <a:rPr lang="en-US" sz="1400" b="1" dirty="0">
+                <a:solidFill>
+                  <a:schemeClr val="tx1"/>
+                </a:solidFill>
+              </a:rPr>
+              <a:t>3</a:t>
+            </a:r>
+            <a:endParaRPr lang="en-US" sz="1400" dirty="0"/>
+          </a:p>
+        </p:txBody>
+      </p:sp>
+      <p:sp>
+        <p:nvSpPr>
+          <p:cNvPr id="14" name="Texto paso 3"/>
+          <p:cNvSpPr txBox="1"/>
+          <p:nvPr/>
+        </p:nvSpPr>
+        <p:spPr>
+          <a:xfrm>
+            <a:off x="5458968" y="2706624"/>
+            <a:ext cx="3227832" cy="868680"/>
+          </a:xfrm>
+          <a:prstGeom prst="rect">
+            <a:avLst/>
+          </a:prstGeom>
+          <a:noFill/>
+          <a:ln/>
+        </p:spPr>
+        <p:txBody>
+          <a:bodyPr wrap="square" lIns="0" tIns="0" rIns="0" bIns="0" rtlCol="0" anchor="t"/>
+          <a:lstStyle/>
+          <a:p>
+            <a:pPr indent="0" marL="0">
+              <a:spcAft>
+                <a:spcPts val="200"/>
+              </a:spcAft>
+              <a:buNone/>
+            </a:pPr>
+            <a:r>
+              <a:rPr lang="en-US" sz="1400" b="1" dirty="0">
+                <a:solidFill>
+                  <a:schemeClr val="tx2"/>
+                </a:solidFill>
+              </a:rPr>
+              <a:t>Lee el Resumen</a:t>
+            </a:r>
+            <a:endParaRPr lang="en-US" sz="1400" dirty="0"/>
+          </a:p>
+          <a:p>
+            <a:pPr indent="0" marL="0">
+              <a:spcAft>
+                <a:spcPts val="200"/>
+              </a:spcAft>
+              <a:buNone/>
+            </a:pPr>
+            <a:r>
+              <a:rPr lang="en-US" sz="1400" dirty="0">
+                <a:solidFill>
+                  <a:schemeClr val="tx1"/>
+                </a:solidFill>
+              </a:rPr>
+              <a:t>Ventas, cobrado, por cobrar, producción, envasado y almacén</a:t>
+            </a:r>
+            <a:endParaRPr lang="en-US" sz="1400" dirty="0"/>
+          </a:p>
+        </p:txBody>
+      </p:sp>
+      <p:sp>
+        <p:nvSpPr>
+          <p:cNvPr id="15" name="Paso 4"/>
+          <p:cNvSpPr/>
+          <p:nvPr/>
+        </p:nvSpPr>
+        <p:spPr>
+          <a:xfrm>
+            <a:off x="4937760" y="3611880"/>
+            <a:ext cx="384048" cy="384048"/>
+          </a:xfrm>
+          <a:prstGeom prst="ellipse">
+            <a:avLst/>
+          </a:prstGeom>
+          <a:solidFill>
+            <a:schemeClr val="accent4"/>
+          </a:solidFill>
+          <a:ln w="12700">
+            <a:solidFill>
+              <a:schemeClr val="accent4"/>
+            </a:solidFill>
+            <a:prstDash val="solid"/>
+          </a:ln>
+        </p:spPr>
+      </p:sp>
+      <p:sp>
+        <p:nvSpPr>
+          <p:cNvPr id="16" name="Número 4"/>
+          <p:cNvSpPr txBox="1"/>
+          <p:nvPr/>
+        </p:nvSpPr>
+        <p:spPr>
+          <a:xfrm>
+            <a:off x="4937760" y="3611880"/>
+            <a:ext cx="384048" cy="384048"/>
+          </a:xfrm>
+          <a:prstGeom prst="rect">
+            <a:avLst/>
+          </a:prstGeom>
+          <a:noFill/>
+          <a:ln/>
+        </p:spPr>
+        <p:txBody>
+          <a:bodyPr wrap="square" lIns="0" tIns="0" rIns="0" bIns="0" rtlCol="0" anchor="ctr"/>
+          <a:lstStyle/>
+          <a:p>
+            <a:pPr algn="ctr" indent="0" marL="0">
+              <a:buNone/>
+            </a:pPr>
+            <a:r>
+              <a:rPr lang="en-US" sz="1400" b="1" dirty="0">
+                <a:solidFill>
+                  <a:schemeClr val="bg1"/>
+                </a:solidFill>
+              </a:rPr>
+              <a:t>4</a:t>
+            </a:r>
+            <a:endParaRPr lang="en-US" sz="1400" dirty="0"/>
+          </a:p>
+        </p:txBody>
+      </p:sp>
+      <p:sp>
+        <p:nvSpPr>
+          <p:cNvPr id="17" name="Texto paso 4"/>
+          <p:cNvSpPr txBox="1"/>
+          <p:nvPr/>
+        </p:nvSpPr>
+        <p:spPr>
+          <a:xfrm>
+            <a:off x="5458968" y="3575304"/>
+            <a:ext cx="3227832" cy="868680"/>
+          </a:xfrm>
+          <a:prstGeom prst="rect">
+            <a:avLst/>
+          </a:prstGeom>
+          <a:noFill/>
+          <a:ln/>
+        </p:spPr>
+        <p:txBody>
+          <a:bodyPr wrap="square" lIns="0" tIns="0" rIns="0" bIns="0" rtlCol="0" anchor="t"/>
+          <a:lstStyle/>
+          <a:p>
+            <a:pPr indent="0" marL="0">
+              <a:spcAft>
+                <a:spcPts val="200"/>
+              </a:spcAft>
+              <a:buNone/>
+            </a:pPr>
+            <a:r>
+              <a:rPr lang="en-US" sz="1400" b="1" dirty="0">
+                <a:solidFill>
+                  <a:schemeClr val="tx2"/>
+                </a:solidFill>
+              </a:rPr>
+              <a:t>Toca una barra</a:t>
+            </a:r>
+            <a:endParaRPr lang="en-US" sz="1400" dirty="0"/>
+          </a:p>
+          <a:p>
+            <a:pPr indent="0" marL="0">
+              <a:spcAft>
+                <a:spcPts val="200"/>
+              </a:spcAft>
+              <a:buNone/>
+            </a:pPr>
+            <a:r>
+              <a:rPr lang="en-US" sz="1400" dirty="0">
+                <a:solidFill>
+                  <a:schemeClr val="tx1"/>
+                </a:solidFill>
+              </a:rPr>
+              <a:t>Muestra el mes y el monto exacto</a:t>
+            </a:r>
+            <a:endParaRPr lang="en-US" sz="1400" dirty="0"/>
+          </a:p>
+        </p:txBody>
+      </p:sp>
+      <p:sp>
+        <p:nvSpPr>
+          <p:cNvPr id="18" name="Tarjeta Borde rojo = atención"/>
+          <p:cNvSpPr/>
+          <p:nvPr/>
+        </p:nvSpPr>
+        <p:spPr>
+          <a:xfrm>
+            <a:off x="457200" y="3703320"/>
+            <a:ext cx="4206240" cy="914400"/>
+          </a:xfrm>
+          <a:prstGeom prst="roundRect">
+            <a:avLst>
+              <a:gd name="adj" fmla="val 8000"/>
+            </a:avLst>
+          </a:prstGeom>
+          <a:solidFill>
+            <a:schemeClr val="bg2"/>
+          </a:solidFill>
+          <a:ln w="9525">
+            <a:solidFill>
+              <a:srgbClr val="D3DCEC"/>
+            </a:solidFill>
+            <a:prstDash val="solid"/>
+          </a:ln>
+        </p:spPr>
+      </p:sp>
+      <p:sp>
+        <p:nvSpPr>
+          <p:cNvPr id="19" name="Texto Borde rojo = atención"/>
+          <p:cNvSpPr txBox="1"/>
+          <p:nvPr/>
+        </p:nvSpPr>
+        <p:spPr>
+          <a:xfrm>
+            <a:off x="594360" y="3794760"/>
+            <a:ext cx="3931920" cy="731520"/>
+          </a:xfrm>
+          <a:prstGeom prst="rect">
+            <a:avLst/>
+          </a:prstGeom>
+          <a:noFill/>
+          <a:ln/>
+        </p:spPr>
+        <p:txBody>
+          <a:bodyPr wrap="square" lIns="0" tIns="0" rIns="0" bIns="0" rtlCol="0" anchor="t"/>
+          <a:lstStyle/>
+          <a:p>
+            <a:pPr indent="0" marL="0">
+              <a:spcAft>
+                <a:spcPts val="300"/>
+              </a:spcAft>
+              <a:buNone/>
+            </a:pPr>
+            <a:r>
+              <a:rPr lang="en-US" sz="1400" b="1" dirty="0">
+                <a:solidFill>
+                  <a:schemeClr val="accent1"/>
+                </a:solidFill>
+              </a:rPr>
+              <a:t>Borde rojo = atención</a:t>
+            </a:r>
+            <a:endParaRPr lang="en-US" sz="1400" dirty="0"/>
+          </a:p>
+          <a:p>
+            <a:pPr indent="0" marL="0">
+              <a:spcAft>
+                <a:spcPts val="300"/>
+              </a:spcAft>
+              <a:buNone/>
+            </a:pPr>
+            <a:r>
+              <a:rPr lang="en-US" sz="1300" dirty="0">
+                <a:solidFill>
+                  <a:schemeClr val="tx1"/>
+                </a:solidFill>
+              </a:rPr>
+              <a:t>Hay deuda vencida o artículos bajo el mínimo.</a:t>
+            </a:r>
+            <a:endParaRPr lang="en-US" sz="1400" dirty="0"/>
+          </a:p>
+        </p:txBody>
+      </p:sp>
+      <p:sp>
+        <p:nvSpPr>
+          <p:cNvPr id="25" name="Slide Number Placeholder 0"/>
+          <p:cNvSpPr>
+            <a:spLocks noGrp="1"/>
+          </p:cNvSpPr>
+          <p:nvPr>
+            <p:ph type="sldNum" sz="quarter" idx="4294967295"/>
+          </p:nvPr>
+        </p:nvSpPr>
+        <p:spPr>
+          <a:xfrm>
+            <a:off x="457200" y="4828032"/>
+            <a:ext cx="320040" cy="201168"/>
+          </a:xfrm>
+          <a:prstGeom prst="rect">
+            <a:avLst/>
+          </a:prstGeom>
+          <a:extLst>
+            <a:ext uri="{C572A759-6A51-4108-AA02-DFA0A04FC94B}">
+              <ma14:wrappingTextBoxFlag xmlns:ma14="http://schemas.microsoft.com/office/mac/drawingml/2011/main" val="0"/>
+            </a:ext>
+          </a:extLst>
+        </p:spPr>
+        <p:txBody>
+          <a:bodyPr lIns="0" tIns="0" rIns="0" bIns="0"/>
+          <a:lstStyle>
+            <a:lvl1pPr>
+              <a:defRPr sz="900">
+                <a:solidFill>
+                  <a:schemeClr val="accent6"/>
+                </a:solidFill>
+              </a:defRPr>
+            </a:lvl1pPr>
+          </a:lstStyle>
+          <a:p>
+            <a:pPr algn="l"/>
+            <a:fld id="{F7021451-1387-4CA6-816F-3879F97B5CBC}" type="slidenum">
+              <a:rPr b="0" lang="en-US"/>
+              <a:t>22</a:t>
+            </a:fld>
+            <a:endParaRPr lang="en-US"/>
           </a:p>
         </p:txBody>
       </p:sp>
@@ -11749,7 +12534,7 @@
                   <a:schemeClr val="tx2"/>
                 </a:solidFill>
               </a:rPr>
-              <a:t>Alertas, novedades y mejoras</a:t>
+              <a:t>Análisis: cobranzas y almacén</a:t>
             </a:r>
             <a:endParaRPr lang="en-US" sz="2800" dirty="0"/>
           </a:p>
@@ -11757,14 +12542,14 @@
       </p:sp>
       <p:sp>
         <p:nvSpPr>
-          <p:cNvPr id="4" name="Marco socio-alertas"/>
+          <p:cNvPr id="4" name="Marco an-cobranzas"/>
           <p:cNvSpPr/>
           <p:nvPr/>
         </p:nvSpPr>
         <p:spPr>
           <a:xfrm>
             <a:off x="420624" y="923544"/>
-            <a:ext cx="3730752" cy="2359152"/>
+            <a:ext cx="3475571" cy="2359152"/>
           </a:xfrm>
           <a:prstGeom prst="roundRect">
             <a:avLst>
@@ -11791,7 +12576,7 @@
       </p:sp>
       <p:pic>
         <p:nvPicPr>
-          <p:cNvPr id="5" name="Captura socio-alertas" descr="Pantalla de la aplicación: socio alertas">    </p:cNvPr>
+          <p:cNvPr id="5" name="Captura an-cobranzas" descr="Pantalla de la aplicación: an cobranzas">    </p:cNvPr>
           <p:cNvPicPr>
             <a:picLocks noChangeAspect="1"/>
           </p:cNvPicPr>
@@ -11806,7 +12591,7 @@
         <p:spPr>
           <a:xfrm>
             <a:off x="457200" y="960120"/>
-            <a:ext cx="3657600" cy="2286000"/>
+            <a:ext cx="3402419" cy="2286000"/>
           </a:xfrm>
           <a:prstGeom prst="rect">
             <a:avLst/>
@@ -11815,14 +12600,14 @@
       </p:pic>
       <p:sp>
         <p:nvSpPr>
-          <p:cNvPr id="6" name="Marco dev-mejoras"/>
+          <p:cNvPr id="6" name="Marco an-almacen"/>
           <p:cNvSpPr/>
           <p:nvPr/>
         </p:nvSpPr>
         <p:spPr>
           <a:xfrm>
             <a:off x="4626864" y="923544"/>
-            <a:ext cx="3730752" cy="2359152"/>
+            <a:ext cx="3475571" cy="2359152"/>
           </a:xfrm>
           <a:prstGeom prst="roundRect">
             <a:avLst>
@@ -11849,7 +12634,7 @@
       </p:sp>
       <p:pic>
         <p:nvPicPr>
-          <p:cNvPr id="7" name="Captura dev-mejoras" descr="Pantalla de la aplicación: dev mejoras">    </p:cNvPr>
+          <p:cNvPr id="7" name="Captura an-almacen" descr="Pantalla de la aplicación: an almacen">    </p:cNvPr>
           <p:cNvPicPr>
             <a:picLocks noChangeAspect="1"/>
           </p:cNvPicPr>
@@ -11864,7 +12649,7 @@
         <p:spPr>
           <a:xfrm>
             <a:off x="4663440" y="960120"/>
-            <a:ext cx="3657600" cy="2286000"/>
+            <a:ext cx="3402419" cy="2286000"/>
           </a:xfrm>
           <a:prstGeom prst="rect">
             <a:avLst/>
@@ -11873,7 +12658,7 @@
       </p:pic>
       <p:sp>
         <p:nvSpPr>
-          <p:cNvPr id="8" name="Tarjeta Alertas"/>
+          <p:cNvPr id="8" name="Tarjeta Cobranzas"/>
           <p:cNvSpPr/>
           <p:nvPr/>
         </p:nvSpPr>
@@ -11900,7 +12685,7 @@
       </p:sp>
       <p:sp>
         <p:nvSpPr>
-          <p:cNvPr id="9" name="Texto Alertas"/>
+          <p:cNvPr id="9" name="Texto Cobranzas"/>
           <p:cNvSpPr txBox="1"/>
           <p:nvPr/>
         </p:nvSpPr>
@@ -11928,10 +12713,10 @@
             <a:r>
               <a:rPr lang="en-US" sz="1400" b="1" dirty="0">
                 <a:solidFill>
-                  <a:schemeClr val="accent1"/>
-                </a:solidFill>
-              </a:rPr>
-              <a:t>Alertas</a:t>
+                  <a:schemeClr val="tx2"/>
+                </a:solidFill>
+              </a:rPr>
+              <a:t>Cobranzas</a:t>
             </a:r>
             <a:endParaRPr lang="en-US" sz="1400" dirty="0"/>
           </a:p>
@@ -11948,7 +12733,7 @@
                   <a:schemeClr val="tx1"/>
                 </a:solidFill>
               </a:rPr>
-              <a:t>Comenta, corrige el dato y marca resuelta. Solo socios y Desarrollador resuelven.</a:t>
+              <a:t>Cobrado por mes, medio y persona. Deuda y vencido por cliente, con su límite.</a:t>
             </a:r>
             <a:endParaRPr lang="en-US" sz="1400" dirty="0"/>
           </a:p>
@@ -11956,7 +12741,7 @@
       </p:sp>
       <p:sp>
         <p:nvSpPr>
-          <p:cNvPr id="10" name="Tarjeta Sugerencias de mejora"/>
+          <p:cNvPr id="10" name="Tarjeta Almacén"/>
           <p:cNvSpPr/>
           <p:nvPr/>
         </p:nvSpPr>
@@ -11983,7 +12768,7 @@
       </p:sp>
       <p:sp>
         <p:nvSpPr>
-          <p:cNvPr id="11" name="Texto Sugerencias de mejora"/>
+          <p:cNvPr id="11" name="Texto Almacén"/>
           <p:cNvSpPr txBox="1"/>
           <p:nvPr/>
         </p:nvSpPr>
@@ -12014,7 +12799,7 @@
                   <a:schemeClr val="accent4"/>
                 </a:solidFill>
               </a:rPr>
-              <a:t>Sugerencias de mejora</a:t>
+              <a:t>Almacén</a:t>
             </a:r>
             <a:endParaRPr lang="en-US" sz="1400" dirty="0"/>
           </a:p>
@@ -12031,7 +12816,7 @@
                   <a:schemeClr val="tx1"/>
                 </a:solidFill>
               </a:rPr>
-              <a:t>Las envía cualquier perfil; el Desarrollador las evalúa para próximas versiones.</a:t>
+              <a:t>Existencias por almacén, lo que hay que reponer y el granel disponible.</a:t>
             </a:r>
             <a:endParaRPr lang="en-US" sz="1400" dirty="0"/>
           </a:p>
@@ -12117,8 +12902,8 @@
         </p:nvSpPr>
         <p:spPr>
           <a:xfrm>
-            <a:off x="457200" y="256032"/>
-            <a:ext cx="7863840" cy="594360"/>
+            <a:off x="548640" y="1371600"/>
+            <a:ext cx="5669280" cy="914400"/>
           </a:xfrm>
           <a:prstGeom prst="rect">
             <a:avLst/>
@@ -12127,61 +12912,92 @@
           <a:ln/>
         </p:spPr>
         <p:txBody>
-          <a:bodyPr wrap="square" lIns="0" tIns="0" rIns="0" bIns="0" rtlCol="0" anchor="ctr"/>
+          <a:bodyPr wrap="square" lIns="0" tIns="0" rIns="0" bIns="0" rtlCol="0" anchor="b"/>
           <a:lstStyle/>
           <a:p>
             <a:pPr algn="l" indent="0" marL="0">
               <a:buNone/>
             </a:pPr>
             <a:r>
-              <a:rPr lang="en-US" sz="2800" b="1" dirty="0">
-                <a:solidFill>
-                  <a:schemeClr val="tx2"/>
-                </a:solidFill>
-              </a:rPr>
-              <a:t>Usuarios y decisiones exclusivas</a:t>
-            </a:r>
-            <a:endParaRPr lang="en-US" sz="2800" dirty="0"/>
-          </a:p>
-        </p:txBody>
-      </p:sp>
-      <p:sp>
-        <p:nvSpPr>
-          <p:cNvPr id="4" name="Marco socio-usuarios"/>
+              <a:rPr lang="en-US" sz="4000" b="1" dirty="0">
+                <a:solidFill>
+                  <a:schemeClr val="bg1"/>
+                </a:solidFill>
+              </a:rPr>
+              <a:t>Socios y Desarrollador</a:t>
+            </a:r>
+            <a:endParaRPr lang="en-US" sz="4000" dirty="0"/>
+          </a:p>
+        </p:txBody>
+      </p:sp>
+      <p:sp>
+        <p:nvSpPr>
+          <p:cNvPr id="3" name="Text 0"/>
           <p:cNvSpPr/>
-          <p:nvPr/>
-        </p:nvSpPr>
-        <p:spPr>
-          <a:xfrm>
-            <a:off x="420624" y="923544"/>
-            <a:ext cx="4023360" cy="2542032"/>
+          <p:nvPr>
+            <p:ph idx="101" type="body" hasCustomPrompt="1"/>
+          </p:nvPr>
+        </p:nvSpPr>
+        <p:spPr>
+          <a:xfrm>
+            <a:off x="548640" y="2423160"/>
+            <a:ext cx="5669280" cy="1463040"/>
+          </a:xfrm>
+          <a:prstGeom prst="rect">
+            <a:avLst/>
+          </a:prstGeom>
+          <a:noFill/>
+          <a:ln/>
+        </p:spPr>
+        <p:txBody>
+          <a:bodyPr wrap="square" lIns="0" tIns="0" rIns="0" bIns="0" rtlCol="0" anchor="t"/>
+          <a:lstStyle/>
+          <a:p>
+            <a:pPr indent="0" marL="0">
+              <a:buNone/>
+            </a:pPr>
+            <a:r>
+              <a:rPr lang="en-US" sz="1800" dirty="0">
+                <a:solidFill>
+                  <a:schemeClr val="bg1"/>
+                </a:solidFill>
+              </a:rPr>
+              <a:t>Ven y pueden hacer todo. Además: perfiles, medidas nuevas, límites de crédito y alertas. El Desarrollador evalúa las mejoras.</a:t>
+            </a:r>
+            <a:endParaRPr lang="en-US" sz="1800" dirty="0"/>
+          </a:p>
+        </p:txBody>
+      </p:sp>
+      <p:sp>
+        <p:nvSpPr>
+          <p:cNvPr id="4" name="Tarjeta perfil"/>
+          <p:cNvSpPr/>
+          <p:nvPr/>
+        </p:nvSpPr>
+        <p:spPr>
+          <a:xfrm>
+            <a:off x="6583680" y="1417320"/>
+            <a:ext cx="2011680" cy="2377440"/>
           </a:xfrm>
           <a:prstGeom prst="roundRect">
             <a:avLst>
-              <a:gd name="adj" fmla="val 2158"/>
+              <a:gd name="adj" fmla="val 6818"/>
             </a:avLst>
           </a:prstGeom>
           <a:solidFill>
             <a:schemeClr val="bg1"/>
           </a:solidFill>
-          <a:ln w="9525">
+          <a:ln w="12700">
             <a:solidFill>
-              <a:srgbClr val="D3DCEC"/>
+              <a:schemeClr val="bg1"/>
             </a:solidFill>
             <a:prstDash val="solid"/>
           </a:ln>
-          <a:effectLst>
-            <a:outerShdw sx="100000" sy="100000" kx="0" ky="0" algn="bl" rotWithShape="0" blurRad="76200" dist="25400" dir="5400000">
-              <a:srgbClr val="0F1E3D">
-                <a:alpha val="18000"/>
-              </a:srgbClr>
-            </a:outerShdw>
-          </a:effectLst>
         </p:spPr>
       </p:sp>
       <p:pic>
         <p:nvPicPr>
-          <p:cNvPr id="5" name="Captura socio-usuarios" descr="Pantalla de la aplicación: socio usuarios">    </p:cNvPr>
+          <p:cNvPr id="5" name="Logo" descr="/home/claude/pinturas-liz-app/public/logo.png">    </p:cNvPr>
           <p:cNvPicPr>
             <a:picLocks noChangeAspect="1"/>
           </p:cNvPicPr>
@@ -12195,8 +13011,8 @@
         </p:blipFill>
         <p:spPr>
           <a:xfrm>
-            <a:off x="457200" y="960120"/>
-            <a:ext cx="3950208" cy="2468880"/>
+            <a:off x="6812280" y="1600200"/>
+            <a:ext cx="1554480" cy="1161288"/>
           </a:xfrm>
           <a:prstGeom prst="rect">
             <a:avLst/>
@@ -12205,39 +13021,14 @@
       </p:pic>
       <p:sp>
         <p:nvSpPr>
-          <p:cNvPr id="6" name="Paso 1"/>
-          <p:cNvSpPr/>
-          <p:nvPr/>
-        </p:nvSpPr>
-        <p:spPr>
-          <a:xfrm>
-            <a:off x="4937760" y="1005840"/>
-            <a:ext cx="384048" cy="384048"/>
-          </a:xfrm>
-          <a:prstGeom prst="ellipse">
-            <a:avLst/>
-          </a:prstGeom>
-          <a:solidFill>
-            <a:schemeClr val="accent1"/>
-          </a:solidFill>
-          <a:ln w="12700">
-            <a:solidFill>
-              <a:schemeClr val="accent1"/>
-            </a:solidFill>
-            <a:prstDash val="solid"/>
-          </a:ln>
-        </p:spPr>
-      </p:sp>
-      <p:sp>
-        <p:nvSpPr>
-          <p:cNvPr id="7" name="Número 1"/>
+          <p:cNvPr id="6" name="Quién"/>
           <p:cNvSpPr txBox="1"/>
           <p:nvPr/>
         </p:nvSpPr>
         <p:spPr>
           <a:xfrm>
-            <a:off x="4937760" y="1005840"/>
-            <a:ext cx="384048" cy="384048"/>
+            <a:off x="6675120" y="2880360"/>
+            <a:ext cx="1828800" cy="822960"/>
           </a:xfrm>
           <a:prstGeom prst="rect">
             <a:avLst/>
@@ -12253,466 +13044,28 @@
               <a:buNone/>
             </a:pPr>
             <a:r>
-              <a:rPr lang="en-US" sz="1400" b="1" dirty="0">
-                <a:solidFill>
-                  <a:schemeClr val="bg1"/>
-                </a:solidFill>
-              </a:rPr>
-              <a:t>1</a:t>
-            </a:r>
-            <a:endParaRPr lang="en-US" sz="1400" dirty="0"/>
-          </a:p>
-        </p:txBody>
-      </p:sp>
-      <p:sp>
-        <p:nvSpPr>
-          <p:cNvPr id="8" name="Texto paso 1"/>
-          <p:cNvSpPr txBox="1"/>
-          <p:nvPr/>
-        </p:nvSpPr>
-        <p:spPr>
-          <a:xfrm>
-            <a:off x="5458968" y="969264"/>
-            <a:ext cx="3227832" cy="868680"/>
-          </a:xfrm>
-          <a:prstGeom prst="rect">
-            <a:avLst/>
-          </a:prstGeom>
-          <a:noFill/>
-          <a:ln/>
-        </p:spPr>
-        <p:txBody>
-          <a:bodyPr wrap="square" lIns="0" tIns="0" rIns="0" bIns="0" rtlCol="0" anchor="t"/>
-          <a:lstStyle/>
-          <a:p>
-            <a:pPr indent="0" marL="0">
-              <a:spcAft>
-                <a:spcPts val="200"/>
-              </a:spcAft>
-              <a:buNone/>
-            </a:pPr>
-            <a:r>
-              <a:rPr lang="en-US" sz="1400" b="1" dirty="0">
+              <a:rPr lang="en-US" sz="1300" b="1" dirty="0">
                 <a:solidFill>
                   <a:schemeClr val="tx2"/>
                 </a:solidFill>
               </a:rPr>
-              <a:t>Asignar perfiles</a:t>
-            </a:r>
-            <a:endParaRPr lang="en-US" sz="1400" dirty="0"/>
-          </a:p>
-          <a:p>
-            <a:pPr indent="0" marL="0">
-              <a:spcAft>
-                <a:spcPts val="200"/>
-              </a:spcAft>
-              <a:buNone/>
-            </a:pPr>
-            <a:r>
-              <a:rPr lang="en-US" sz="1400" dirty="0">
-                <a:solidFill>
-                  <a:schemeClr val="tx1"/>
-                </a:solidFill>
-              </a:rPr>
-              <a:t>Y activar o desactivar cuentas</a:t>
-            </a:r>
-            <a:endParaRPr lang="en-US" sz="1400" dirty="0"/>
-          </a:p>
-        </p:txBody>
-      </p:sp>
-      <p:sp>
-        <p:nvSpPr>
-          <p:cNvPr id="9" name="Paso 2"/>
-          <p:cNvSpPr/>
-          <p:nvPr/>
-        </p:nvSpPr>
-        <p:spPr>
-          <a:xfrm>
-            <a:off x="4937760" y="1874520"/>
-            <a:ext cx="384048" cy="384048"/>
-          </a:xfrm>
-          <a:prstGeom prst="ellipse">
-            <a:avLst/>
-          </a:prstGeom>
-          <a:solidFill>
-            <a:schemeClr val="accent5"/>
-          </a:solidFill>
-          <a:ln w="12700">
-            <a:solidFill>
-              <a:schemeClr val="accent5"/>
-            </a:solidFill>
-            <a:prstDash val="solid"/>
-          </a:ln>
-        </p:spPr>
-      </p:sp>
-      <p:sp>
-        <p:nvSpPr>
-          <p:cNvPr id="10" name="Número 2"/>
-          <p:cNvSpPr txBox="1"/>
-          <p:nvPr/>
-        </p:nvSpPr>
-        <p:spPr>
-          <a:xfrm>
-            <a:off x="4937760" y="1874520"/>
-            <a:ext cx="384048" cy="384048"/>
-          </a:xfrm>
-          <a:prstGeom prst="rect">
-            <a:avLst/>
-          </a:prstGeom>
-          <a:noFill/>
-          <a:ln/>
-        </p:spPr>
-        <p:txBody>
-          <a:bodyPr wrap="square" lIns="0" tIns="0" rIns="0" bIns="0" rtlCol="0" anchor="ctr"/>
-          <a:lstStyle/>
+              <a:t>Giovanni · Liz · Bryan</a:t>
+            </a:r>
+            <a:endParaRPr lang="en-US" sz="1300" dirty="0"/>
+          </a:p>
           <a:p>
             <a:pPr algn="ctr" indent="0" marL="0">
               <a:buNone/>
             </a:pPr>
             <a:r>
-              <a:rPr lang="en-US" sz="1400" b="1" dirty="0">
-                <a:solidFill>
-                  <a:schemeClr val="bg1"/>
-                </a:solidFill>
-              </a:rPr>
-              <a:t>2</a:t>
-            </a:r>
-            <a:endParaRPr lang="en-US" sz="1400" dirty="0"/>
-          </a:p>
-        </p:txBody>
-      </p:sp>
-      <p:sp>
-        <p:nvSpPr>
-          <p:cNvPr id="11" name="Texto paso 2"/>
-          <p:cNvSpPr txBox="1"/>
-          <p:nvPr/>
-        </p:nvSpPr>
-        <p:spPr>
-          <a:xfrm>
-            <a:off x="5458968" y="1837944"/>
-            <a:ext cx="3227832" cy="868680"/>
-          </a:xfrm>
-          <a:prstGeom prst="rect">
-            <a:avLst/>
-          </a:prstGeom>
-          <a:noFill/>
-          <a:ln/>
-        </p:spPr>
-        <p:txBody>
-          <a:bodyPr wrap="square" lIns="0" tIns="0" rIns="0" bIns="0" rtlCol="0" anchor="t"/>
-          <a:lstStyle/>
-          <a:p>
-            <a:pPr indent="0" marL="0">
-              <a:spcAft>
-                <a:spcPts val="200"/>
-              </a:spcAft>
-              <a:buNone/>
-            </a:pPr>
-            <a:r>
-              <a:rPr lang="en-US" sz="1400" b="1" dirty="0">
+              <a:rPr lang="en-US" sz="1300" b="1" dirty="0">
                 <a:solidFill>
                   <a:schemeClr val="tx2"/>
                 </a:solidFill>
               </a:rPr>
-              <a:t>Vincular vendedores</a:t>
-            </a:r>
-            <a:endParaRPr lang="en-US" sz="1400" dirty="0"/>
-          </a:p>
-          <a:p>
-            <a:pPr indent="0" marL="0">
-              <a:spcAft>
-                <a:spcPts val="200"/>
-              </a:spcAft>
-              <a:buNone/>
-            </a:pPr>
-            <a:r>
-              <a:rPr lang="en-US" sz="1400" dirty="0">
-                <a:solidFill>
-                  <a:schemeClr val="tx1"/>
-                </a:solidFill>
-              </a:rPr>
-              <a:t>«Vende como» Jorge, Lily, Giovanni, Liz…</a:t>
-            </a:r>
-            <a:endParaRPr lang="en-US" sz="1400" dirty="0"/>
-          </a:p>
-        </p:txBody>
-      </p:sp>
-      <p:sp>
-        <p:nvSpPr>
-          <p:cNvPr id="12" name="Paso 3"/>
-          <p:cNvSpPr/>
-          <p:nvPr/>
-        </p:nvSpPr>
-        <p:spPr>
-          <a:xfrm>
-            <a:off x="4937760" y="2743200"/>
-            <a:ext cx="384048" cy="384048"/>
-          </a:xfrm>
-          <a:prstGeom prst="ellipse">
-            <a:avLst/>
-          </a:prstGeom>
-          <a:solidFill>
-            <a:schemeClr val="accent2"/>
-          </a:solidFill>
-          <a:ln w="12700">
-            <a:solidFill>
-              <a:schemeClr val="accent2"/>
-            </a:solidFill>
-            <a:prstDash val="solid"/>
-          </a:ln>
-        </p:spPr>
-      </p:sp>
-      <p:sp>
-        <p:nvSpPr>
-          <p:cNvPr id="13" name="Número 3"/>
-          <p:cNvSpPr txBox="1"/>
-          <p:nvPr/>
-        </p:nvSpPr>
-        <p:spPr>
-          <a:xfrm>
-            <a:off x="4937760" y="2743200"/>
-            <a:ext cx="384048" cy="384048"/>
-          </a:xfrm>
-          <a:prstGeom prst="rect">
-            <a:avLst/>
-          </a:prstGeom>
-          <a:noFill/>
-          <a:ln/>
-        </p:spPr>
-        <p:txBody>
-          <a:bodyPr wrap="square" lIns="0" tIns="0" rIns="0" bIns="0" rtlCol="0" anchor="ctr"/>
-          <a:lstStyle/>
-          <a:p>
-            <a:pPr algn="ctr" indent="0" marL="0">
-              <a:buNone/>
-            </a:pPr>
-            <a:r>
-              <a:rPr lang="en-US" sz="1400" b="1" dirty="0">
-                <a:solidFill>
-                  <a:schemeClr val="tx1"/>
-                </a:solidFill>
-              </a:rPr>
-              <a:t>3</a:t>
-            </a:r>
-            <a:endParaRPr lang="en-US" sz="1400" dirty="0"/>
-          </a:p>
-        </p:txBody>
-      </p:sp>
-      <p:sp>
-        <p:nvSpPr>
-          <p:cNvPr id="14" name="Texto paso 3"/>
-          <p:cNvSpPr txBox="1"/>
-          <p:nvPr/>
-        </p:nvSpPr>
-        <p:spPr>
-          <a:xfrm>
-            <a:off x="5458968" y="2706624"/>
-            <a:ext cx="3227832" cy="868680"/>
-          </a:xfrm>
-          <a:prstGeom prst="rect">
-            <a:avLst/>
-          </a:prstGeom>
-          <a:noFill/>
-          <a:ln/>
-        </p:spPr>
-        <p:txBody>
-          <a:bodyPr wrap="square" lIns="0" tIns="0" rIns="0" bIns="0" rtlCol="0" anchor="t"/>
-          <a:lstStyle/>
-          <a:p>
-            <a:pPr indent="0" marL="0">
-              <a:spcAft>
-                <a:spcPts val="200"/>
-              </a:spcAft>
-              <a:buNone/>
-            </a:pPr>
-            <a:r>
-              <a:rPr lang="en-US" sz="1400" b="1" dirty="0">
-                <a:solidFill>
-                  <a:schemeClr val="tx2"/>
-                </a:solidFill>
-              </a:rPr>
-              <a:t>Agregar medidas</a:t>
-            </a:r>
-            <a:endParaRPr lang="en-US" sz="1400" dirty="0"/>
-          </a:p>
-          <a:p>
-            <a:pPr indent="0" marL="0">
-              <a:spcAft>
-                <a:spcPts val="200"/>
-              </a:spcAft>
-              <a:buNone/>
-            </a:pPr>
-            <a:r>
-              <a:rPr lang="en-US" sz="1400" dirty="0">
-                <a:solidFill>
-                  <a:schemeClr val="tx1"/>
-                </a:solidFill>
-              </a:rPr>
-              <a:t>Por ejemplo, la primera de un producto sin precio</a:t>
-            </a:r>
-            <a:endParaRPr lang="en-US" sz="1400" dirty="0"/>
-          </a:p>
-        </p:txBody>
-      </p:sp>
-      <p:sp>
-        <p:nvSpPr>
-          <p:cNvPr id="15" name="Paso 4"/>
-          <p:cNvSpPr/>
-          <p:nvPr/>
-        </p:nvSpPr>
-        <p:spPr>
-          <a:xfrm>
-            <a:off x="4937760" y="3611880"/>
-            <a:ext cx="384048" cy="384048"/>
-          </a:xfrm>
-          <a:prstGeom prst="ellipse">
-            <a:avLst/>
-          </a:prstGeom>
-          <a:solidFill>
-            <a:schemeClr val="accent4"/>
-          </a:solidFill>
-          <a:ln w="12700">
-            <a:solidFill>
-              <a:schemeClr val="accent4"/>
-            </a:solidFill>
-            <a:prstDash val="solid"/>
-          </a:ln>
-        </p:spPr>
-      </p:sp>
-      <p:sp>
-        <p:nvSpPr>
-          <p:cNvPr id="16" name="Número 4"/>
-          <p:cNvSpPr txBox="1"/>
-          <p:nvPr/>
-        </p:nvSpPr>
-        <p:spPr>
-          <a:xfrm>
-            <a:off x="4937760" y="3611880"/>
-            <a:ext cx="384048" cy="384048"/>
-          </a:xfrm>
-          <a:prstGeom prst="rect">
-            <a:avLst/>
-          </a:prstGeom>
-          <a:noFill/>
-          <a:ln/>
-        </p:spPr>
-        <p:txBody>
-          <a:bodyPr wrap="square" lIns="0" tIns="0" rIns="0" bIns="0" rtlCol="0" anchor="ctr"/>
-          <a:lstStyle/>
-          <a:p>
-            <a:pPr algn="ctr" indent="0" marL="0">
-              <a:buNone/>
-            </a:pPr>
-            <a:r>
-              <a:rPr lang="en-US" sz="1400" b="1" dirty="0">
-                <a:solidFill>
-                  <a:schemeClr val="bg1"/>
-                </a:solidFill>
-              </a:rPr>
-              <a:t>4</a:t>
-            </a:r>
-            <a:endParaRPr lang="en-US" sz="1400" dirty="0"/>
-          </a:p>
-        </p:txBody>
-      </p:sp>
-      <p:sp>
-        <p:nvSpPr>
-          <p:cNvPr id="17" name="Texto paso 4"/>
-          <p:cNvSpPr txBox="1"/>
-          <p:nvPr/>
-        </p:nvSpPr>
-        <p:spPr>
-          <a:xfrm>
-            <a:off x="5458968" y="3575304"/>
-            <a:ext cx="3227832" cy="868680"/>
-          </a:xfrm>
-          <a:prstGeom prst="rect">
-            <a:avLst/>
-          </a:prstGeom>
-          <a:noFill/>
-          <a:ln/>
-        </p:spPr>
-        <p:txBody>
-          <a:bodyPr wrap="square" lIns="0" tIns="0" rIns="0" bIns="0" rtlCol="0" anchor="t"/>
-          <a:lstStyle/>
-          <a:p>
-            <a:pPr indent="0" marL="0">
-              <a:spcAft>
-                <a:spcPts val="200"/>
-              </a:spcAft>
-              <a:buNone/>
-            </a:pPr>
-            <a:r>
-              <a:rPr lang="en-US" sz="1400" b="1" dirty="0">
-                <a:solidFill>
-                  <a:schemeClr val="tx2"/>
-                </a:solidFill>
-              </a:rPr>
-              <a:t>Límite de crédito</a:t>
-            </a:r>
-            <a:endParaRPr lang="en-US" sz="1400" dirty="0"/>
-          </a:p>
-          <a:p>
-            <a:pPr indent="0" marL="0">
-              <a:spcAft>
-                <a:spcPts val="200"/>
-              </a:spcAft>
-              <a:buNone/>
-            </a:pPr>
-            <a:r>
-              <a:rPr lang="en-US" sz="1400" dirty="0">
-                <a:solidFill>
-                  <a:schemeClr val="tx1"/>
-                </a:solidFill>
-              </a:rPr>
-              <a:t>Por cliente, en Cobranzas</a:t>
-            </a:r>
-            <a:endParaRPr lang="en-US" sz="1400" dirty="0"/>
-          </a:p>
-        </p:txBody>
-      </p:sp>
-      <p:sp>
-        <p:nvSpPr>
-          <p:cNvPr id="25" name="Slide Number Placeholder 0"/>
-          <p:cNvSpPr>
-            <a:spLocks noGrp="1"/>
-          </p:cNvSpPr>
-          <p:nvPr>
-            <p:ph type="sldNum" sz="quarter" idx="4294967295"/>
-          </p:nvPr>
-        </p:nvSpPr>
-        <p:spPr>
-          <a:xfrm>
-            <a:off x="457200" y="4828032"/>
-            <a:ext cx="320040" cy="201168"/>
-          </a:xfrm>
-          <a:prstGeom prst="rect">
-            <a:avLst/>
-          </a:prstGeom>
-          <a:extLst>
-            <a:ext uri="{C572A759-6A51-4108-AA02-DFA0A04FC94B}">
-              <ma14:wrappingTextBoxFlag xmlns:ma14="http://schemas.microsoft.com/office/mac/drawingml/2011/main" val="0"/>
-            </a:ext>
-          </a:extLst>
-        </p:spPr>
-        <p:txBody>
-          <a:bodyPr lIns="0" tIns="0" rIns="0" bIns="0"/>
-          <a:lstStyle>
-            <a:lvl1pPr>
-              <a:defRPr sz="900">
-                <a:solidFill>
-                  <a:schemeClr val="accent6"/>
-                </a:solidFill>
-              </a:defRPr>
-            </a:lvl1pPr>
-          </a:lstStyle>
-          <a:p>
-            <a:pPr algn="l"/>
-            <a:fld id="{F7021451-1387-4CA6-816F-3879F97B5CBC}" type="slidenum">
-              <a:rPr b="0" lang="en-US"/>
-              <a:t>24</a:t>
-            </a:fld>
-            <a:endParaRPr lang="en-US"/>
+              <a:t>Jordan (Desarrollador)</a:t>
+            </a:r>
+            <a:endParaRPr lang="en-US" sz="1300" dirty="0"/>
           </a:p>
         </p:txBody>
       </p:sp>
@@ -12751,8 +13104,8 @@
         </p:nvSpPr>
         <p:spPr>
           <a:xfrm>
-            <a:off x="548640" y="1371600"/>
-            <a:ext cx="5669280" cy="914400"/>
+            <a:off x="457200" y="256032"/>
+            <a:ext cx="7863840" cy="594360"/>
           </a:xfrm>
           <a:prstGeom prst="rect">
             <a:avLst/>
@@ -12761,92 +13114,61 @@
           <a:ln/>
         </p:spPr>
         <p:txBody>
-          <a:bodyPr wrap="square" lIns="0" tIns="0" rIns="0" bIns="0" rtlCol="0" anchor="b"/>
+          <a:bodyPr wrap="square" lIns="0" tIns="0" rIns="0" bIns="0" rtlCol="0" anchor="ctr"/>
           <a:lstStyle/>
           <a:p>
             <a:pPr algn="l" indent="0" marL="0">
               <a:buNone/>
             </a:pPr>
             <a:r>
-              <a:rPr lang="en-US" sz="4000" b="1" dirty="0">
-                <a:solidFill>
-                  <a:schemeClr val="bg1"/>
-                </a:solidFill>
-              </a:rPr>
-              <a:t>Taller</a:t>
-            </a:r>
-            <a:endParaRPr lang="en-US" sz="4000" dirty="0"/>
-          </a:p>
-        </p:txBody>
-      </p:sp>
-      <p:sp>
-        <p:nvSpPr>
-          <p:cNvPr id="3" name="Text 0"/>
+              <a:rPr lang="en-US" sz="2800" b="1" dirty="0">
+                <a:solidFill>
+                  <a:schemeClr val="tx2"/>
+                </a:solidFill>
+              </a:rPr>
+              <a:t>Alertas, novedades y mejoras</a:t>
+            </a:r>
+            <a:endParaRPr lang="en-US" sz="2800" dirty="0"/>
+          </a:p>
+        </p:txBody>
+      </p:sp>
+      <p:sp>
+        <p:nvSpPr>
+          <p:cNvPr id="4" name="Marco socio-alertas"/>
           <p:cNvSpPr/>
-          <p:nvPr>
-            <p:ph idx="101" type="body" hasCustomPrompt="1"/>
-          </p:nvPr>
-        </p:nvSpPr>
-        <p:spPr>
-          <a:xfrm>
-            <a:off x="548640" y="2423160"/>
-            <a:ext cx="5669280" cy="1463040"/>
-          </a:xfrm>
-          <a:prstGeom prst="rect">
-            <a:avLst/>
-          </a:prstGeom>
-          <a:noFill/>
-          <a:ln/>
-        </p:spPr>
-        <p:txBody>
-          <a:bodyPr wrap="square" lIns="0" tIns="0" rIns="0" bIns="0" rtlCol="0" anchor="t"/>
-          <a:lstStyle/>
-          <a:p>
-            <a:pPr indent="0" marL="0">
-              <a:buNone/>
-            </a:pPr>
-            <a:r>
-              <a:rPr lang="en-US" sz="1800" dirty="0">
-                <a:solidFill>
-                  <a:schemeClr val="bg1"/>
-                </a:solidFill>
-              </a:rPr>
-              <a:t>Envasas, armas los pedidos, pides producción al Laboratorio, despachas y entregas.</a:t>
-            </a:r>
-            <a:endParaRPr lang="en-US" sz="1800" dirty="0"/>
-          </a:p>
-        </p:txBody>
-      </p:sp>
-      <p:sp>
-        <p:nvSpPr>
-          <p:cNvPr id="4" name="Tarjeta perfil"/>
-          <p:cNvSpPr/>
-          <p:nvPr/>
-        </p:nvSpPr>
-        <p:spPr>
-          <a:xfrm>
-            <a:off x="6583680" y="1417320"/>
-            <a:ext cx="2011680" cy="2377440"/>
+          <p:nvPr/>
+        </p:nvSpPr>
+        <p:spPr>
+          <a:xfrm>
+            <a:off x="420624" y="923544"/>
+            <a:ext cx="3730752" cy="2359152"/>
           </a:xfrm>
           <a:prstGeom prst="roundRect">
             <a:avLst>
-              <a:gd name="adj" fmla="val 6818"/>
+              <a:gd name="adj" fmla="val 2326"/>
             </a:avLst>
           </a:prstGeom>
           <a:solidFill>
             <a:schemeClr val="bg1"/>
           </a:solidFill>
-          <a:ln w="12700">
+          <a:ln w="9525">
             <a:solidFill>
-              <a:schemeClr val="bg1"/>
+              <a:srgbClr val="D3DCEC"/>
             </a:solidFill>
             <a:prstDash val="solid"/>
           </a:ln>
+          <a:effectLst>
+            <a:outerShdw sx="100000" sy="100000" kx="0" ky="0" algn="bl" rotWithShape="0" blurRad="76200" dist="25400" dir="5400000">
+              <a:srgbClr val="0F1E3D">
+                <a:alpha val="18000"/>
+              </a:srgbClr>
+            </a:outerShdw>
+          </a:effectLst>
         </p:spPr>
       </p:sp>
       <p:pic>
         <p:nvPicPr>
-          <p:cNvPr id="5" name="Logo" descr="/home/claude/pinturas-liz-app/public/logo.png">    </p:cNvPr>
+          <p:cNvPr id="5" name="Captura socio-alertas" descr="Pantalla de la aplicación: socio alertas">    </p:cNvPr>
           <p:cNvPicPr>
             <a:picLocks noChangeAspect="1"/>
           </p:cNvPicPr>
@@ -12860,8 +13182,8 @@
         </p:blipFill>
         <p:spPr>
           <a:xfrm>
-            <a:off x="6812280" y="1600200"/>
-            <a:ext cx="1554480" cy="1161288"/>
+            <a:off x="457200" y="960120"/>
+            <a:ext cx="3657600" cy="2286000"/>
           </a:xfrm>
           <a:prstGeom prst="rect">
             <a:avLst/>
@@ -12870,14 +13192,99 @@
       </p:pic>
       <p:sp>
         <p:nvSpPr>
-          <p:cNvPr id="6" name="Quién"/>
+          <p:cNvPr id="6" name="Marco dev-mejoras"/>
+          <p:cNvSpPr/>
+          <p:nvPr/>
+        </p:nvSpPr>
+        <p:spPr>
+          <a:xfrm>
+            <a:off x="4626864" y="923544"/>
+            <a:ext cx="3730752" cy="2359152"/>
+          </a:xfrm>
+          <a:prstGeom prst="roundRect">
+            <a:avLst>
+              <a:gd name="adj" fmla="val 2326"/>
+            </a:avLst>
+          </a:prstGeom>
+          <a:solidFill>
+            <a:schemeClr val="bg1"/>
+          </a:solidFill>
+          <a:ln w="9525">
+            <a:solidFill>
+              <a:srgbClr val="D3DCEC"/>
+            </a:solidFill>
+            <a:prstDash val="solid"/>
+          </a:ln>
+          <a:effectLst>
+            <a:outerShdw sx="100000" sy="100000" kx="0" ky="0" algn="bl" rotWithShape="0" blurRad="76200" dist="25400" dir="5400000">
+              <a:srgbClr val="0F1E3D">
+                <a:alpha val="18000"/>
+              </a:srgbClr>
+            </a:outerShdw>
+          </a:effectLst>
+        </p:spPr>
+      </p:sp>
+      <p:pic>
+        <p:nvPicPr>
+          <p:cNvPr id="7" name="Captura dev-mejoras" descr="Pantalla de la aplicación: dev mejoras">    </p:cNvPr>
+          <p:cNvPicPr>
+            <a:picLocks noChangeAspect="1"/>
+          </p:cNvPicPr>
+          <p:nvPr/>
+        </p:nvPicPr>
+        <p:blipFill>
+          <a:blip r:embed="rId2"/>
+          <a:stretch>
+            <a:fillRect/>
+          </a:stretch>
+        </p:blipFill>
+        <p:spPr>
+          <a:xfrm>
+            <a:off x="4663440" y="960120"/>
+            <a:ext cx="3657600" cy="2286000"/>
+          </a:xfrm>
+          <a:prstGeom prst="rect">
+            <a:avLst/>
+          </a:prstGeom>
+        </p:spPr>
+      </p:pic>
+      <p:sp>
+        <p:nvSpPr>
+          <p:cNvPr id="8" name="Tarjeta Alertas"/>
+          <p:cNvSpPr/>
+          <p:nvPr/>
+        </p:nvSpPr>
+        <p:spPr>
+          <a:xfrm>
+            <a:off x="457200" y="3474720"/>
+            <a:ext cx="4023360" cy="1143000"/>
+          </a:xfrm>
+          <a:prstGeom prst="roundRect">
+            <a:avLst>
+              <a:gd name="adj" fmla="val 6400"/>
+            </a:avLst>
+          </a:prstGeom>
+          <a:solidFill>
+            <a:schemeClr val="bg2"/>
+          </a:solidFill>
+          <a:ln w="9525">
+            <a:solidFill>
+              <a:srgbClr val="D3DCEC"/>
+            </a:solidFill>
+            <a:prstDash val="solid"/>
+          </a:ln>
+        </p:spPr>
+      </p:sp>
+      <p:sp>
+        <p:nvSpPr>
+          <p:cNvPr id="9" name="Texto Alertas"/>
           <p:cNvSpPr txBox="1"/>
           <p:nvPr/>
         </p:nvSpPr>
         <p:spPr>
           <a:xfrm>
-            <a:off x="6675120" y="2880360"/>
-            <a:ext cx="1828800" cy="822960"/>
+            <a:off x="594360" y="3566160"/>
+            <a:ext cx="3749040" cy="960120"/>
           </a:xfrm>
           <a:prstGeom prst="rect">
             <a:avLst/>
@@ -12886,21 +13293,169 @@
           <a:ln/>
         </p:spPr>
         <p:txBody>
-          <a:bodyPr wrap="square" lIns="0" tIns="0" rIns="0" bIns="0" rtlCol="0" anchor="ctr"/>
-          <a:lstStyle/>
-          <a:p>
-            <a:pPr algn="ctr" indent="0" marL="0">
-              <a:buNone/>
-            </a:pPr>
-            <a:r>
-              <a:rPr lang="en-US" sz="1300" b="1" dirty="0">
-                <a:solidFill>
-                  <a:schemeClr val="tx2"/>
-                </a:solidFill>
-              </a:rPr>
-              <a:t>Encargado Taller</a:t>
-            </a:r>
-            <a:endParaRPr lang="en-US" sz="1300" dirty="0"/>
+          <a:bodyPr wrap="square" lIns="0" tIns="0" rIns="0" bIns="0" rtlCol="0" anchor="t"/>
+          <a:lstStyle/>
+          <a:p>
+            <a:pPr indent="0" marL="0">
+              <a:spcAft>
+                <a:spcPts val="300"/>
+              </a:spcAft>
+              <a:buNone/>
+            </a:pPr>
+            <a:r>
+              <a:rPr lang="en-US" sz="1400" b="1" dirty="0">
+                <a:solidFill>
+                  <a:schemeClr val="accent1"/>
+                </a:solidFill>
+              </a:rPr>
+              <a:t>Alertas</a:t>
+            </a:r>
+            <a:endParaRPr lang="en-US" sz="1400" dirty="0"/>
+          </a:p>
+          <a:p>
+            <a:pPr indent="0" marL="0">
+              <a:spcAft>
+                <a:spcPts val="300"/>
+              </a:spcAft>
+              <a:buNone/>
+            </a:pPr>
+            <a:r>
+              <a:rPr lang="en-US" sz="1300" dirty="0">
+                <a:solidFill>
+                  <a:schemeClr val="tx1"/>
+                </a:solidFill>
+              </a:rPr>
+              <a:t>Comenta, corrige el dato y marca resuelta. Solo socios y Desarrollador resuelven.</a:t>
+            </a:r>
+            <a:endParaRPr lang="en-US" sz="1400" dirty="0"/>
+          </a:p>
+        </p:txBody>
+      </p:sp>
+      <p:sp>
+        <p:nvSpPr>
+          <p:cNvPr id="10" name="Tarjeta Sugerencias de mejora"/>
+          <p:cNvSpPr/>
+          <p:nvPr/>
+        </p:nvSpPr>
+        <p:spPr>
+          <a:xfrm>
+            <a:off x="4663440" y="3474720"/>
+            <a:ext cx="4023360" cy="1143000"/>
+          </a:xfrm>
+          <a:prstGeom prst="roundRect">
+            <a:avLst>
+              <a:gd name="adj" fmla="val 6400"/>
+            </a:avLst>
+          </a:prstGeom>
+          <a:solidFill>
+            <a:schemeClr val="bg2"/>
+          </a:solidFill>
+          <a:ln w="9525">
+            <a:solidFill>
+              <a:srgbClr val="D3DCEC"/>
+            </a:solidFill>
+            <a:prstDash val="solid"/>
+          </a:ln>
+        </p:spPr>
+      </p:sp>
+      <p:sp>
+        <p:nvSpPr>
+          <p:cNvPr id="11" name="Texto Sugerencias de mejora"/>
+          <p:cNvSpPr txBox="1"/>
+          <p:nvPr/>
+        </p:nvSpPr>
+        <p:spPr>
+          <a:xfrm>
+            <a:off x="4800600" y="3566160"/>
+            <a:ext cx="3749040" cy="960120"/>
+          </a:xfrm>
+          <a:prstGeom prst="rect">
+            <a:avLst/>
+          </a:prstGeom>
+          <a:noFill/>
+          <a:ln/>
+        </p:spPr>
+        <p:txBody>
+          <a:bodyPr wrap="square" lIns="0" tIns="0" rIns="0" bIns="0" rtlCol="0" anchor="t"/>
+          <a:lstStyle/>
+          <a:p>
+            <a:pPr indent="0" marL="0">
+              <a:spcAft>
+                <a:spcPts val="300"/>
+              </a:spcAft>
+              <a:buNone/>
+            </a:pPr>
+            <a:r>
+              <a:rPr lang="en-US" sz="1400" b="1" dirty="0">
+                <a:solidFill>
+                  <a:schemeClr val="accent4"/>
+                </a:solidFill>
+              </a:rPr>
+              <a:t>Sugerencias de mejora</a:t>
+            </a:r>
+            <a:endParaRPr lang="en-US" sz="1400" dirty="0"/>
+          </a:p>
+          <a:p>
+            <a:pPr indent="0" marL="0">
+              <a:spcAft>
+                <a:spcPts val="300"/>
+              </a:spcAft>
+              <a:buNone/>
+            </a:pPr>
+            <a:r>
+              <a:rPr lang="en-US" sz="1300" dirty="0">
+                <a:solidFill>
+                  <a:schemeClr val="tx1"/>
+                </a:solidFill>
+              </a:rPr>
+              <a:t>Las envía cualquier perfil; el Desarrollador las evalúa para próximas versiones.</a:t>
+            </a:r>
+            <a:endParaRPr lang="en-US" sz="1400" dirty="0"/>
+          </a:p>
+        </p:txBody>
+      </p:sp>
+      <p:sp>
+        <p:nvSpPr>
+          <p:cNvPr id="25" name="Slide Number Placeholder 0"/>
+          <p:cNvSpPr>
+            <a:spLocks noGrp="1"/>
+          </p:cNvSpPr>
+          <p:nvPr>
+            <p:ph type="sldNum" sz="quarter" idx="4294967295"/>
+          </p:nvPr>
+        </p:nvSpPr>
+        <p:spPr>
+          <a:xfrm>
+            <a:off x="457200" y="4828032"/>
+            <a:ext cx="320040" cy="201168"/>
+          </a:xfrm>
+          <a:prstGeom prst="rect">
+            <a:avLst/>
+          </a:prstGeom>
+          <a:extLst>
+            <a:ext uri="{C572A759-6A51-4108-AA02-DFA0A04FC94B}">
+              <ma14:wrappingTextBoxFlag xmlns:ma14="http://schemas.microsoft.com/office/mac/drawingml/2011/main" val="0"/>
+            </a:ext>
+          </a:extLst>
+        </p:spPr>
+        <p:txBody>
+          <a:bodyPr lIns="0" tIns="0" rIns="0" bIns="0"/>
+          <a:lstStyle>
+            <a:lvl1pPr>
+              <a:defRPr sz="900">
+                <a:solidFill>
+                  <a:schemeClr val="accent6"/>
+                </a:solidFill>
+              </a:defRPr>
+            </a:lvl1pPr>
+          </a:lstStyle>
+          <a:p>
+            <a:pPr algn="l"/>
+            <a:fld id="{F7021451-1387-4CA6-816F-3879F97B5CBC}" type="slidenum">
+              <a:rPr b="0" lang="en-US"/>
+              <a:t>25</a:t>
+            </a:fld>
+            <a:endParaRPr lang="en-US"/>
           </a:p>
         </p:txBody>
       </p:sp>
@@ -12961,7 +13516,7 @@
                   <a:schemeClr val="tx2"/>
                 </a:solidFill>
               </a:rPr>
-              <a:t>Qué envasar y registrar el envasado</a:t>
+              <a:t>Usuarios y decisiones exclusivas</a:t>
             </a:r>
             <a:endParaRPr lang="en-US" sz="2800" dirty="0"/>
           </a:p>
@@ -12969,22 +13524,22 @@
       </p:sp>
       <p:sp>
         <p:nvSpPr>
-          <p:cNvPr id="4" name="Marco taller-por-envasar"/>
+          <p:cNvPr id="4" name="Marco socio-usuarios"/>
           <p:cNvSpPr/>
           <p:nvPr/>
         </p:nvSpPr>
         <p:spPr>
           <a:xfrm>
-            <a:off x="484632" y="850392"/>
-            <a:ext cx="1839266" cy="3831336"/>
+            <a:off x="420624" y="923544"/>
+            <a:ext cx="4023360" cy="2542032"/>
           </a:xfrm>
           <a:prstGeom prst="roundRect">
             <a:avLst>
-              <a:gd name="adj" fmla="val 6960"/>
+              <a:gd name="adj" fmla="val 2158"/>
             </a:avLst>
           </a:prstGeom>
           <a:solidFill>
-            <a:schemeClr val="tx1"/>
+            <a:schemeClr val="bg1"/>
           </a:solidFill>
           <a:ln w="9525">
             <a:solidFill>
@@ -13003,7 +13558,7 @@
       </p:sp>
       <p:pic>
         <p:nvPicPr>
-          <p:cNvPr id="5" name="Captura taller-por-envasar" descr="Pantalla de la aplicación: taller por envasar">    </p:cNvPr>
+          <p:cNvPr id="5" name="Captura socio-usuarios" descr="Pantalla de la aplicación: socio usuarios">    </p:cNvPr>
           <p:cNvPicPr>
             <a:picLocks noChangeAspect="1"/>
           </p:cNvPicPr>
@@ -13017,8 +13572,8 @@
         </p:blipFill>
         <p:spPr>
           <a:xfrm>
-            <a:off x="548640" y="914400"/>
-            <a:ext cx="1711250" cy="3703320"/>
+            <a:off x="457200" y="960120"/>
+            <a:ext cx="3950208" cy="2468880"/>
           </a:xfrm>
           <a:prstGeom prst="rect">
             <a:avLst/>
@@ -13027,71 +13582,13 @@
       </p:pic>
       <p:sp>
         <p:nvSpPr>
-          <p:cNvPr id="6" name="Marco taller-envasados"/>
+          <p:cNvPr id="6" name="Paso 1"/>
           <p:cNvSpPr/>
           <p:nvPr/>
         </p:nvSpPr>
         <p:spPr>
           <a:xfrm>
-            <a:off x="2496312" y="850392"/>
-            <a:ext cx="1839266" cy="3831336"/>
-          </a:xfrm>
-          <a:prstGeom prst="roundRect">
-            <a:avLst>
-              <a:gd name="adj" fmla="val 6960"/>
-            </a:avLst>
-          </a:prstGeom>
-          <a:solidFill>
-            <a:schemeClr val="tx1"/>
-          </a:solidFill>
-          <a:ln w="9525">
-            <a:solidFill>
-              <a:srgbClr val="D3DCEC"/>
-            </a:solidFill>
-            <a:prstDash val="solid"/>
-          </a:ln>
-          <a:effectLst>
-            <a:outerShdw sx="100000" sy="100000" kx="0" ky="0" algn="bl" rotWithShape="0" blurRad="76200" dist="25400" dir="5400000">
-              <a:srgbClr val="0F1E3D">
-                <a:alpha val="18000"/>
-              </a:srgbClr>
-            </a:outerShdw>
-          </a:effectLst>
-        </p:spPr>
-      </p:sp>
-      <p:pic>
-        <p:nvPicPr>
-          <p:cNvPr id="7" name="Captura taller-envasados" descr="Pantalla de la aplicación: taller envasados">    </p:cNvPr>
-          <p:cNvPicPr>
-            <a:picLocks noChangeAspect="1"/>
-          </p:cNvPicPr>
-          <p:nvPr/>
-        </p:nvPicPr>
-        <p:blipFill>
-          <a:blip r:embed="rId2"/>
-          <a:stretch>
-            <a:fillRect/>
-          </a:stretch>
-        </p:blipFill>
-        <p:spPr>
-          <a:xfrm>
-            <a:off x="2560320" y="914400"/>
-            <a:ext cx="1711250" cy="3703320"/>
-          </a:xfrm>
-          <a:prstGeom prst="rect">
-            <a:avLst/>
-          </a:prstGeom>
-        </p:spPr>
-      </p:pic>
-      <p:sp>
-        <p:nvSpPr>
-          <p:cNvPr id="8" name="Paso 1"/>
-          <p:cNvSpPr/>
-          <p:nvPr/>
-        </p:nvSpPr>
-        <p:spPr>
-          <a:xfrm>
-            <a:off x="4846320" y="1005840"/>
+            <a:off x="4937760" y="1005840"/>
             <a:ext cx="384048" cy="384048"/>
           </a:xfrm>
           <a:prstGeom prst="ellipse">
@@ -13110,13 +13607,13 @@
       </p:sp>
       <p:sp>
         <p:nvSpPr>
-          <p:cNvPr id="9" name="Número 1"/>
+          <p:cNvPr id="7" name="Número 1"/>
           <p:cNvSpPr txBox="1"/>
           <p:nvPr/>
         </p:nvSpPr>
         <p:spPr>
           <a:xfrm>
-            <a:off x="4846320" y="1005840"/>
+            <a:off x="4937760" y="1005840"/>
             <a:ext cx="384048" cy="384048"/>
           </a:xfrm>
           <a:prstGeom prst="rect">
@@ -13146,14 +13643,14 @@
       </p:sp>
       <p:sp>
         <p:nvSpPr>
-          <p:cNvPr id="10" name="Texto paso 1"/>
+          <p:cNvPr id="8" name="Texto paso 1"/>
           <p:cNvSpPr txBox="1"/>
           <p:nvPr/>
         </p:nvSpPr>
         <p:spPr>
           <a:xfrm>
-            <a:off x="5367528" y="969264"/>
-            <a:ext cx="3319272" cy="868680"/>
+            <a:off x="5458968" y="969264"/>
+            <a:ext cx="3227832" cy="868680"/>
           </a:xfrm>
           <a:prstGeom prst="rect">
             <a:avLst/>
@@ -13177,7 +13674,7 @@
                   <a:schemeClr val="tx2"/>
                 </a:solidFill>
               </a:rPr>
-              <a:t>Por envasar</a:t>
+              <a:t>Asignar perfiles</a:t>
             </a:r>
             <a:endParaRPr lang="en-US" sz="1400" dirty="0"/>
           </a:p>
@@ -13194,7 +13691,7 @@
                   <a:schemeClr val="tx1"/>
                 </a:solidFill>
               </a:rPr>
-              <a:t>Frascos pendientes y bolsas a llenar</a:t>
+              <a:t>Y activar o desactivar cuentas</a:t>
             </a:r>
             <a:endParaRPr lang="en-US" sz="1400" dirty="0"/>
           </a:p>
@@ -13202,13 +13699,13 @@
       </p:sp>
       <p:sp>
         <p:nvSpPr>
-          <p:cNvPr id="11" name="Paso 2"/>
+          <p:cNvPr id="9" name="Paso 2"/>
           <p:cNvSpPr/>
           <p:nvPr/>
         </p:nvSpPr>
         <p:spPr>
           <a:xfrm>
-            <a:off x="4846320" y="1874520"/>
+            <a:off x="4937760" y="1874520"/>
             <a:ext cx="384048" cy="384048"/>
           </a:xfrm>
           <a:prstGeom prst="ellipse">
@@ -13227,13 +13724,13 @@
       </p:sp>
       <p:sp>
         <p:nvSpPr>
-          <p:cNvPr id="12" name="Número 2"/>
+          <p:cNvPr id="10" name="Número 2"/>
           <p:cNvSpPr txBox="1"/>
           <p:nvPr/>
         </p:nvSpPr>
         <p:spPr>
           <a:xfrm>
-            <a:off x="4846320" y="1874520"/>
+            <a:off x="4937760" y="1874520"/>
             <a:ext cx="384048" cy="384048"/>
           </a:xfrm>
           <a:prstGeom prst="rect">
@@ -13263,14 +13760,14 @@
       </p:sp>
       <p:sp>
         <p:nvSpPr>
-          <p:cNvPr id="13" name="Texto paso 2"/>
+          <p:cNvPr id="11" name="Texto paso 2"/>
           <p:cNvSpPr txBox="1"/>
           <p:nvPr/>
         </p:nvSpPr>
         <p:spPr>
           <a:xfrm>
-            <a:off x="5367528" y="1837944"/>
-            <a:ext cx="3319272" cy="868680"/>
+            <a:off x="5458968" y="1837944"/>
+            <a:ext cx="3227832" cy="868680"/>
           </a:xfrm>
           <a:prstGeom prst="rect">
             <a:avLst/>
@@ -13294,7 +13791,7 @@
                   <a:schemeClr val="tx2"/>
                 </a:solidFill>
               </a:rPr>
-              <a:t>Registrar envasado</a:t>
+              <a:t>Vincular vendedores</a:t>
             </a:r>
             <a:endParaRPr lang="en-US" sz="1400" dirty="0"/>
           </a:p>
@@ -13311,7 +13808,7 @@
                   <a:schemeClr val="tx1"/>
                 </a:solidFill>
               </a:rPr>
-              <a:t>Color, medida y bolsas llenas</a:t>
+              <a:t>«Vende como» Jorge, Lily, Giovanni, Liz…</a:t>
             </a:r>
             <a:endParaRPr lang="en-US" sz="1400" dirty="0"/>
           </a:p>
@@ -13319,13 +13816,13 @@
       </p:sp>
       <p:sp>
         <p:nvSpPr>
-          <p:cNvPr id="14" name="Paso 3"/>
+          <p:cNvPr id="12" name="Paso 3"/>
           <p:cNvSpPr/>
           <p:nvPr/>
         </p:nvSpPr>
         <p:spPr>
           <a:xfrm>
-            <a:off x="4846320" y="2743200"/>
+            <a:off x="4937760" y="2743200"/>
             <a:ext cx="384048" cy="384048"/>
           </a:xfrm>
           <a:prstGeom prst="ellipse">
@@ -13344,13 +13841,13 @@
       </p:sp>
       <p:sp>
         <p:nvSpPr>
-          <p:cNvPr id="15" name="Número 3"/>
+          <p:cNvPr id="13" name="Número 3"/>
           <p:cNvSpPr txBox="1"/>
           <p:nvPr/>
         </p:nvSpPr>
         <p:spPr>
           <a:xfrm>
-            <a:off x="4846320" y="2743200"/>
+            <a:off x="4937760" y="2743200"/>
             <a:ext cx="384048" cy="384048"/>
           </a:xfrm>
           <a:prstGeom prst="rect">
@@ -13380,14 +13877,14 @@
       </p:sp>
       <p:sp>
         <p:nvSpPr>
-          <p:cNvPr id="16" name="Texto paso 3"/>
+          <p:cNvPr id="14" name="Texto paso 3"/>
           <p:cNvSpPr txBox="1"/>
           <p:nvPr/>
         </p:nvSpPr>
         <p:spPr>
           <a:xfrm>
-            <a:off x="5367528" y="2706624"/>
-            <a:ext cx="3319272" cy="868680"/>
+            <a:off x="5458968" y="2706624"/>
+            <a:ext cx="3227832" cy="868680"/>
           </a:xfrm>
           <a:prstGeom prst="rect">
             <a:avLst/>
@@ -13411,7 +13908,7 @@
                   <a:schemeClr val="tx2"/>
                 </a:solidFill>
               </a:rPr>
-              <a:t>Falta granel</a:t>
+              <a:t>Agregar medidas</a:t>
             </a:r>
             <a:endParaRPr lang="en-US" sz="1400" dirty="0"/>
           </a:p>
@@ -13428,7 +13925,7 @@
                   <a:schemeClr val="tx1"/>
                 </a:solidFill>
               </a:rPr>
-              <a:t>Pedidos al Laboratorio → nueva orden</a:t>
+              <a:t>Por ejemplo, la primera de un producto sin precio</a:t>
             </a:r>
             <a:endParaRPr lang="en-US" sz="1400" dirty="0"/>
           </a:p>
@@ -13436,13 +13933,13 @@
       </p:sp>
       <p:sp>
         <p:nvSpPr>
-          <p:cNvPr id="17" name="Paso 4"/>
+          <p:cNvPr id="15" name="Paso 4"/>
           <p:cNvSpPr/>
           <p:nvPr/>
         </p:nvSpPr>
         <p:spPr>
           <a:xfrm>
-            <a:off x="4846320" y="3611880"/>
+            <a:off x="4937760" y="3611880"/>
             <a:ext cx="384048" cy="384048"/>
           </a:xfrm>
           <a:prstGeom prst="ellipse">
@@ -13461,13 +13958,13 @@
       </p:sp>
       <p:sp>
         <p:nvSpPr>
-          <p:cNvPr id="18" name="Número 4"/>
+          <p:cNvPr id="16" name="Número 4"/>
           <p:cNvSpPr txBox="1"/>
           <p:nvPr/>
         </p:nvSpPr>
         <p:spPr>
           <a:xfrm>
-            <a:off x="4846320" y="3611880"/>
+            <a:off x="4937760" y="3611880"/>
             <a:ext cx="384048" cy="384048"/>
           </a:xfrm>
           <a:prstGeom prst="rect">
@@ -13497,14 +13994,14 @@
       </p:sp>
       <p:sp>
         <p:nvSpPr>
-          <p:cNvPr id="19" name="Texto paso 4"/>
+          <p:cNvPr id="17" name="Texto paso 4"/>
           <p:cNvSpPr txBox="1"/>
           <p:nvPr/>
         </p:nvSpPr>
         <p:spPr>
           <a:xfrm>
-            <a:off x="5367528" y="3575304"/>
-            <a:ext cx="3319272" cy="868680"/>
+            <a:off x="5458968" y="3575304"/>
+            <a:ext cx="3227832" cy="868680"/>
           </a:xfrm>
           <a:prstGeom prst="rect">
             <a:avLst/>
@@ -13528,7 +14025,7 @@
                   <a:schemeClr val="tx2"/>
                 </a:solidFill>
               </a:rPr>
-              <a:t>Bolsas</a:t>
+              <a:t>Límite de crédito</a:t>
             </a:r>
             <a:endParaRPr lang="en-US" sz="1400" dirty="0"/>
           </a:p>
@@ -13545,7 +14042,7 @@
                   <a:schemeClr val="tx1"/>
                 </a:solidFill>
               </a:rPr>
-              <a:t>12 frascos hasta 120 ml; 6 en 250 ml</a:t>
+              <a:t>Por cliente, en Cobranzas</a:t>
             </a:r>
             <a:endParaRPr lang="en-US" sz="1400" dirty="0"/>
           </a:p>
@@ -13653,7 +14150,7 @@
                   <a:schemeClr val="tx2"/>
                 </a:solidFill>
               </a:rPr>
-              <a:t>Arma, despacha y entrega</a:t>
+              <a:t>Análisis para decidir</a:t>
             </a:r>
             <a:endParaRPr lang="en-US" sz="2800" dirty="0"/>
           </a:p>
@@ -13661,7 +14158,7 @@
       </p:sp>
       <p:sp>
         <p:nvSpPr>
-          <p:cNvPr id="4" name="Marco taller-pedido"/>
+          <p:cNvPr id="4" name="Marco an-movil"/>
           <p:cNvSpPr/>
           <p:nvPr/>
         </p:nvSpPr>
@@ -13695,7 +14192,7 @@
       </p:sp>
       <p:pic>
         <p:nvPicPr>
-          <p:cNvPr id="5" name="Captura taller-pedido" descr="Pantalla de la aplicación: taller pedido">    </p:cNvPr>
+          <p:cNvPr id="5" name="Captura an-movil" descr="Pantalla de la aplicación: an movil">    </p:cNvPr>
           <p:cNvPicPr>
             <a:picLocks noChangeAspect="1"/>
           </p:cNvPicPr>
@@ -13719,22 +14216,22 @@
       </p:pic>
       <p:sp>
         <p:nvSpPr>
-          <p:cNvPr id="6" name="Marco taller-ordenes"/>
+          <p:cNvPr id="6" name="Marco an-pedidos"/>
           <p:cNvSpPr/>
           <p:nvPr/>
         </p:nvSpPr>
         <p:spPr>
           <a:xfrm>
-            <a:off x="2496312" y="850392"/>
-            <a:ext cx="1839266" cy="3831336"/>
+            <a:off x="2706624" y="923544"/>
+            <a:ext cx="3203377" cy="2176272"/>
           </a:xfrm>
           <a:prstGeom prst="roundRect">
             <a:avLst>
-              <a:gd name="adj" fmla="val 6960"/>
+              <a:gd name="adj" fmla="val 2521"/>
             </a:avLst>
           </a:prstGeom>
           <a:solidFill>
-            <a:schemeClr val="tx1"/>
+            <a:schemeClr val="bg1"/>
           </a:solidFill>
           <a:ln w="9525">
             <a:solidFill>
@@ -13753,7 +14250,7 @@
       </p:sp>
       <p:pic>
         <p:nvPicPr>
-          <p:cNvPr id="7" name="Captura taller-ordenes" descr="Pantalla de la aplicación: taller ordenes">    </p:cNvPr>
+          <p:cNvPr id="7" name="Captura an-pedidos" descr="Pantalla de la aplicación: an pedidos">    </p:cNvPr>
           <p:cNvPicPr>
             <a:picLocks noChangeAspect="1"/>
           </p:cNvPicPr>
@@ -13767,8 +14264,8 @@
         </p:blipFill>
         <p:spPr>
           <a:xfrm>
-            <a:off x="2560320" y="914400"/>
-            <a:ext cx="1711250" cy="3703320"/>
+            <a:off x="2743200" y="960120"/>
+            <a:ext cx="3130225" cy="2103120"/>
           </a:xfrm>
           <a:prstGeom prst="rect">
             <a:avLst/>
@@ -13783,8 +14280,8 @@
         </p:nvSpPr>
         <p:spPr>
           <a:xfrm>
-            <a:off x="4846320" y="1005840"/>
-            <a:ext cx="384048" cy="384048"/>
+            <a:off x="2743200" y="3429000"/>
+            <a:ext cx="329184" cy="329184"/>
           </a:xfrm>
           <a:prstGeom prst="ellipse">
             <a:avLst/>
@@ -13808,8 +14305,8 @@
         </p:nvSpPr>
         <p:spPr>
           <a:xfrm>
-            <a:off x="4846320" y="1005840"/>
-            <a:ext cx="384048" cy="384048"/>
+            <a:off x="2743200" y="3429000"/>
+            <a:ext cx="329184" cy="329184"/>
           </a:xfrm>
           <a:prstGeom prst="rect">
             <a:avLst/>
@@ -13825,14 +14322,14 @@
               <a:buNone/>
             </a:pPr>
             <a:r>
-              <a:rPr lang="en-US" sz="1400" b="1" dirty="0">
+              <a:rPr lang="en-US" sz="1300" b="1" dirty="0">
                 <a:solidFill>
                   <a:schemeClr val="bg1"/>
                 </a:solidFill>
               </a:rPr>
               <a:t>1</a:t>
             </a:r>
-            <a:endParaRPr lang="en-US" sz="1400" dirty="0"/>
+            <a:endParaRPr lang="en-US" sz="1300" dirty="0"/>
           </a:p>
         </p:txBody>
       </p:sp>
@@ -13844,8 +14341,8 @@
         </p:nvSpPr>
         <p:spPr>
           <a:xfrm>
-            <a:off x="5367528" y="969264"/>
-            <a:ext cx="3319272" cy="868680"/>
+            <a:off x="3209544" y="3392424"/>
+            <a:ext cx="5477256" cy="566928"/>
           </a:xfrm>
           <a:prstGeom prst="rect">
             <a:avLst/>
@@ -13864,14 +14361,14 @@
               <a:buNone/>
             </a:pPr>
             <a:r>
-              <a:rPr lang="en-US" sz="1400" b="1" dirty="0">
+              <a:rPr lang="en-US" sz="1300" b="1" dirty="0">
                 <a:solidFill>
                   <a:schemeClr val="tx2"/>
                 </a:solidFill>
               </a:rPr>
-              <a:t>Marcar listo</a:t>
-            </a:r>
-            <a:endParaRPr lang="en-US" sz="1400" dirty="0"/>
+              <a:t>Pedidos</a:t>
+            </a:r>
+            <a:endParaRPr lang="en-US" sz="1300" dirty="0"/>
           </a:p>
           <a:p>
             <a:pPr indent="0" marL="0">
@@ -13881,14 +14378,14 @@
               <a:buNone/>
             </a:pPr>
             <a:r>
-              <a:rPr lang="en-US" sz="1400" dirty="0">
+              <a:rPr lang="en-US" sz="1300" dirty="0">
                 <a:solidFill>
                   <a:schemeClr val="tx1"/>
                 </a:solidFill>
               </a:rPr>
-              <a:t>Cuando el pedido está armado</a:t>
-            </a:r>
-            <a:endParaRPr lang="en-US" sz="1400" dirty="0"/>
+              <a:t>Por estado, vendedor, canal, producto y cliente</a:t>
+            </a:r>
+            <a:endParaRPr lang="en-US" sz="1300" dirty="0"/>
           </a:p>
         </p:txBody>
       </p:sp>
@@ -13900,8 +14397,8 @@
         </p:nvSpPr>
         <p:spPr>
           <a:xfrm>
-            <a:off x="4846320" y="1874520"/>
-            <a:ext cx="384048" cy="384048"/>
+            <a:off x="2743200" y="3995928"/>
+            <a:ext cx="329184" cy="329184"/>
           </a:xfrm>
           <a:prstGeom prst="ellipse">
             <a:avLst/>
@@ -13925,8 +14422,8 @@
         </p:nvSpPr>
         <p:spPr>
           <a:xfrm>
-            <a:off x="4846320" y="1874520"/>
-            <a:ext cx="384048" cy="384048"/>
+            <a:off x="2743200" y="3995928"/>
+            <a:ext cx="329184" cy="329184"/>
           </a:xfrm>
           <a:prstGeom prst="rect">
             <a:avLst/>
@@ -13942,14 +14439,14 @@
               <a:buNone/>
             </a:pPr>
             <a:r>
-              <a:rPr lang="en-US" sz="1400" b="1" dirty="0">
+              <a:rPr lang="en-US" sz="1300" b="1" dirty="0">
                 <a:solidFill>
                   <a:schemeClr val="bg1"/>
                 </a:solidFill>
               </a:rPr>
               <a:t>2</a:t>
             </a:r>
-            <a:endParaRPr lang="en-US" sz="1400" dirty="0"/>
+            <a:endParaRPr lang="en-US" sz="1300" dirty="0"/>
           </a:p>
         </p:txBody>
       </p:sp>
@@ -13961,8 +14458,8 @@
         </p:nvSpPr>
         <p:spPr>
           <a:xfrm>
-            <a:off x="5367528" y="1837944"/>
-            <a:ext cx="3319272" cy="868680"/>
+            <a:off x="3209544" y="3959352"/>
+            <a:ext cx="5477256" cy="566928"/>
           </a:xfrm>
           <a:prstGeom prst="rect">
             <a:avLst/>
@@ -13981,14 +14478,14 @@
               <a:buNone/>
             </a:pPr>
             <a:r>
-              <a:rPr lang="en-US" sz="1400" b="1" dirty="0">
+              <a:rPr lang="en-US" sz="1300" b="1" dirty="0">
                 <a:solidFill>
                   <a:schemeClr val="tx2"/>
                 </a:solidFill>
               </a:rPr>
-              <a:t>Despachar</a:t>
-            </a:r>
-            <a:endParaRPr lang="en-US" sz="1400" dirty="0"/>
+              <a:t>Producción y Taller</a:t>
+            </a:r>
+            <a:endParaRPr lang="en-US" sz="1300" dirty="0"/>
           </a:p>
           <a:p>
             <a:pPr indent="0" marL="0">
@@ -13998,37 +14495,39 @@
               <a:buNone/>
             </a:pPr>
             <a:r>
-              <a:rPr lang="en-US" sz="1400" dirty="0">
+              <a:rPr lang="en-US" sz="1300" dirty="0">
                 <a:solidFill>
                   <a:schemeClr val="tx1"/>
                 </a:solidFill>
               </a:rPr>
-              <a:t>Cuando sale al cliente o a la agencia</a:t>
-            </a:r>
-            <a:endParaRPr lang="en-US" sz="1400" dirty="0"/>
-          </a:p>
-        </p:txBody>
-      </p:sp>
-      <p:sp>
-        <p:nvSpPr>
-          <p:cNvPr id="14" name="Paso 3"/>
+              <a:t>Litros y bolsas por mes; colores más producidos</a:t>
+            </a:r>
+            <a:endParaRPr lang="en-US" sz="1300" dirty="0"/>
+          </a:p>
+        </p:txBody>
+      </p:sp>
+      <p:sp>
+        <p:nvSpPr>
+          <p:cNvPr id="14" name="Tarjeta Del período / de hoy"/>
           <p:cNvSpPr/>
           <p:nvPr/>
         </p:nvSpPr>
         <p:spPr>
           <a:xfrm>
-            <a:off x="4846320" y="2743200"/>
-            <a:ext cx="384048" cy="384048"/>
-          </a:xfrm>
-          <a:prstGeom prst="ellipse">
-            <a:avLst/>
+            <a:off x="6720840" y="960120"/>
+            <a:ext cx="1965960" cy="2103120"/>
+          </a:xfrm>
+          <a:prstGeom prst="roundRect">
+            <a:avLst>
+              <a:gd name="adj" fmla="val 3721"/>
+            </a:avLst>
           </a:prstGeom>
           <a:solidFill>
-            <a:schemeClr val="accent2"/>
+            <a:schemeClr val="bg2"/>
           </a:solidFill>
-          <a:ln w="12700">
+          <a:ln w="9525">
             <a:solidFill>
-              <a:schemeClr val="accent2"/>
+              <a:srgbClr val="D3DCEC"/>
             </a:solidFill>
             <a:prstDash val="solid"/>
           </a:ln>
@@ -14036,14 +14535,14 @@
       </p:sp>
       <p:sp>
         <p:nvSpPr>
-          <p:cNvPr id="15" name="Número 3"/>
+          <p:cNvPr id="15" name="Texto Del período / de hoy"/>
           <p:cNvSpPr txBox="1"/>
           <p:nvPr/>
         </p:nvSpPr>
         <p:spPr>
           <a:xfrm>
-            <a:off x="4846320" y="2743200"/>
-            <a:ext cx="384048" cy="384048"/>
+            <a:off x="6858000" y="1051560"/>
+            <a:ext cx="1691640" cy="1920240"/>
           </a:xfrm>
           <a:prstGeom prst="rect">
             <a:avLst/>
@@ -14052,194 +14551,41 @@
           <a:ln/>
         </p:spPr>
         <p:txBody>
-          <a:bodyPr wrap="square" lIns="0" tIns="0" rIns="0" bIns="0" rtlCol="0" anchor="ctr"/>
-          <a:lstStyle/>
-          <a:p>
-            <a:pPr algn="ctr" indent="0" marL="0">
-              <a:buNone/>
-            </a:pPr>
-            <a:r>
-              <a:rPr lang="en-US" sz="1400" b="1" dirty="0">
-                <a:solidFill>
-                  <a:schemeClr val="tx1"/>
-                </a:solidFill>
-              </a:rPr>
-              <a:t>3</a:t>
-            </a:r>
-            <a:endParaRPr lang="en-US" sz="1400" dirty="0"/>
-          </a:p>
-        </p:txBody>
-      </p:sp>
-      <p:sp>
-        <p:nvSpPr>
-          <p:cNvPr id="16" name="Texto paso 3"/>
-          <p:cNvSpPr txBox="1"/>
-          <p:nvPr/>
-        </p:nvSpPr>
-        <p:spPr>
-          <a:xfrm>
-            <a:off x="5367528" y="2706624"/>
-            <a:ext cx="3319272" cy="868680"/>
-          </a:xfrm>
-          <a:prstGeom prst="rect">
-            <a:avLst/>
-          </a:prstGeom>
-          <a:noFill/>
-          <a:ln/>
-        </p:spPr>
-        <p:txBody>
           <a:bodyPr wrap="square" lIns="0" tIns="0" rIns="0" bIns="0" rtlCol="0" anchor="t"/>
           <a:lstStyle/>
           <a:p>
             <a:pPr indent="0" marL="0">
               <a:spcAft>
-                <a:spcPts val="200"/>
+                <a:spcPts val="300"/>
               </a:spcAft>
               <a:buNone/>
             </a:pPr>
             <a:r>
-              <a:rPr lang="en-US" sz="1400" b="1" dirty="0">
+              <a:rPr lang="en-US" sz="1300" b="1" dirty="0">
                 <a:solidFill>
                   <a:schemeClr val="tx2"/>
                 </a:solidFill>
               </a:rPr>
-              <a:t>Marcar entregado</a:t>
-            </a:r>
-            <a:endParaRPr lang="en-US" sz="1400" dirty="0"/>
+              <a:t>Del período / de hoy</a:t>
+            </a:r>
+            <a:endParaRPr lang="en-US" sz="1300" dirty="0"/>
           </a:p>
           <a:p>
             <a:pPr indent="0" marL="0">
               <a:spcAft>
-                <a:spcPts val="200"/>
+                <a:spcPts val="300"/>
               </a:spcAft>
               <a:buNone/>
             </a:pPr>
             <a:r>
-              <a:rPr lang="en-US" sz="1400" dirty="0">
+              <a:rPr lang="en-US" sz="1200" dirty="0">
                 <a:solidFill>
                   <a:schemeClr val="tx1"/>
                 </a:solidFill>
               </a:rPr>
-              <a:t>Al entregarlo</a:t>
-            </a:r>
-            <a:endParaRPr lang="en-US" sz="1400" dirty="0"/>
-          </a:p>
-        </p:txBody>
-      </p:sp>
-      <p:sp>
-        <p:nvSpPr>
-          <p:cNvPr id="17" name="Paso 4"/>
-          <p:cNvSpPr/>
-          <p:nvPr/>
-        </p:nvSpPr>
-        <p:spPr>
-          <a:xfrm>
-            <a:off x="4846320" y="3611880"/>
-            <a:ext cx="384048" cy="384048"/>
-          </a:xfrm>
-          <a:prstGeom prst="ellipse">
-            <a:avLst/>
-          </a:prstGeom>
-          <a:solidFill>
-            <a:schemeClr val="accent4"/>
-          </a:solidFill>
-          <a:ln w="12700">
-            <a:solidFill>
-              <a:schemeClr val="accent4"/>
-            </a:solidFill>
-            <a:prstDash val="solid"/>
-          </a:ln>
-        </p:spPr>
-      </p:sp>
-      <p:sp>
-        <p:nvSpPr>
-          <p:cNvPr id="18" name="Número 4"/>
-          <p:cNvSpPr txBox="1"/>
-          <p:nvPr/>
-        </p:nvSpPr>
-        <p:spPr>
-          <a:xfrm>
-            <a:off x="4846320" y="3611880"/>
-            <a:ext cx="384048" cy="384048"/>
-          </a:xfrm>
-          <a:prstGeom prst="rect">
-            <a:avLst/>
-          </a:prstGeom>
-          <a:noFill/>
-          <a:ln/>
-        </p:spPr>
-        <p:txBody>
-          <a:bodyPr wrap="square" lIns="0" tIns="0" rIns="0" bIns="0" rtlCol="0" anchor="ctr"/>
-          <a:lstStyle/>
-          <a:p>
-            <a:pPr algn="ctr" indent="0" marL="0">
-              <a:buNone/>
-            </a:pPr>
-            <a:r>
-              <a:rPr lang="en-US" sz="1400" b="1" dirty="0">
-                <a:solidFill>
-                  <a:schemeClr val="bg1"/>
-                </a:solidFill>
-              </a:rPr>
-              <a:t>4</a:t>
-            </a:r>
-            <a:endParaRPr lang="en-US" sz="1400" dirty="0"/>
-          </a:p>
-        </p:txBody>
-      </p:sp>
-      <p:sp>
-        <p:nvSpPr>
-          <p:cNvPr id="19" name="Texto paso 4"/>
-          <p:cNvSpPr txBox="1"/>
-          <p:nvPr/>
-        </p:nvSpPr>
-        <p:spPr>
-          <a:xfrm>
-            <a:off x="5367528" y="3575304"/>
-            <a:ext cx="3319272" cy="868680"/>
-          </a:xfrm>
-          <a:prstGeom prst="rect">
-            <a:avLst/>
-          </a:prstGeom>
-          <a:noFill/>
-          <a:ln/>
-        </p:spPr>
-        <p:txBody>
-          <a:bodyPr wrap="square" lIns="0" tIns="0" rIns="0" bIns="0" rtlCol="0" anchor="t"/>
-          <a:lstStyle/>
-          <a:p>
-            <a:pPr indent="0" marL="0">
-              <a:spcAft>
-                <a:spcPts val="200"/>
-              </a:spcAft>
-              <a:buNone/>
-            </a:pPr>
-            <a:r>
-              <a:rPr lang="en-US" sz="1400" b="1" dirty="0">
-                <a:solidFill>
-                  <a:schemeClr val="tx2"/>
-                </a:solidFill>
-              </a:rPr>
-              <a:t>Enviar a revisión</a:t>
-            </a:r>
-            <a:endParaRPr lang="en-US" sz="1400" dirty="0"/>
-          </a:p>
-          <a:p>
-            <a:pPr indent="0" marL="0">
-              <a:spcAft>
-                <a:spcPts val="200"/>
-              </a:spcAft>
-              <a:buNone/>
-            </a:pPr>
-            <a:r>
-              <a:rPr lang="en-US" sz="1400" dirty="0">
-                <a:solidFill>
-                  <a:schemeClr val="tx1"/>
-                </a:solidFill>
-              </a:rPr>
-              <a:t>Si falta algo; va a Administración</a:t>
-            </a:r>
-            <a:endParaRPr lang="en-US" sz="1400" dirty="0"/>
+              <a:t>Ventas y cobros: del período elegido. Saldos y existencias: siempre de hoy.</a:t>
+            </a:r>
+            <a:endParaRPr lang="en-US" sz="1300" dirty="0"/>
           </a:p>
         </p:txBody>
       </p:sp>
@@ -14345,7 +14691,7 @@
                   <a:schemeClr val="bg1"/>
                 </a:solidFill>
               </a:rPr>
-              <a:t>Despacho</a:t>
+              <a:t>Taller</a:t>
             </a:r>
             <a:endParaRPr lang="en-US" sz="4000" dirty="0"/>
           </a:p>
@@ -14383,7 +14729,7 @@
                   <a:schemeClr val="bg1"/>
                 </a:solidFill>
               </a:rPr>
-              <a:t>Despachas los pedidos listos y marcas cuando se entregan.</a:t>
+              <a:t>Envasas, armas los pedidos, pides producción al Laboratorio, despachas y entregas.</a:t>
             </a:r>
             <a:endParaRPr lang="en-US" sz="1800" dirty="0"/>
           </a:p>
@@ -14470,7 +14816,7 @@
                   <a:schemeClr val="tx2"/>
                 </a:solidFill>
               </a:rPr>
-              <a:t>Encargado Despacho</a:t>
+              <a:t>Encargado Taller</a:t>
             </a:r>
             <a:endParaRPr lang="en-US" sz="1300" dirty="0"/>
           </a:p>
@@ -14533,7 +14879,7 @@
                   <a:schemeClr val="tx2"/>
                 </a:solidFill>
               </a:rPr>
-              <a:t>Despachar y entregar</a:t>
+              <a:t>Qué envasar y registrar el envasado</a:t>
             </a:r>
             <a:endParaRPr lang="en-US" sz="2800" dirty="0"/>
           </a:p>
@@ -14541,7 +14887,7 @@
       </p:sp>
       <p:sp>
         <p:nvSpPr>
-          <p:cNvPr id="4" name="Marco despacho-pedidos"/>
+          <p:cNvPr id="4" name="Marco taller-por-envasar"/>
           <p:cNvSpPr/>
           <p:nvPr/>
         </p:nvSpPr>
@@ -14575,7 +14921,7 @@
       </p:sp>
       <p:pic>
         <p:nvPicPr>
-          <p:cNvPr id="5" name="Captura despacho-pedidos" descr="Pantalla de la aplicación: despacho pedidos">    </p:cNvPr>
+          <p:cNvPr id="5" name="Captura taller-por-envasar" descr="Pantalla de la aplicación: taller por envasar">    </p:cNvPr>
           <p:cNvPicPr>
             <a:picLocks noChangeAspect="1"/>
           </p:cNvPicPr>
@@ -14599,7 +14945,7 @@
       </p:pic>
       <p:sp>
         <p:nvSpPr>
-          <p:cNvPr id="6" name="Marco despacho-pedido"/>
+          <p:cNvPr id="6" name="Marco taller-envasados"/>
           <p:cNvSpPr/>
           <p:nvPr/>
         </p:nvSpPr>
@@ -14633,7 +14979,7 @@
       </p:sp>
       <p:pic>
         <p:nvPicPr>
-          <p:cNvPr id="7" name="Captura despacho-pedido" descr="Pantalla de la aplicación: despacho pedido">    </p:cNvPr>
+          <p:cNvPr id="7" name="Captura taller-envasados" descr="Pantalla de la aplicación: taller envasados">    </p:cNvPr>
           <p:cNvPicPr>
             <a:picLocks noChangeAspect="1"/>
           </p:cNvPicPr>
@@ -14749,7 +15095,7 @@
                   <a:schemeClr val="tx2"/>
                 </a:solidFill>
               </a:rPr>
-              <a:t>Pedidos Listos</a:t>
+              <a:t>Por envasar</a:t>
             </a:r>
             <a:endParaRPr lang="en-US" sz="1400" dirty="0"/>
           </a:p>
@@ -14766,7 +15112,7 @@
                   <a:schemeClr val="tx1"/>
                 </a:solidFill>
               </a:rPr>
-              <a:t>La lista se abre en ellos</a:t>
+              <a:t>Frascos pendientes y bolsas a llenar</a:t>
             </a:r>
             <a:endParaRPr lang="en-US" sz="1400" dirty="0"/>
           </a:p>
@@ -14866,7 +15212,7 @@
                   <a:schemeClr val="tx2"/>
                 </a:solidFill>
               </a:rPr>
-              <a:t>Revisa el pedido</a:t>
+              <a:t>Registrar envasado</a:t>
             </a:r>
             <a:endParaRPr lang="en-US" sz="1400" dirty="0"/>
           </a:p>
@@ -14883,7 +15229,7 @@
                   <a:schemeClr val="tx1"/>
                 </a:solidFill>
               </a:rPr>
-              <a:t>Cliente, entrega o agencia y empaque</a:t>
+              <a:t>Color, medida y bolsas llenas</a:t>
             </a:r>
             <a:endParaRPr lang="en-US" sz="1400" dirty="0"/>
           </a:p>
@@ -14983,7 +15329,7 @@
                   <a:schemeClr val="tx2"/>
                 </a:solidFill>
               </a:rPr>
-              <a:t>Despachar</a:t>
+              <a:t>Falta granel</a:t>
             </a:r>
             <a:endParaRPr lang="en-US" sz="1400" dirty="0"/>
           </a:p>
@@ -15000,7 +15346,7 @@
                   <a:schemeClr val="tx1"/>
                 </a:solidFill>
               </a:rPr>
-              <a:t>Cuando sale</a:t>
+              <a:t>Pedidos al Laboratorio → nueva orden</a:t>
             </a:r>
             <a:endParaRPr lang="en-US" sz="1400" dirty="0"/>
           </a:p>
@@ -15100,7 +15446,7 @@
                   <a:schemeClr val="tx2"/>
                 </a:solidFill>
               </a:rPr>
-              <a:t>Marcar entregado</a:t>
+              <a:t>Bolsas</a:t>
             </a:r>
             <a:endParaRPr lang="en-US" sz="1400" dirty="0"/>
           </a:p>
@@ -15117,7 +15463,7 @@
                   <a:schemeClr val="tx1"/>
                 </a:solidFill>
               </a:rPr>
-              <a:t>Cuando el cliente lo recibe</a:t>
+              <a:t>12 frascos hasta 120 ml; 6 en 250 ml</a:t>
             </a:r>
             <a:endParaRPr lang="en-US" sz="1400" dirty="0"/>
           </a:p>
@@ -15240,11 +15586,11 @@
         <p:spPr>
           <a:xfrm>
             <a:off x="457200" y="1051560"/>
-            <a:ext cx="2606040" cy="1234440"/>
+            <a:ext cx="1965960" cy="1280160"/>
           </a:xfrm>
           <a:prstGeom prst="roundRect">
             <a:avLst>
-              <a:gd name="adj" fmla="val 5926"/>
+              <a:gd name="adj" fmla="val 5714"/>
             </a:avLst>
           </a:prstGeom>
           <a:solidFill>
@@ -15267,7 +15613,7 @@
         <p:spPr>
           <a:xfrm>
             <a:off x="594360" y="1143000"/>
-            <a:ext cx="2331720" cy="1051560"/>
+            <a:ext cx="1691640" cy="1097280"/>
           </a:xfrm>
           <a:prstGeom prst="rect">
             <a:avLst/>
@@ -15286,14 +15632,14 @@
               <a:buNone/>
             </a:pPr>
             <a:r>
-              <a:rPr lang="en-US" sz="1500" b="1" dirty="0">
+              <a:rPr lang="en-US" sz="1400" b="1" dirty="0">
                 <a:solidFill>
                   <a:schemeClr val="accent1"/>
                 </a:solidFill>
               </a:rPr>
               <a:t>Pedidos</a:t>
             </a:r>
-            <a:endParaRPr lang="en-US" sz="1500" dirty="0"/>
+            <a:endParaRPr lang="en-US" sz="1400" dirty="0"/>
           </a:p>
           <a:p>
             <a:pPr indent="0" marL="0">
@@ -15303,14 +15649,14 @@
               <a:buNone/>
             </a:pPr>
             <a:r>
-              <a:rPr lang="en-US" sz="1400" dirty="0">
+              <a:rPr lang="en-US" sz="1300" dirty="0">
                 <a:solidFill>
                   <a:schemeClr val="tx1"/>
                 </a:solidFill>
               </a:rPr>
               <a:t>Catálogo, carrito y estado de cada pedido</a:t>
             </a:r>
-            <a:endParaRPr lang="en-US" sz="1500" dirty="0"/>
+            <a:endParaRPr lang="en-US" sz="1400" dirty="0"/>
           </a:p>
         </p:txBody>
       </p:sp>
@@ -15322,12 +15668,12 @@
         </p:nvSpPr>
         <p:spPr>
           <a:xfrm>
-            <a:off x="3246120" y="1051560"/>
-            <a:ext cx="2606040" cy="1234440"/>
+            <a:off x="2560320" y="1051560"/>
+            <a:ext cx="1965960" cy="1280160"/>
           </a:xfrm>
           <a:prstGeom prst="roundRect">
             <a:avLst>
-              <a:gd name="adj" fmla="val 5926"/>
+              <a:gd name="adj" fmla="val 5714"/>
             </a:avLst>
           </a:prstGeom>
           <a:solidFill>
@@ -15349,8 +15695,8 @@
         </p:nvSpPr>
         <p:spPr>
           <a:xfrm>
-            <a:off x="3383280" y="1143000"/>
-            <a:ext cx="2331720" cy="1051560"/>
+            <a:off x="2697480" y="1143000"/>
+            <a:ext cx="1691640" cy="1097280"/>
           </a:xfrm>
           <a:prstGeom prst="rect">
             <a:avLst/>
@@ -15369,14 +15715,14 @@
               <a:buNone/>
             </a:pPr>
             <a:r>
-              <a:rPr lang="en-US" sz="1500" b="1" dirty="0">
+              <a:rPr lang="en-US" sz="1400" b="1" dirty="0">
                 <a:solidFill>
                   <a:schemeClr val="accent5"/>
                 </a:solidFill>
               </a:rPr>
               <a:t>Clientes</a:t>
             </a:r>
-            <a:endParaRPr lang="en-US" sz="1500" dirty="0"/>
+            <a:endParaRPr lang="en-US" sz="1400" dirty="0"/>
           </a:p>
           <a:p>
             <a:pPr indent="0" marL="0">
@@ -15386,14 +15732,14 @@
               <a:buNone/>
             </a:pPr>
             <a:r>
-              <a:rPr lang="en-US" sz="1400" dirty="0">
+              <a:rPr lang="en-US" sz="1300" dirty="0">
                 <a:solidFill>
                   <a:schemeClr val="tx1"/>
                 </a:solidFill>
               </a:rPr>
               <a:t>Ficha y precios por docena de cada cliente</a:t>
             </a:r>
-            <a:endParaRPr lang="en-US" sz="1500" dirty="0"/>
+            <a:endParaRPr lang="en-US" sz="1400" dirty="0"/>
           </a:p>
         </p:txBody>
       </p:sp>
@@ -15405,12 +15751,12 @@
         </p:nvSpPr>
         <p:spPr>
           <a:xfrm>
-            <a:off x="6035040" y="1051560"/>
-            <a:ext cx="2606040" cy="1234440"/>
+            <a:off x="4663440" y="1051560"/>
+            <a:ext cx="1965960" cy="1280160"/>
           </a:xfrm>
           <a:prstGeom prst="roundRect">
             <a:avLst>
-              <a:gd name="adj" fmla="val 5926"/>
+              <a:gd name="adj" fmla="val 5714"/>
             </a:avLst>
           </a:prstGeom>
           <a:solidFill>
@@ -15432,8 +15778,8 @@
         </p:nvSpPr>
         <p:spPr>
           <a:xfrm>
-            <a:off x="6172200" y="1143000"/>
-            <a:ext cx="2331720" cy="1051560"/>
+            <a:off x="4800600" y="1143000"/>
+            <a:ext cx="1691640" cy="1097280"/>
           </a:xfrm>
           <a:prstGeom prst="rect">
             <a:avLst/>
@@ -15452,14 +15798,14 @@
               <a:buNone/>
             </a:pPr>
             <a:r>
-              <a:rPr lang="en-US" sz="1500" b="1" dirty="0">
+              <a:rPr lang="en-US" sz="1400" b="1" dirty="0">
                 <a:solidFill>
                   <a:schemeClr val="accent3"/>
                 </a:solidFill>
               </a:rPr>
               <a:t>Cobranzas</a:t>
             </a:r>
-            <a:endParaRPr lang="en-US" sz="1500" dirty="0"/>
+            <a:endParaRPr lang="en-US" sz="1400" dirty="0"/>
           </a:p>
           <a:p>
             <a:pPr indent="0" marL="0">
@@ -15469,14 +15815,14 @@
               <a:buNone/>
             </a:pPr>
             <a:r>
-              <a:rPr lang="en-US" sz="1400" dirty="0">
+              <a:rPr lang="en-US" sz="1300" dirty="0">
                 <a:solidFill>
                   <a:schemeClr val="tx1"/>
                 </a:solidFill>
               </a:rPr>
               <a:t>Cobros con recibo y cuadre del dinero</a:t>
             </a:r>
-            <a:endParaRPr lang="en-US" sz="1500" dirty="0"/>
+            <a:endParaRPr lang="en-US" sz="1400" dirty="0"/>
           </a:p>
         </p:txBody>
       </p:sp>
@@ -15488,12 +15834,12 @@
         </p:nvSpPr>
         <p:spPr>
           <a:xfrm>
-            <a:off x="457200" y="2468880"/>
-            <a:ext cx="2606040" cy="1234440"/>
+            <a:off x="6766560" y="1051560"/>
+            <a:ext cx="1965960" cy="1280160"/>
           </a:xfrm>
           <a:prstGeom prst="roundRect">
             <a:avLst>
-              <a:gd name="adj" fmla="val 5926"/>
+              <a:gd name="adj" fmla="val 5714"/>
             </a:avLst>
           </a:prstGeom>
           <a:solidFill>
@@ -15515,8 +15861,8 @@
         </p:nvSpPr>
         <p:spPr>
           <a:xfrm>
-            <a:off x="594360" y="2560320"/>
-            <a:ext cx="2331720" cy="1051560"/>
+            <a:off x="6903720" y="1143000"/>
+            <a:ext cx="1691640" cy="1097280"/>
           </a:xfrm>
           <a:prstGeom prst="rect">
             <a:avLst/>
@@ -15535,14 +15881,14 @@
               <a:buNone/>
             </a:pPr>
             <a:r>
-              <a:rPr lang="en-US" sz="1500" b="1" dirty="0">
+              <a:rPr lang="en-US" sz="1400" b="1" dirty="0">
                 <a:solidFill>
                   <a:schemeClr val="accent4"/>
                 </a:solidFill>
               </a:rPr>
               <a:t>Producción</a:t>
             </a:r>
-            <a:endParaRPr lang="en-US" sz="1500" dirty="0"/>
+            <a:endParaRPr lang="en-US" sz="1400" dirty="0"/>
           </a:p>
           <a:p>
             <a:pPr indent="0" marL="0">
@@ -15552,14 +15898,14 @@
               <a:buNone/>
             </a:pPr>
             <a:r>
-              <a:rPr lang="en-US" sz="1400" dirty="0">
+              <a:rPr lang="en-US" sz="1300" dirty="0">
                 <a:solidFill>
                   <a:schemeClr val="tx1"/>
                 </a:solidFill>
               </a:rPr>
               <a:t>Órdenes y lotes del Laboratorio</a:t>
             </a:r>
-            <a:endParaRPr lang="en-US" sz="1500" dirty="0"/>
+            <a:endParaRPr lang="en-US" sz="1400" dirty="0"/>
           </a:p>
         </p:txBody>
       </p:sp>
@@ -15571,12 +15917,12 @@
         </p:nvSpPr>
         <p:spPr>
           <a:xfrm>
-            <a:off x="3246120" y="2468880"/>
-            <a:ext cx="2606040" cy="1234440"/>
+            <a:off x="457200" y="2468880"/>
+            <a:ext cx="1965960" cy="1280160"/>
           </a:xfrm>
           <a:prstGeom prst="roundRect">
             <a:avLst>
-              <a:gd name="adj" fmla="val 5926"/>
+              <a:gd name="adj" fmla="val 5714"/>
             </a:avLst>
           </a:prstGeom>
           <a:solidFill>
@@ -15598,8 +15944,8 @@
         </p:nvSpPr>
         <p:spPr>
           <a:xfrm>
-            <a:off x="3383280" y="2560320"/>
-            <a:ext cx="2331720" cy="1051560"/>
+            <a:off x="594360" y="2560320"/>
+            <a:ext cx="1691640" cy="1097280"/>
           </a:xfrm>
           <a:prstGeom prst="rect">
             <a:avLst/>
@@ -15618,14 +15964,14 @@
               <a:buNone/>
             </a:pPr>
             <a:r>
-              <a:rPr lang="en-US" sz="1500" b="1" dirty="0">
+              <a:rPr lang="en-US" sz="1400" b="1" dirty="0">
                 <a:solidFill>
                   <a:schemeClr val="accent3"/>
                 </a:solidFill>
               </a:rPr>
               <a:t>Taller</a:t>
             </a:r>
-            <a:endParaRPr lang="en-US" sz="1500" dirty="0"/>
+            <a:endParaRPr lang="en-US" sz="1400" dirty="0"/>
           </a:p>
           <a:p>
             <a:pPr indent="0" marL="0">
@@ -15635,14 +15981,14 @@
               <a:buNone/>
             </a:pPr>
             <a:r>
-              <a:rPr lang="en-US" sz="1400" dirty="0">
+              <a:rPr lang="en-US" sz="1300" dirty="0">
                 <a:solidFill>
                   <a:schemeClr val="tx1"/>
                 </a:solidFill>
               </a:rPr>
               <a:t>Envasado, armado y despacho</a:t>
             </a:r>
-            <a:endParaRPr lang="en-US" sz="1500" dirty="0"/>
+            <a:endParaRPr lang="en-US" sz="1400" dirty="0"/>
           </a:p>
         </p:txBody>
       </p:sp>
@@ -15654,12 +16000,12 @@
         </p:nvSpPr>
         <p:spPr>
           <a:xfrm>
-            <a:off x="6035040" y="2468880"/>
-            <a:ext cx="2606040" cy="1234440"/>
+            <a:off x="2560320" y="2468880"/>
+            <a:ext cx="1965960" cy="1280160"/>
           </a:xfrm>
           <a:prstGeom prst="roundRect">
             <a:avLst>
-              <a:gd name="adj" fmla="val 5926"/>
+              <a:gd name="adj" fmla="val 5714"/>
             </a:avLst>
           </a:prstGeom>
           <a:solidFill>
@@ -15681,8 +16027,8 @@
         </p:nvSpPr>
         <p:spPr>
           <a:xfrm>
-            <a:off x="6172200" y="2560320"/>
-            <a:ext cx="2331720" cy="1051560"/>
+            <a:off x="2697480" y="2560320"/>
+            <a:ext cx="1691640" cy="1097280"/>
           </a:xfrm>
           <a:prstGeom prst="rect">
             <a:avLst/>
@@ -15701,14 +16047,14 @@
               <a:buNone/>
             </a:pPr>
             <a:r>
-              <a:rPr lang="en-US" sz="1500" b="1" dirty="0">
+              <a:rPr lang="en-US" sz="1400" b="1" dirty="0">
                 <a:solidFill>
                   <a:schemeClr val="accent1"/>
                 </a:solidFill>
               </a:rPr>
               <a:t>Almacén</a:t>
             </a:r>
-            <a:endParaRPr lang="en-US" sz="1500" dirty="0"/>
+            <a:endParaRPr lang="en-US" sz="1400" dirty="0"/>
           </a:p>
           <a:p>
             <a:pPr indent="0" marL="0">
@@ -15718,20 +16064,103 @@
               <a:buNone/>
             </a:pPr>
             <a:r>
-              <a:rPr lang="en-US" sz="1400" dirty="0">
+              <a:rPr lang="en-US" sz="1300" dirty="0">
                 <a:solidFill>
                   <a:schemeClr val="tx1"/>
                 </a:solidFill>
               </a:rPr>
               <a:t>Insumos, granel, materiales y producto envasado</a:t>
             </a:r>
-            <a:endParaRPr lang="en-US" sz="1500" dirty="0"/>
-          </a:p>
-        </p:txBody>
-      </p:sp>
-      <p:sp>
-        <p:nvSpPr>
-          <p:cNvPr id="16" name="Mensaje"/>
+            <a:endParaRPr lang="en-US" sz="1400" dirty="0"/>
+          </a:p>
+        </p:txBody>
+      </p:sp>
+      <p:sp>
+        <p:nvSpPr>
+          <p:cNvPr id="16" name="Tarjeta Análisis"/>
+          <p:cNvSpPr/>
+          <p:nvPr/>
+        </p:nvSpPr>
+        <p:spPr>
+          <a:xfrm>
+            <a:off x="4663440" y="2468880"/>
+            <a:ext cx="1965960" cy="1280160"/>
+          </a:xfrm>
+          <a:prstGeom prst="roundRect">
+            <a:avLst>
+              <a:gd name="adj" fmla="val 5714"/>
+            </a:avLst>
+          </a:prstGeom>
+          <a:solidFill>
+            <a:schemeClr val="bg2"/>
+          </a:solidFill>
+          <a:ln w="9525">
+            <a:solidFill>
+              <a:srgbClr val="D3DCEC"/>
+            </a:solidFill>
+            <a:prstDash val="solid"/>
+          </a:ln>
+        </p:spPr>
+      </p:sp>
+      <p:sp>
+        <p:nvSpPr>
+          <p:cNvPr id="17" name="Texto Análisis"/>
+          <p:cNvSpPr txBox="1"/>
+          <p:nvPr/>
+        </p:nvSpPr>
+        <p:spPr>
+          <a:xfrm>
+            <a:off x="4800600" y="2560320"/>
+            <a:ext cx="1691640" cy="1097280"/>
+          </a:xfrm>
+          <a:prstGeom prst="rect">
+            <a:avLst/>
+          </a:prstGeom>
+          <a:noFill/>
+          <a:ln/>
+        </p:spPr>
+        <p:txBody>
+          <a:bodyPr wrap="square" lIns="0" tIns="0" rIns="0" bIns="0" rtlCol="0" anchor="t"/>
+          <a:lstStyle/>
+          <a:p>
+            <a:pPr indent="0" marL="0">
+              <a:spcAft>
+                <a:spcPts val="300"/>
+              </a:spcAft>
+              <a:buNone/>
+            </a:pPr>
+            <a:r>
+              <a:rPr lang="en-US" sz="1400" b="1" dirty="0">
+                <a:solidFill>
+                  <a:schemeClr val="accent4"/>
+                </a:solidFill>
+              </a:rPr>
+              <a:t>Análisis</a:t>
+            </a:r>
+            <a:endParaRPr lang="en-US" sz="1400" dirty="0"/>
+          </a:p>
+          <a:p>
+            <a:pPr indent="0" marL="0">
+              <a:spcAft>
+                <a:spcPts val="300"/>
+              </a:spcAft>
+              <a:buNone/>
+            </a:pPr>
+            <a:r>
+              <a:rPr lang="en-US" sz="1300" dirty="0">
+                <a:solidFill>
+                  <a:schemeClr val="tx1"/>
+                </a:solidFill>
+              </a:rPr>
+              <a:t>Métricas y gráficos (socios y Administración)</a:t>
+            </a:r>
+            <a:endParaRPr lang="en-US" sz="1400" dirty="0"/>
+          </a:p>
+        </p:txBody>
+      </p:sp>
+      <p:sp>
+        <p:nvSpPr>
+          <p:cNvPr id="18" name="Mensaje"/>
           <p:cNvSpPr txBox="1"/>
           <p:nvPr/>
         </p:nvSpPr>
@@ -15845,8 +16274,8 @@
         </p:nvSpPr>
         <p:spPr>
           <a:xfrm>
-            <a:off x="548640" y="1371600"/>
-            <a:ext cx="5669280" cy="914400"/>
+            <a:off x="457200" y="256032"/>
+            <a:ext cx="7863840" cy="594360"/>
           </a:xfrm>
           <a:prstGeom prst="rect">
             <a:avLst/>
@@ -15855,92 +16284,61 @@
           <a:ln/>
         </p:spPr>
         <p:txBody>
-          <a:bodyPr wrap="square" lIns="0" tIns="0" rIns="0" bIns="0" rtlCol="0" anchor="b"/>
+          <a:bodyPr wrap="square" lIns="0" tIns="0" rIns="0" bIns="0" rtlCol="0" anchor="ctr"/>
           <a:lstStyle/>
           <a:p>
             <a:pPr algn="l" indent="0" marL="0">
               <a:buNone/>
             </a:pPr>
             <a:r>
-              <a:rPr lang="en-US" sz="4000" b="1" dirty="0">
-                <a:solidFill>
-                  <a:schemeClr val="bg1"/>
-                </a:solidFill>
-              </a:rPr>
-              <a:t>Laboratorio</a:t>
-            </a:r>
-            <a:endParaRPr lang="en-US" sz="4000" dirty="0"/>
-          </a:p>
-        </p:txBody>
-      </p:sp>
-      <p:sp>
-        <p:nvSpPr>
-          <p:cNvPr id="3" name="Text 0"/>
+              <a:rPr lang="en-US" sz="2800" b="1" dirty="0">
+                <a:solidFill>
+                  <a:schemeClr val="tx2"/>
+                </a:solidFill>
+              </a:rPr>
+              <a:t>Arma, despacha y entrega</a:t>
+            </a:r>
+            <a:endParaRPr lang="en-US" sz="2800" dirty="0"/>
+          </a:p>
+        </p:txBody>
+      </p:sp>
+      <p:sp>
+        <p:nvSpPr>
+          <p:cNvPr id="4" name="Marco taller-pedido"/>
           <p:cNvSpPr/>
-          <p:nvPr>
-            <p:ph idx="101" type="body" hasCustomPrompt="1"/>
-          </p:nvPr>
-        </p:nvSpPr>
-        <p:spPr>
-          <a:xfrm>
-            <a:off x="548640" y="2423160"/>
-            <a:ext cx="5669280" cy="1463040"/>
-          </a:xfrm>
-          <a:prstGeom prst="rect">
-            <a:avLst/>
-          </a:prstGeom>
-          <a:noFill/>
-          <a:ln/>
-        </p:spPr>
-        <p:txBody>
-          <a:bodyPr wrap="square" lIns="0" tIns="0" rIns="0" bIns="0" rtlCol="0" anchor="t"/>
-          <a:lstStyle/>
-          <a:p>
-            <a:pPr indent="0" marL="0">
-              <a:buNone/>
-            </a:pPr>
-            <a:r>
-              <a:rPr lang="en-US" sz="1800" dirty="0">
-                <a:solidFill>
-                  <a:schemeClr val="bg1"/>
-                </a:solidFill>
-              </a:rPr>
-              <a:t>Fabricas los lotes que pide el Taller, los validas y los entregas.</a:t>
-            </a:r>
-            <a:endParaRPr lang="en-US" sz="1800" dirty="0"/>
-          </a:p>
-        </p:txBody>
-      </p:sp>
-      <p:sp>
-        <p:nvSpPr>
-          <p:cNvPr id="4" name="Tarjeta perfil"/>
-          <p:cNvSpPr/>
-          <p:nvPr/>
-        </p:nvSpPr>
-        <p:spPr>
-          <a:xfrm>
-            <a:off x="6583680" y="1417320"/>
-            <a:ext cx="2011680" cy="2377440"/>
+          <p:nvPr/>
+        </p:nvSpPr>
+        <p:spPr>
+          <a:xfrm>
+            <a:off x="484632" y="850392"/>
+            <a:ext cx="1839266" cy="3831336"/>
           </a:xfrm>
           <a:prstGeom prst="roundRect">
             <a:avLst>
-              <a:gd name="adj" fmla="val 6818"/>
+              <a:gd name="adj" fmla="val 6960"/>
             </a:avLst>
           </a:prstGeom>
           <a:solidFill>
-            <a:schemeClr val="bg1"/>
+            <a:schemeClr val="tx1"/>
           </a:solidFill>
-          <a:ln w="12700">
+          <a:ln w="9525">
             <a:solidFill>
-              <a:schemeClr val="bg1"/>
+              <a:srgbClr val="D3DCEC"/>
             </a:solidFill>
             <a:prstDash val="solid"/>
           </a:ln>
+          <a:effectLst>
+            <a:outerShdw sx="100000" sy="100000" kx="0" ky="0" algn="bl" rotWithShape="0" blurRad="76200" dist="25400" dir="5400000">
+              <a:srgbClr val="0F1E3D">
+                <a:alpha val="18000"/>
+              </a:srgbClr>
+            </a:outerShdw>
+          </a:effectLst>
         </p:spPr>
       </p:sp>
       <p:pic>
         <p:nvPicPr>
-          <p:cNvPr id="5" name="Logo" descr="/home/claude/pinturas-liz-app/public/logo.png">    </p:cNvPr>
+          <p:cNvPr id="5" name="Captura taller-pedido" descr="Pantalla de la aplicación: taller pedido">    </p:cNvPr>
           <p:cNvPicPr>
             <a:picLocks noChangeAspect="1"/>
           </p:cNvPicPr>
@@ -15954,8 +16352,8 @@
         </p:blipFill>
         <p:spPr>
           <a:xfrm>
-            <a:off x="6812280" y="1600200"/>
-            <a:ext cx="1554480" cy="1161288"/>
+            <a:off x="548640" y="914400"/>
+            <a:ext cx="1711250" cy="3703320"/>
           </a:xfrm>
           <a:prstGeom prst="rect">
             <a:avLst/>
@@ -15964,14 +16362,97 @@
       </p:pic>
       <p:sp>
         <p:nvSpPr>
-          <p:cNvPr id="6" name="Quién"/>
+          <p:cNvPr id="6" name="Marco taller-ordenes"/>
+          <p:cNvSpPr/>
+          <p:nvPr/>
+        </p:nvSpPr>
+        <p:spPr>
+          <a:xfrm>
+            <a:off x="2496312" y="850392"/>
+            <a:ext cx="1839266" cy="3831336"/>
+          </a:xfrm>
+          <a:prstGeom prst="roundRect">
+            <a:avLst>
+              <a:gd name="adj" fmla="val 6960"/>
+            </a:avLst>
+          </a:prstGeom>
+          <a:solidFill>
+            <a:schemeClr val="tx1"/>
+          </a:solidFill>
+          <a:ln w="9525">
+            <a:solidFill>
+              <a:srgbClr val="D3DCEC"/>
+            </a:solidFill>
+            <a:prstDash val="solid"/>
+          </a:ln>
+          <a:effectLst>
+            <a:outerShdw sx="100000" sy="100000" kx="0" ky="0" algn="bl" rotWithShape="0" blurRad="76200" dist="25400" dir="5400000">
+              <a:srgbClr val="0F1E3D">
+                <a:alpha val="18000"/>
+              </a:srgbClr>
+            </a:outerShdw>
+          </a:effectLst>
+        </p:spPr>
+      </p:sp>
+      <p:pic>
+        <p:nvPicPr>
+          <p:cNvPr id="7" name="Captura taller-ordenes" descr="Pantalla de la aplicación: taller ordenes">    </p:cNvPr>
+          <p:cNvPicPr>
+            <a:picLocks noChangeAspect="1"/>
+          </p:cNvPicPr>
+          <p:nvPr/>
+        </p:nvPicPr>
+        <p:blipFill>
+          <a:blip r:embed="rId2"/>
+          <a:stretch>
+            <a:fillRect/>
+          </a:stretch>
+        </p:blipFill>
+        <p:spPr>
+          <a:xfrm>
+            <a:off x="2560320" y="914400"/>
+            <a:ext cx="1711250" cy="3703320"/>
+          </a:xfrm>
+          <a:prstGeom prst="rect">
+            <a:avLst/>
+          </a:prstGeom>
+        </p:spPr>
+      </p:pic>
+      <p:sp>
+        <p:nvSpPr>
+          <p:cNvPr id="8" name="Paso 1"/>
+          <p:cNvSpPr/>
+          <p:nvPr/>
+        </p:nvSpPr>
+        <p:spPr>
+          <a:xfrm>
+            <a:off x="4846320" y="1005840"/>
+            <a:ext cx="384048" cy="384048"/>
+          </a:xfrm>
+          <a:prstGeom prst="ellipse">
+            <a:avLst/>
+          </a:prstGeom>
+          <a:solidFill>
+            <a:schemeClr val="accent1"/>
+          </a:solidFill>
+          <a:ln w="12700">
+            <a:solidFill>
+              <a:schemeClr val="accent1"/>
+            </a:solidFill>
+            <a:prstDash val="solid"/>
+          </a:ln>
+        </p:spPr>
+      </p:sp>
+      <p:sp>
+        <p:nvSpPr>
+          <p:cNvPr id="9" name="Número 1"/>
           <p:cNvSpPr txBox="1"/>
           <p:nvPr/>
         </p:nvSpPr>
         <p:spPr>
           <a:xfrm>
-            <a:off x="6675120" y="2880360"/>
-            <a:ext cx="1828800" cy="822960"/>
+            <a:off x="4846320" y="1005840"/>
+            <a:ext cx="384048" cy="384048"/>
           </a:xfrm>
           <a:prstGeom prst="rect">
             <a:avLst/>
@@ -15987,28 +16468,466 @@
               <a:buNone/>
             </a:pPr>
             <a:r>
-              <a:rPr lang="en-US" sz="1300" b="1" dirty="0">
+              <a:rPr lang="en-US" sz="1400" b="1" dirty="0">
+                <a:solidFill>
+                  <a:schemeClr val="bg1"/>
+                </a:solidFill>
+              </a:rPr>
+              <a:t>1</a:t>
+            </a:r>
+            <a:endParaRPr lang="en-US" sz="1400" dirty="0"/>
+          </a:p>
+        </p:txBody>
+      </p:sp>
+      <p:sp>
+        <p:nvSpPr>
+          <p:cNvPr id="10" name="Texto paso 1"/>
+          <p:cNvSpPr txBox="1"/>
+          <p:nvPr/>
+        </p:nvSpPr>
+        <p:spPr>
+          <a:xfrm>
+            <a:off x="5367528" y="969264"/>
+            <a:ext cx="3319272" cy="868680"/>
+          </a:xfrm>
+          <a:prstGeom prst="rect">
+            <a:avLst/>
+          </a:prstGeom>
+          <a:noFill/>
+          <a:ln/>
+        </p:spPr>
+        <p:txBody>
+          <a:bodyPr wrap="square" lIns="0" tIns="0" rIns="0" bIns="0" rtlCol="0" anchor="t"/>
+          <a:lstStyle/>
+          <a:p>
+            <a:pPr indent="0" marL="0">
+              <a:spcAft>
+                <a:spcPts val="200"/>
+              </a:spcAft>
+              <a:buNone/>
+            </a:pPr>
+            <a:r>
+              <a:rPr lang="en-US" sz="1400" b="1" dirty="0">
                 <a:solidFill>
                   <a:schemeClr val="tx2"/>
                 </a:solidFill>
               </a:rPr>
-              <a:t>Bryan Roldan</a:t>
-            </a:r>
-            <a:endParaRPr lang="en-US" sz="1300" dirty="0"/>
-          </a:p>
+              <a:t>Marcar listo</a:t>
+            </a:r>
+            <a:endParaRPr lang="en-US" sz="1400" dirty="0"/>
+          </a:p>
+          <a:p>
+            <a:pPr indent="0" marL="0">
+              <a:spcAft>
+                <a:spcPts val="200"/>
+              </a:spcAft>
+              <a:buNone/>
+            </a:pPr>
+            <a:r>
+              <a:rPr lang="en-US" sz="1400" dirty="0">
+                <a:solidFill>
+                  <a:schemeClr val="tx1"/>
+                </a:solidFill>
+              </a:rPr>
+              <a:t>Cuando el pedido está armado</a:t>
+            </a:r>
+            <a:endParaRPr lang="en-US" sz="1400" dirty="0"/>
+          </a:p>
+        </p:txBody>
+      </p:sp>
+      <p:sp>
+        <p:nvSpPr>
+          <p:cNvPr id="11" name="Paso 2"/>
+          <p:cNvSpPr/>
+          <p:nvPr/>
+        </p:nvSpPr>
+        <p:spPr>
+          <a:xfrm>
+            <a:off x="4846320" y="1874520"/>
+            <a:ext cx="384048" cy="384048"/>
+          </a:xfrm>
+          <a:prstGeom prst="ellipse">
+            <a:avLst/>
+          </a:prstGeom>
+          <a:solidFill>
+            <a:schemeClr val="accent5"/>
+          </a:solidFill>
+          <a:ln w="12700">
+            <a:solidFill>
+              <a:schemeClr val="accent5"/>
+            </a:solidFill>
+            <a:prstDash val="solid"/>
+          </a:ln>
+        </p:spPr>
+      </p:sp>
+      <p:sp>
+        <p:nvSpPr>
+          <p:cNvPr id="12" name="Número 2"/>
+          <p:cNvSpPr txBox="1"/>
+          <p:nvPr/>
+        </p:nvSpPr>
+        <p:spPr>
+          <a:xfrm>
+            <a:off x="4846320" y="1874520"/>
+            <a:ext cx="384048" cy="384048"/>
+          </a:xfrm>
+          <a:prstGeom prst="rect">
+            <a:avLst/>
+          </a:prstGeom>
+          <a:noFill/>
+          <a:ln/>
+        </p:spPr>
+        <p:txBody>
+          <a:bodyPr wrap="square" lIns="0" tIns="0" rIns="0" bIns="0" rtlCol="0" anchor="ctr"/>
+          <a:lstStyle/>
           <a:p>
             <a:pPr algn="ctr" indent="0" marL="0">
               <a:buNone/>
             </a:pPr>
             <a:r>
-              <a:rPr lang="en-US" sz="1300" b="1" dirty="0">
+              <a:rPr lang="en-US" sz="1400" b="1" dirty="0">
+                <a:solidFill>
+                  <a:schemeClr val="bg1"/>
+                </a:solidFill>
+              </a:rPr>
+              <a:t>2</a:t>
+            </a:r>
+            <a:endParaRPr lang="en-US" sz="1400" dirty="0"/>
+          </a:p>
+        </p:txBody>
+      </p:sp>
+      <p:sp>
+        <p:nvSpPr>
+          <p:cNvPr id="13" name="Texto paso 2"/>
+          <p:cNvSpPr txBox="1"/>
+          <p:nvPr/>
+        </p:nvSpPr>
+        <p:spPr>
+          <a:xfrm>
+            <a:off x="5367528" y="1837944"/>
+            <a:ext cx="3319272" cy="868680"/>
+          </a:xfrm>
+          <a:prstGeom prst="rect">
+            <a:avLst/>
+          </a:prstGeom>
+          <a:noFill/>
+          <a:ln/>
+        </p:spPr>
+        <p:txBody>
+          <a:bodyPr wrap="square" lIns="0" tIns="0" rIns="0" bIns="0" rtlCol="0" anchor="t"/>
+          <a:lstStyle/>
+          <a:p>
+            <a:pPr indent="0" marL="0">
+              <a:spcAft>
+                <a:spcPts val="200"/>
+              </a:spcAft>
+              <a:buNone/>
+            </a:pPr>
+            <a:r>
+              <a:rPr lang="en-US" sz="1400" b="1" dirty="0">
                 <a:solidFill>
                   <a:schemeClr val="tx2"/>
                 </a:solidFill>
               </a:rPr>
-              <a:t>(Laboratorio)</a:t>
-            </a:r>
-            <a:endParaRPr lang="en-US" sz="1300" dirty="0"/>
+              <a:t>Despachar</a:t>
+            </a:r>
+            <a:endParaRPr lang="en-US" sz="1400" dirty="0"/>
+          </a:p>
+          <a:p>
+            <a:pPr indent="0" marL="0">
+              <a:spcAft>
+                <a:spcPts val="200"/>
+              </a:spcAft>
+              <a:buNone/>
+            </a:pPr>
+            <a:r>
+              <a:rPr lang="en-US" sz="1400" dirty="0">
+                <a:solidFill>
+                  <a:schemeClr val="tx1"/>
+                </a:solidFill>
+              </a:rPr>
+              <a:t>Cuando sale al cliente o a la agencia</a:t>
+            </a:r>
+            <a:endParaRPr lang="en-US" sz="1400" dirty="0"/>
+          </a:p>
+        </p:txBody>
+      </p:sp>
+      <p:sp>
+        <p:nvSpPr>
+          <p:cNvPr id="14" name="Paso 3"/>
+          <p:cNvSpPr/>
+          <p:nvPr/>
+        </p:nvSpPr>
+        <p:spPr>
+          <a:xfrm>
+            <a:off x="4846320" y="2743200"/>
+            <a:ext cx="384048" cy="384048"/>
+          </a:xfrm>
+          <a:prstGeom prst="ellipse">
+            <a:avLst/>
+          </a:prstGeom>
+          <a:solidFill>
+            <a:schemeClr val="accent2"/>
+          </a:solidFill>
+          <a:ln w="12700">
+            <a:solidFill>
+              <a:schemeClr val="accent2"/>
+            </a:solidFill>
+            <a:prstDash val="solid"/>
+          </a:ln>
+        </p:spPr>
+      </p:sp>
+      <p:sp>
+        <p:nvSpPr>
+          <p:cNvPr id="15" name="Número 3"/>
+          <p:cNvSpPr txBox="1"/>
+          <p:nvPr/>
+        </p:nvSpPr>
+        <p:spPr>
+          <a:xfrm>
+            <a:off x="4846320" y="2743200"/>
+            <a:ext cx="384048" cy="384048"/>
+          </a:xfrm>
+          <a:prstGeom prst="rect">
+            <a:avLst/>
+          </a:prstGeom>
+          <a:noFill/>
+          <a:ln/>
+        </p:spPr>
+        <p:txBody>
+          <a:bodyPr wrap="square" lIns="0" tIns="0" rIns="0" bIns="0" rtlCol="0" anchor="ctr"/>
+          <a:lstStyle/>
+          <a:p>
+            <a:pPr algn="ctr" indent="0" marL="0">
+              <a:buNone/>
+            </a:pPr>
+            <a:r>
+              <a:rPr lang="en-US" sz="1400" b="1" dirty="0">
+                <a:solidFill>
+                  <a:schemeClr val="tx1"/>
+                </a:solidFill>
+              </a:rPr>
+              <a:t>3</a:t>
+            </a:r>
+            <a:endParaRPr lang="en-US" sz="1400" dirty="0"/>
+          </a:p>
+        </p:txBody>
+      </p:sp>
+      <p:sp>
+        <p:nvSpPr>
+          <p:cNvPr id="16" name="Texto paso 3"/>
+          <p:cNvSpPr txBox="1"/>
+          <p:nvPr/>
+        </p:nvSpPr>
+        <p:spPr>
+          <a:xfrm>
+            <a:off x="5367528" y="2706624"/>
+            <a:ext cx="3319272" cy="868680"/>
+          </a:xfrm>
+          <a:prstGeom prst="rect">
+            <a:avLst/>
+          </a:prstGeom>
+          <a:noFill/>
+          <a:ln/>
+        </p:spPr>
+        <p:txBody>
+          <a:bodyPr wrap="square" lIns="0" tIns="0" rIns="0" bIns="0" rtlCol="0" anchor="t"/>
+          <a:lstStyle/>
+          <a:p>
+            <a:pPr indent="0" marL="0">
+              <a:spcAft>
+                <a:spcPts val="200"/>
+              </a:spcAft>
+              <a:buNone/>
+            </a:pPr>
+            <a:r>
+              <a:rPr lang="en-US" sz="1400" b="1" dirty="0">
+                <a:solidFill>
+                  <a:schemeClr val="tx2"/>
+                </a:solidFill>
+              </a:rPr>
+              <a:t>Marcar entregado</a:t>
+            </a:r>
+            <a:endParaRPr lang="en-US" sz="1400" dirty="0"/>
+          </a:p>
+          <a:p>
+            <a:pPr indent="0" marL="0">
+              <a:spcAft>
+                <a:spcPts val="200"/>
+              </a:spcAft>
+              <a:buNone/>
+            </a:pPr>
+            <a:r>
+              <a:rPr lang="en-US" sz="1400" dirty="0">
+                <a:solidFill>
+                  <a:schemeClr val="tx1"/>
+                </a:solidFill>
+              </a:rPr>
+              <a:t>Al entregarlo</a:t>
+            </a:r>
+            <a:endParaRPr lang="en-US" sz="1400" dirty="0"/>
+          </a:p>
+        </p:txBody>
+      </p:sp>
+      <p:sp>
+        <p:nvSpPr>
+          <p:cNvPr id="17" name="Paso 4"/>
+          <p:cNvSpPr/>
+          <p:nvPr/>
+        </p:nvSpPr>
+        <p:spPr>
+          <a:xfrm>
+            <a:off x="4846320" y="3611880"/>
+            <a:ext cx="384048" cy="384048"/>
+          </a:xfrm>
+          <a:prstGeom prst="ellipse">
+            <a:avLst/>
+          </a:prstGeom>
+          <a:solidFill>
+            <a:schemeClr val="accent4"/>
+          </a:solidFill>
+          <a:ln w="12700">
+            <a:solidFill>
+              <a:schemeClr val="accent4"/>
+            </a:solidFill>
+            <a:prstDash val="solid"/>
+          </a:ln>
+        </p:spPr>
+      </p:sp>
+      <p:sp>
+        <p:nvSpPr>
+          <p:cNvPr id="18" name="Número 4"/>
+          <p:cNvSpPr txBox="1"/>
+          <p:nvPr/>
+        </p:nvSpPr>
+        <p:spPr>
+          <a:xfrm>
+            <a:off x="4846320" y="3611880"/>
+            <a:ext cx="384048" cy="384048"/>
+          </a:xfrm>
+          <a:prstGeom prst="rect">
+            <a:avLst/>
+          </a:prstGeom>
+          <a:noFill/>
+          <a:ln/>
+        </p:spPr>
+        <p:txBody>
+          <a:bodyPr wrap="square" lIns="0" tIns="0" rIns="0" bIns="0" rtlCol="0" anchor="ctr"/>
+          <a:lstStyle/>
+          <a:p>
+            <a:pPr algn="ctr" indent="0" marL="0">
+              <a:buNone/>
+            </a:pPr>
+            <a:r>
+              <a:rPr lang="en-US" sz="1400" b="1" dirty="0">
+                <a:solidFill>
+                  <a:schemeClr val="bg1"/>
+                </a:solidFill>
+              </a:rPr>
+              <a:t>4</a:t>
+            </a:r>
+            <a:endParaRPr lang="en-US" sz="1400" dirty="0"/>
+          </a:p>
+        </p:txBody>
+      </p:sp>
+      <p:sp>
+        <p:nvSpPr>
+          <p:cNvPr id="19" name="Texto paso 4"/>
+          <p:cNvSpPr txBox="1"/>
+          <p:nvPr/>
+        </p:nvSpPr>
+        <p:spPr>
+          <a:xfrm>
+            <a:off x="5367528" y="3575304"/>
+            <a:ext cx="3319272" cy="868680"/>
+          </a:xfrm>
+          <a:prstGeom prst="rect">
+            <a:avLst/>
+          </a:prstGeom>
+          <a:noFill/>
+          <a:ln/>
+        </p:spPr>
+        <p:txBody>
+          <a:bodyPr wrap="square" lIns="0" tIns="0" rIns="0" bIns="0" rtlCol="0" anchor="t"/>
+          <a:lstStyle/>
+          <a:p>
+            <a:pPr indent="0" marL="0">
+              <a:spcAft>
+                <a:spcPts val="200"/>
+              </a:spcAft>
+              <a:buNone/>
+            </a:pPr>
+            <a:r>
+              <a:rPr lang="en-US" sz="1400" b="1" dirty="0">
+                <a:solidFill>
+                  <a:schemeClr val="tx2"/>
+                </a:solidFill>
+              </a:rPr>
+              <a:t>Enviar a revisión</a:t>
+            </a:r>
+            <a:endParaRPr lang="en-US" sz="1400" dirty="0"/>
+          </a:p>
+          <a:p>
+            <a:pPr indent="0" marL="0">
+              <a:spcAft>
+                <a:spcPts val="200"/>
+              </a:spcAft>
+              <a:buNone/>
+            </a:pPr>
+            <a:r>
+              <a:rPr lang="en-US" sz="1400" dirty="0">
+                <a:solidFill>
+                  <a:schemeClr val="tx1"/>
+                </a:solidFill>
+              </a:rPr>
+              <a:t>Si falta algo; va a Administración</a:t>
+            </a:r>
+            <a:endParaRPr lang="en-US" sz="1400" dirty="0"/>
+          </a:p>
+        </p:txBody>
+      </p:sp>
+      <p:sp>
+        <p:nvSpPr>
+          <p:cNvPr id="25" name="Slide Number Placeholder 0"/>
+          <p:cNvSpPr>
+            <a:spLocks noGrp="1"/>
+          </p:cNvSpPr>
+          <p:nvPr>
+            <p:ph type="sldNum" sz="quarter" idx="4294967295"/>
+          </p:nvPr>
+        </p:nvSpPr>
+        <p:spPr>
+          <a:xfrm>
+            <a:off x="457200" y="4828032"/>
+            <a:ext cx="320040" cy="201168"/>
+          </a:xfrm>
+          <a:prstGeom prst="rect">
+            <a:avLst/>
+          </a:prstGeom>
+          <a:extLst>
+            <a:ext uri="{C572A759-6A51-4108-AA02-DFA0A04FC94B}">
+              <ma14:wrappingTextBoxFlag xmlns:ma14="http://schemas.microsoft.com/office/mac/drawingml/2011/main" val="0"/>
+            </a:ext>
+          </a:extLst>
+        </p:spPr>
+        <p:txBody>
+          <a:bodyPr lIns="0" tIns="0" rIns="0" bIns="0"/>
+          <a:lstStyle>
+            <a:lvl1pPr>
+              <a:defRPr sz="900">
+                <a:solidFill>
+                  <a:schemeClr val="accent6"/>
+                </a:solidFill>
+              </a:defRPr>
+            </a:lvl1pPr>
+          </a:lstStyle>
+          <a:p>
+            <a:pPr algn="l"/>
+            <a:fld id="{F7021451-1387-4CA6-816F-3879F97B5CBC}" type="slidenum">
+              <a:rPr b="0" lang="en-US"/>
+              <a:t>30</a:t>
+            </a:fld>
+            <a:endParaRPr lang="en-US"/>
           </a:p>
         </p:txBody>
       </p:sp>
@@ -16047,8 +16966,8 @@
         </p:nvSpPr>
         <p:spPr>
           <a:xfrm>
-            <a:off x="457200" y="256032"/>
-            <a:ext cx="7863840" cy="594360"/>
+            <a:off x="548640" y="1371600"/>
+            <a:ext cx="5669280" cy="914400"/>
           </a:xfrm>
           <a:prstGeom prst="rect">
             <a:avLst/>
@@ -16057,61 +16976,92 @@
           <a:ln/>
         </p:spPr>
         <p:txBody>
-          <a:bodyPr wrap="square" lIns="0" tIns="0" rIns="0" bIns="0" rtlCol="0" anchor="ctr"/>
+          <a:bodyPr wrap="square" lIns="0" tIns="0" rIns="0" bIns="0" rtlCol="0" anchor="b"/>
           <a:lstStyle/>
           <a:p>
             <a:pPr algn="l" indent="0" marL="0">
               <a:buNone/>
             </a:pPr>
             <a:r>
-              <a:rPr lang="en-US" sz="2800" b="1" dirty="0">
-                <a:solidFill>
-                  <a:schemeClr val="tx2"/>
-                </a:solidFill>
-              </a:rPr>
-              <a:t>Órdenes, lotes y entrega</a:t>
-            </a:r>
-            <a:endParaRPr lang="en-US" sz="2800" dirty="0"/>
-          </a:p>
-        </p:txBody>
-      </p:sp>
-      <p:sp>
-        <p:nvSpPr>
-          <p:cNvPr id="4" name="Marco lab-ordenes"/>
+              <a:rPr lang="en-US" sz="4000" b="1" dirty="0">
+                <a:solidFill>
+                  <a:schemeClr val="bg1"/>
+                </a:solidFill>
+              </a:rPr>
+              <a:t>Despacho</a:t>
+            </a:r>
+            <a:endParaRPr lang="en-US" sz="4000" dirty="0"/>
+          </a:p>
+        </p:txBody>
+      </p:sp>
+      <p:sp>
+        <p:nvSpPr>
+          <p:cNvPr id="3" name="Text 0"/>
           <p:cNvSpPr/>
-          <p:nvPr/>
-        </p:nvSpPr>
-        <p:spPr>
-          <a:xfrm>
-            <a:off x="420624" y="923544"/>
-            <a:ext cx="2852928" cy="1810512"/>
+          <p:nvPr>
+            <p:ph idx="101" type="body" hasCustomPrompt="1"/>
+          </p:nvPr>
+        </p:nvSpPr>
+        <p:spPr>
+          <a:xfrm>
+            <a:off x="548640" y="2423160"/>
+            <a:ext cx="5669280" cy="1463040"/>
+          </a:xfrm>
+          <a:prstGeom prst="rect">
+            <a:avLst/>
+          </a:prstGeom>
+          <a:noFill/>
+          <a:ln/>
+        </p:spPr>
+        <p:txBody>
+          <a:bodyPr wrap="square" lIns="0" tIns="0" rIns="0" bIns="0" rtlCol="0" anchor="t"/>
+          <a:lstStyle/>
+          <a:p>
+            <a:pPr indent="0" marL="0">
+              <a:buNone/>
+            </a:pPr>
+            <a:r>
+              <a:rPr lang="en-US" sz="1800" dirty="0">
+                <a:solidFill>
+                  <a:schemeClr val="bg1"/>
+                </a:solidFill>
+              </a:rPr>
+              <a:t>Despachas los pedidos listos y marcas cuando se entregan.</a:t>
+            </a:r>
+            <a:endParaRPr lang="en-US" sz="1800" dirty="0"/>
+          </a:p>
+        </p:txBody>
+      </p:sp>
+      <p:sp>
+        <p:nvSpPr>
+          <p:cNvPr id="4" name="Tarjeta perfil"/>
+          <p:cNvSpPr/>
+          <p:nvPr/>
+        </p:nvSpPr>
+        <p:spPr>
+          <a:xfrm>
+            <a:off x="6583680" y="1417320"/>
+            <a:ext cx="2011680" cy="2377440"/>
           </a:xfrm>
           <a:prstGeom prst="roundRect">
             <a:avLst>
-              <a:gd name="adj" fmla="val 3030"/>
+              <a:gd name="adj" fmla="val 6818"/>
             </a:avLst>
           </a:prstGeom>
           <a:solidFill>
             <a:schemeClr val="bg1"/>
           </a:solidFill>
-          <a:ln w="9525">
+          <a:ln w="12700">
             <a:solidFill>
-              <a:srgbClr val="D3DCEC"/>
+              <a:schemeClr val="bg1"/>
             </a:solidFill>
             <a:prstDash val="solid"/>
           </a:ln>
-          <a:effectLst>
-            <a:outerShdw sx="100000" sy="100000" kx="0" ky="0" algn="bl" rotWithShape="0" blurRad="76200" dist="25400" dir="5400000">
-              <a:srgbClr val="0F1E3D">
-                <a:alpha val="18000"/>
-              </a:srgbClr>
-            </a:outerShdw>
-          </a:effectLst>
         </p:spPr>
       </p:sp>
       <p:pic>
         <p:nvPicPr>
-          <p:cNvPr id="5" name="Captura lab-ordenes" descr="Pantalla de la aplicación: lab ordenes">    </p:cNvPr>
+          <p:cNvPr id="5" name="Logo" descr="/home/claude/pinturas-liz-app/public/logo.png">    </p:cNvPr>
           <p:cNvPicPr>
             <a:picLocks noChangeAspect="1"/>
           </p:cNvPicPr>
@@ -16125,8 +17075,8 @@
         </p:blipFill>
         <p:spPr>
           <a:xfrm>
-            <a:off x="457200" y="960120"/>
-            <a:ext cx="2779776" cy="1737360"/>
+            <a:off x="6812280" y="1600200"/>
+            <a:ext cx="1554480" cy="1161288"/>
           </a:xfrm>
           <a:prstGeom prst="rect">
             <a:avLst/>
@@ -16135,97 +17085,14 @@
       </p:pic>
       <p:sp>
         <p:nvSpPr>
-          <p:cNvPr id="6" name="Marco lab-lotes"/>
-          <p:cNvSpPr/>
-          <p:nvPr/>
-        </p:nvSpPr>
-        <p:spPr>
-          <a:xfrm>
-            <a:off x="420624" y="2843784"/>
-            <a:ext cx="2852928" cy="1810512"/>
-          </a:xfrm>
-          <a:prstGeom prst="roundRect">
-            <a:avLst>
-              <a:gd name="adj" fmla="val 3030"/>
-            </a:avLst>
-          </a:prstGeom>
-          <a:solidFill>
-            <a:schemeClr val="bg1"/>
-          </a:solidFill>
-          <a:ln w="9525">
-            <a:solidFill>
-              <a:srgbClr val="D3DCEC"/>
-            </a:solidFill>
-            <a:prstDash val="solid"/>
-          </a:ln>
-          <a:effectLst>
-            <a:outerShdw sx="100000" sy="100000" kx="0" ky="0" algn="bl" rotWithShape="0" blurRad="76200" dist="25400" dir="5400000">
-              <a:srgbClr val="0F1E3D">
-                <a:alpha val="18000"/>
-              </a:srgbClr>
-            </a:outerShdw>
-          </a:effectLst>
-        </p:spPr>
-      </p:sp>
-      <p:pic>
-        <p:nvPicPr>
-          <p:cNvPr id="7" name="Captura lab-lotes" descr="Pantalla de la aplicación: lab lotes">    </p:cNvPr>
-          <p:cNvPicPr>
-            <a:picLocks noChangeAspect="1"/>
-          </p:cNvPicPr>
-          <p:nvPr/>
-        </p:nvPicPr>
-        <p:blipFill>
-          <a:blip r:embed="rId2"/>
-          <a:stretch>
-            <a:fillRect/>
-          </a:stretch>
-        </p:blipFill>
-        <p:spPr>
-          <a:xfrm>
-            <a:off x="457200" y="2880360"/>
-            <a:ext cx="2779776" cy="1737360"/>
-          </a:xfrm>
-          <a:prstGeom prst="rect">
-            <a:avLst/>
-          </a:prstGeom>
-        </p:spPr>
-      </p:pic>
-      <p:sp>
-        <p:nvSpPr>
-          <p:cNvPr id="8" name="Paso 1"/>
-          <p:cNvSpPr/>
-          <p:nvPr/>
-        </p:nvSpPr>
-        <p:spPr>
-          <a:xfrm>
-            <a:off x="3657600" y="1005840"/>
-            <a:ext cx="384048" cy="384048"/>
-          </a:xfrm>
-          <a:prstGeom prst="ellipse">
-            <a:avLst/>
-          </a:prstGeom>
-          <a:solidFill>
-            <a:schemeClr val="accent1"/>
-          </a:solidFill>
-          <a:ln w="12700">
-            <a:solidFill>
-              <a:schemeClr val="accent1"/>
-            </a:solidFill>
-            <a:prstDash val="solid"/>
-          </a:ln>
-        </p:spPr>
-      </p:sp>
-      <p:sp>
-        <p:nvSpPr>
-          <p:cNvPr id="9" name="Número 1"/>
+          <p:cNvPr id="6" name="Quién"/>
           <p:cNvSpPr txBox="1"/>
           <p:nvPr/>
         </p:nvSpPr>
         <p:spPr>
           <a:xfrm>
-            <a:off x="3657600" y="1005840"/>
-            <a:ext cx="384048" cy="384048"/>
+            <a:off x="6675120" y="2880360"/>
+            <a:ext cx="1828800" cy="822960"/>
           </a:xfrm>
           <a:prstGeom prst="rect">
             <a:avLst/>
@@ -16241,583 +17108,14 @@
               <a:buNone/>
             </a:pPr>
             <a:r>
-              <a:rPr lang="en-US" sz="1400" b="1" dirty="0">
-                <a:solidFill>
-                  <a:schemeClr val="bg1"/>
-                </a:solidFill>
-              </a:rPr>
-              <a:t>1</a:t>
-            </a:r>
-            <a:endParaRPr lang="en-US" sz="1400" dirty="0"/>
-          </a:p>
-        </p:txBody>
-      </p:sp>
-      <p:sp>
-        <p:nvSpPr>
-          <p:cNvPr id="10" name="Texto paso 1"/>
-          <p:cNvSpPr txBox="1"/>
-          <p:nvPr/>
-        </p:nvSpPr>
-        <p:spPr>
-          <a:xfrm>
-            <a:off x="4178808" y="969264"/>
-            <a:ext cx="4507992" cy="731520"/>
-          </a:xfrm>
-          <a:prstGeom prst="rect">
-            <a:avLst/>
-          </a:prstGeom>
-          <a:noFill/>
-          <a:ln/>
-        </p:spPr>
-        <p:txBody>
-          <a:bodyPr wrap="square" lIns="0" tIns="0" rIns="0" bIns="0" rtlCol="0" anchor="t"/>
-          <a:lstStyle/>
-          <a:p>
-            <a:pPr indent="0" marL="0">
-              <a:spcAft>
-                <a:spcPts val="200"/>
-              </a:spcAft>
-              <a:buNone/>
-            </a:pPr>
-            <a:r>
-              <a:rPr lang="en-US" sz="1400" b="1" dirty="0">
+              <a:rPr lang="en-US" sz="1300" b="1" dirty="0">
                 <a:solidFill>
                   <a:schemeClr val="tx2"/>
                 </a:solidFill>
               </a:rPr>
-              <a:t>Órdenes</a:t>
-            </a:r>
-            <a:endParaRPr lang="en-US" sz="1400" dirty="0"/>
-          </a:p>
-          <a:p>
-            <a:pPr indent="0" marL="0">
-              <a:spcAft>
-                <a:spcPts val="200"/>
-              </a:spcAft>
-              <a:buNone/>
-            </a:pPr>
-            <a:r>
-              <a:rPr lang="en-US" sz="1400" dirty="0">
-                <a:solidFill>
-                  <a:schemeClr val="tx1"/>
-                </a:solidFill>
-              </a:rPr>
-              <a:t>Lo que pide el Taller: color, litros y fecha</a:t>
-            </a:r>
-            <a:endParaRPr lang="en-US" sz="1400" dirty="0"/>
-          </a:p>
-        </p:txBody>
-      </p:sp>
-      <p:sp>
-        <p:nvSpPr>
-          <p:cNvPr id="11" name="Paso 2"/>
-          <p:cNvSpPr/>
-          <p:nvPr/>
-        </p:nvSpPr>
-        <p:spPr>
-          <a:xfrm>
-            <a:off x="3657600" y="1737360"/>
-            <a:ext cx="384048" cy="384048"/>
-          </a:xfrm>
-          <a:prstGeom prst="ellipse">
-            <a:avLst/>
-          </a:prstGeom>
-          <a:solidFill>
-            <a:schemeClr val="accent5"/>
-          </a:solidFill>
-          <a:ln w="12700">
-            <a:solidFill>
-              <a:schemeClr val="accent5"/>
-            </a:solidFill>
-            <a:prstDash val="solid"/>
-          </a:ln>
-        </p:spPr>
-      </p:sp>
-      <p:sp>
-        <p:nvSpPr>
-          <p:cNvPr id="12" name="Número 2"/>
-          <p:cNvSpPr txBox="1"/>
-          <p:nvPr/>
-        </p:nvSpPr>
-        <p:spPr>
-          <a:xfrm>
-            <a:off x="3657600" y="1737360"/>
-            <a:ext cx="384048" cy="384048"/>
-          </a:xfrm>
-          <a:prstGeom prst="rect">
-            <a:avLst/>
-          </a:prstGeom>
-          <a:noFill/>
-          <a:ln/>
-        </p:spPr>
-        <p:txBody>
-          <a:bodyPr wrap="square" lIns="0" tIns="0" rIns="0" bIns="0" rtlCol="0" anchor="ctr"/>
-          <a:lstStyle/>
-          <a:p>
-            <a:pPr algn="ctr" indent="0" marL="0">
-              <a:buNone/>
-            </a:pPr>
-            <a:r>
-              <a:rPr lang="en-US" sz="1400" b="1" dirty="0">
-                <a:solidFill>
-                  <a:schemeClr val="bg1"/>
-                </a:solidFill>
-              </a:rPr>
-              <a:t>2</a:t>
-            </a:r>
-            <a:endParaRPr lang="en-US" sz="1400" dirty="0"/>
-          </a:p>
-        </p:txBody>
-      </p:sp>
-      <p:sp>
-        <p:nvSpPr>
-          <p:cNvPr id="13" name="Texto paso 2"/>
-          <p:cNvSpPr txBox="1"/>
-          <p:nvPr/>
-        </p:nvSpPr>
-        <p:spPr>
-          <a:xfrm>
-            <a:off x="4178808" y="1700784"/>
-            <a:ext cx="4507992" cy="731520"/>
-          </a:xfrm>
-          <a:prstGeom prst="rect">
-            <a:avLst/>
-          </a:prstGeom>
-          <a:noFill/>
-          <a:ln/>
-        </p:spPr>
-        <p:txBody>
-          <a:bodyPr wrap="square" lIns="0" tIns="0" rIns="0" bIns="0" rtlCol="0" anchor="t"/>
-          <a:lstStyle/>
-          <a:p>
-            <a:pPr indent="0" marL="0">
-              <a:spcAft>
-                <a:spcPts val="200"/>
-              </a:spcAft>
-              <a:buNone/>
-            </a:pPr>
-            <a:r>
-              <a:rPr lang="en-US" sz="1400" b="1" dirty="0">
-                <a:solidFill>
-                  <a:schemeClr val="tx2"/>
-                </a:solidFill>
-              </a:rPr>
-              <a:t>Registrar lote</a:t>
-            </a:r>
-            <a:endParaRPr lang="en-US" sz="1400" dirty="0"/>
-          </a:p>
-          <a:p>
-            <a:pPr indent="0" marL="0">
-              <a:spcAft>
-                <a:spcPts val="200"/>
-              </a:spcAft>
-              <a:buNone/>
-            </a:pPr>
-            <a:r>
-              <a:rPr lang="en-US" sz="1400" dirty="0">
-                <a:solidFill>
-                  <a:schemeClr val="tx1"/>
-                </a:solidFill>
-              </a:rPr>
-              <a:t>Litros e insumos usados</a:t>
-            </a:r>
-            <a:endParaRPr lang="en-US" sz="1400" dirty="0"/>
-          </a:p>
-        </p:txBody>
-      </p:sp>
-      <p:sp>
-        <p:nvSpPr>
-          <p:cNvPr id="14" name="Paso 3"/>
-          <p:cNvSpPr/>
-          <p:nvPr/>
-        </p:nvSpPr>
-        <p:spPr>
-          <a:xfrm>
-            <a:off x="3657600" y="2468880"/>
-            <a:ext cx="384048" cy="384048"/>
-          </a:xfrm>
-          <a:prstGeom prst="ellipse">
-            <a:avLst/>
-          </a:prstGeom>
-          <a:solidFill>
-            <a:schemeClr val="accent2"/>
-          </a:solidFill>
-          <a:ln w="12700">
-            <a:solidFill>
-              <a:schemeClr val="accent2"/>
-            </a:solidFill>
-            <a:prstDash val="solid"/>
-          </a:ln>
-        </p:spPr>
-      </p:sp>
-      <p:sp>
-        <p:nvSpPr>
-          <p:cNvPr id="15" name="Número 3"/>
-          <p:cNvSpPr txBox="1"/>
-          <p:nvPr/>
-        </p:nvSpPr>
-        <p:spPr>
-          <a:xfrm>
-            <a:off x="3657600" y="2468880"/>
-            <a:ext cx="384048" cy="384048"/>
-          </a:xfrm>
-          <a:prstGeom prst="rect">
-            <a:avLst/>
-          </a:prstGeom>
-          <a:noFill/>
-          <a:ln/>
-        </p:spPr>
-        <p:txBody>
-          <a:bodyPr wrap="square" lIns="0" tIns="0" rIns="0" bIns="0" rtlCol="0" anchor="ctr"/>
-          <a:lstStyle/>
-          <a:p>
-            <a:pPr algn="ctr" indent="0" marL="0">
-              <a:buNone/>
-            </a:pPr>
-            <a:r>
-              <a:rPr lang="en-US" sz="1400" b="1" dirty="0">
-                <a:solidFill>
-                  <a:schemeClr val="tx1"/>
-                </a:solidFill>
-              </a:rPr>
-              <a:t>3</a:t>
-            </a:r>
-            <a:endParaRPr lang="en-US" sz="1400" dirty="0"/>
-          </a:p>
-        </p:txBody>
-      </p:sp>
-      <p:sp>
-        <p:nvSpPr>
-          <p:cNvPr id="16" name="Texto paso 3"/>
-          <p:cNvSpPr txBox="1"/>
-          <p:nvPr/>
-        </p:nvSpPr>
-        <p:spPr>
-          <a:xfrm>
-            <a:off x="4178808" y="2432304"/>
-            <a:ext cx="4507992" cy="731520"/>
-          </a:xfrm>
-          <a:prstGeom prst="rect">
-            <a:avLst/>
-          </a:prstGeom>
-          <a:noFill/>
-          <a:ln/>
-        </p:spPr>
-        <p:txBody>
-          <a:bodyPr wrap="square" lIns="0" tIns="0" rIns="0" bIns="0" rtlCol="0" anchor="t"/>
-          <a:lstStyle/>
-          <a:p>
-            <a:pPr indent="0" marL="0">
-              <a:spcAft>
-                <a:spcPts val="200"/>
-              </a:spcAft>
-              <a:buNone/>
-            </a:pPr>
-            <a:r>
-              <a:rPr lang="en-US" sz="1400" b="1" dirty="0">
-                <a:solidFill>
-                  <a:schemeClr val="tx2"/>
-                </a:solidFill>
-              </a:rPr>
-              <a:t>Validar</a:t>
-            </a:r>
-            <a:endParaRPr lang="en-US" sz="1400" dirty="0"/>
-          </a:p>
-          <a:p>
-            <a:pPr indent="0" marL="0">
-              <a:spcAft>
-                <a:spcPts val="200"/>
-              </a:spcAft>
-              <a:buNone/>
-            </a:pPr>
-            <a:r>
-              <a:rPr lang="en-US" sz="1400" dirty="0">
-                <a:solidFill>
-                  <a:schemeClr val="tx1"/>
-                </a:solidFill>
-              </a:rPr>
-              <a:t>Viscosidad, transparencia y color</a:t>
-            </a:r>
-            <a:endParaRPr lang="en-US" sz="1400" dirty="0"/>
-          </a:p>
-        </p:txBody>
-      </p:sp>
-      <p:sp>
-        <p:nvSpPr>
-          <p:cNvPr id="17" name="Paso 4"/>
-          <p:cNvSpPr/>
-          <p:nvPr/>
-        </p:nvSpPr>
-        <p:spPr>
-          <a:xfrm>
-            <a:off x="3657600" y="3200400"/>
-            <a:ext cx="384048" cy="384048"/>
-          </a:xfrm>
-          <a:prstGeom prst="ellipse">
-            <a:avLst/>
-          </a:prstGeom>
-          <a:solidFill>
-            <a:schemeClr val="accent4"/>
-          </a:solidFill>
-          <a:ln w="12700">
-            <a:solidFill>
-              <a:schemeClr val="accent4"/>
-            </a:solidFill>
-            <a:prstDash val="solid"/>
-          </a:ln>
-        </p:spPr>
-      </p:sp>
-      <p:sp>
-        <p:nvSpPr>
-          <p:cNvPr id="18" name="Número 4"/>
-          <p:cNvSpPr txBox="1"/>
-          <p:nvPr/>
-        </p:nvSpPr>
-        <p:spPr>
-          <a:xfrm>
-            <a:off x="3657600" y="3200400"/>
-            <a:ext cx="384048" cy="384048"/>
-          </a:xfrm>
-          <a:prstGeom prst="rect">
-            <a:avLst/>
-          </a:prstGeom>
-          <a:noFill/>
-          <a:ln/>
-        </p:spPr>
-        <p:txBody>
-          <a:bodyPr wrap="square" lIns="0" tIns="0" rIns="0" bIns="0" rtlCol="0" anchor="ctr"/>
-          <a:lstStyle/>
-          <a:p>
-            <a:pPr algn="ctr" indent="0" marL="0">
-              <a:buNone/>
-            </a:pPr>
-            <a:r>
-              <a:rPr lang="en-US" sz="1400" b="1" dirty="0">
-                <a:solidFill>
-                  <a:schemeClr val="bg1"/>
-                </a:solidFill>
-              </a:rPr>
-              <a:t>4</a:t>
-            </a:r>
-            <a:endParaRPr lang="en-US" sz="1400" dirty="0"/>
-          </a:p>
-        </p:txBody>
-      </p:sp>
-      <p:sp>
-        <p:nvSpPr>
-          <p:cNvPr id="19" name="Texto paso 4"/>
-          <p:cNvSpPr txBox="1"/>
-          <p:nvPr/>
-        </p:nvSpPr>
-        <p:spPr>
-          <a:xfrm>
-            <a:off x="4178808" y="3163824"/>
-            <a:ext cx="4507992" cy="731520"/>
-          </a:xfrm>
-          <a:prstGeom prst="rect">
-            <a:avLst/>
-          </a:prstGeom>
-          <a:noFill/>
-          <a:ln/>
-        </p:spPr>
-        <p:txBody>
-          <a:bodyPr wrap="square" lIns="0" tIns="0" rIns="0" bIns="0" rtlCol="0" anchor="t"/>
-          <a:lstStyle/>
-          <a:p>
-            <a:pPr indent="0" marL="0">
-              <a:spcAft>
-                <a:spcPts val="200"/>
-              </a:spcAft>
-              <a:buNone/>
-            </a:pPr>
-            <a:r>
-              <a:rPr lang="en-US" sz="1400" b="1" dirty="0">
-                <a:solidFill>
-                  <a:schemeClr val="tx2"/>
-                </a:solidFill>
-              </a:rPr>
-              <a:t>Entregar al Taller</a:t>
-            </a:r>
-            <a:endParaRPr lang="en-US" sz="1400" dirty="0"/>
-          </a:p>
-          <a:p>
-            <a:pPr indent="0" marL="0">
-              <a:spcAft>
-                <a:spcPts val="200"/>
-              </a:spcAft>
-              <a:buNone/>
-            </a:pPr>
-            <a:r>
-              <a:rPr lang="en-US" sz="1400" dirty="0">
-                <a:solidFill>
-                  <a:schemeClr val="tx1"/>
-                </a:solidFill>
-              </a:rPr>
-              <a:t>La orden queda atendida</a:t>
-            </a:r>
-            <a:endParaRPr lang="en-US" sz="1400" dirty="0"/>
-          </a:p>
-        </p:txBody>
-      </p:sp>
-      <p:sp>
-        <p:nvSpPr>
-          <p:cNvPr id="20" name="Paso 5"/>
-          <p:cNvSpPr/>
-          <p:nvPr/>
-        </p:nvSpPr>
-        <p:spPr>
-          <a:xfrm>
-            <a:off x="3657600" y="3931920"/>
-            <a:ext cx="384048" cy="384048"/>
-          </a:xfrm>
-          <a:prstGeom prst="ellipse">
-            <a:avLst/>
-          </a:prstGeom>
-          <a:solidFill>
-            <a:schemeClr val="accent3"/>
-          </a:solidFill>
-          <a:ln w="12700">
-            <a:solidFill>
-              <a:schemeClr val="accent3"/>
-            </a:solidFill>
-            <a:prstDash val="solid"/>
-          </a:ln>
-        </p:spPr>
-      </p:sp>
-      <p:sp>
-        <p:nvSpPr>
-          <p:cNvPr id="21" name="Número 5"/>
-          <p:cNvSpPr txBox="1"/>
-          <p:nvPr/>
-        </p:nvSpPr>
-        <p:spPr>
-          <a:xfrm>
-            <a:off x="3657600" y="3931920"/>
-            <a:ext cx="384048" cy="384048"/>
-          </a:xfrm>
-          <a:prstGeom prst="rect">
-            <a:avLst/>
-          </a:prstGeom>
-          <a:noFill/>
-          <a:ln/>
-        </p:spPr>
-        <p:txBody>
-          <a:bodyPr wrap="square" lIns="0" tIns="0" rIns="0" bIns="0" rtlCol="0" anchor="ctr"/>
-          <a:lstStyle/>
-          <a:p>
-            <a:pPr algn="ctr" indent="0" marL="0">
-              <a:buNone/>
-            </a:pPr>
-            <a:r>
-              <a:rPr lang="en-US" sz="1400" b="1" dirty="0">
-                <a:solidFill>
-                  <a:schemeClr val="bg1"/>
-                </a:solidFill>
-              </a:rPr>
-              <a:t>5</a:t>
-            </a:r>
-            <a:endParaRPr lang="en-US" sz="1400" dirty="0"/>
-          </a:p>
-        </p:txBody>
-      </p:sp>
-      <p:sp>
-        <p:nvSpPr>
-          <p:cNvPr id="22" name="Texto paso 5"/>
-          <p:cNvSpPr txBox="1"/>
-          <p:nvPr/>
-        </p:nvSpPr>
-        <p:spPr>
-          <a:xfrm>
-            <a:off x="4178808" y="3895344"/>
-            <a:ext cx="4507992" cy="731520"/>
-          </a:xfrm>
-          <a:prstGeom prst="rect">
-            <a:avLst/>
-          </a:prstGeom>
-          <a:noFill/>
-          <a:ln/>
-        </p:spPr>
-        <p:txBody>
-          <a:bodyPr wrap="square" lIns="0" tIns="0" rIns="0" bIns="0" rtlCol="0" anchor="t"/>
-          <a:lstStyle/>
-          <a:p>
-            <a:pPr indent="0" marL="0">
-              <a:spcAft>
-                <a:spcPts val="200"/>
-              </a:spcAft>
-              <a:buNone/>
-            </a:pPr>
-            <a:r>
-              <a:rPr lang="en-US" sz="1400" b="1" dirty="0">
-                <a:solidFill>
-                  <a:schemeClr val="tx2"/>
-                </a:solidFill>
-              </a:rPr>
-              <a:t>Insumos</a:t>
-            </a:r>
-            <a:endParaRPr lang="en-US" sz="1400" dirty="0"/>
-          </a:p>
-          <a:p>
-            <a:pPr indent="0" marL="0">
-              <a:spcAft>
-                <a:spcPts val="200"/>
-              </a:spcAft>
-              <a:buNone/>
-            </a:pPr>
-            <a:r>
-              <a:rPr lang="en-US" sz="1400" dirty="0">
-                <a:solidFill>
-                  <a:schemeClr val="tx1"/>
-                </a:solidFill>
-              </a:rPr>
-              <a:t>Compras y ajustes en Almacén</a:t>
-            </a:r>
-            <a:endParaRPr lang="en-US" sz="1400" dirty="0"/>
-          </a:p>
-        </p:txBody>
-      </p:sp>
-      <p:sp>
-        <p:nvSpPr>
-          <p:cNvPr id="25" name="Slide Number Placeholder 0"/>
-          <p:cNvSpPr>
-            <a:spLocks noGrp="1"/>
-          </p:cNvSpPr>
-          <p:nvPr>
-            <p:ph type="sldNum" sz="quarter" idx="4294967295"/>
-          </p:nvPr>
-        </p:nvSpPr>
-        <p:spPr>
-          <a:xfrm>
-            <a:off x="457200" y="4828032"/>
-            <a:ext cx="320040" cy="201168"/>
-          </a:xfrm>
-          <a:prstGeom prst="rect">
-            <a:avLst/>
-          </a:prstGeom>
-          <a:extLst>
-            <a:ext uri="{C572A759-6A51-4108-AA02-DFA0A04FC94B}">
-              <ma14:wrappingTextBoxFlag xmlns:ma14="http://schemas.microsoft.com/office/mac/drawingml/2011/main" val="0"/>
-            </a:ext>
-          </a:extLst>
-        </p:spPr>
-        <p:txBody>
-          <a:bodyPr lIns="0" tIns="0" rIns="0" bIns="0"/>
-          <a:lstStyle>
-            <a:lvl1pPr>
-              <a:defRPr sz="900">
-                <a:solidFill>
-                  <a:schemeClr val="accent6"/>
-                </a:solidFill>
-              </a:defRPr>
-            </a:lvl1pPr>
-          </a:lstStyle>
-          <a:p>
-            <a:pPr algn="l"/>
-            <a:fld id="{F7021451-1387-4CA6-816F-3879F97B5CBC}" type="slidenum">
-              <a:rPr b="0" lang="en-US"/>
-              <a:t>31</a:t>
-            </a:fld>
-            <a:endParaRPr lang="en-US"/>
+              <a:t>Encargado Despacho</a:t>
+            </a:r>
+            <a:endParaRPr lang="en-US" sz="1300" dirty="0"/>
           </a:p>
         </p:txBody>
       </p:sp>
@@ -16878,7 +17176,7 @@
                   <a:schemeClr val="tx2"/>
                 </a:solidFill>
               </a:rPr>
-              <a:t>Reglas de oro</a:t>
+              <a:t>Despachar y entregar</a:t>
             </a:r>
             <a:endParaRPr lang="en-US" sz="2800" dirty="0"/>
           </a:p>
@@ -16886,13 +17184,129 @@
       </p:sp>
       <p:sp>
         <p:nvSpPr>
-          <p:cNvPr id="4" name="Paso 1"/>
+          <p:cNvPr id="4" name="Marco despacho-pedidos"/>
           <p:cNvSpPr/>
           <p:nvPr/>
         </p:nvSpPr>
         <p:spPr>
           <a:xfrm>
-            <a:off x="457200" y="1051560"/>
+            <a:off x="484632" y="850392"/>
+            <a:ext cx="1839266" cy="3831336"/>
+          </a:xfrm>
+          <a:prstGeom prst="roundRect">
+            <a:avLst>
+              <a:gd name="adj" fmla="val 6960"/>
+            </a:avLst>
+          </a:prstGeom>
+          <a:solidFill>
+            <a:schemeClr val="tx1"/>
+          </a:solidFill>
+          <a:ln w="9525">
+            <a:solidFill>
+              <a:srgbClr val="D3DCEC"/>
+            </a:solidFill>
+            <a:prstDash val="solid"/>
+          </a:ln>
+          <a:effectLst>
+            <a:outerShdw sx="100000" sy="100000" kx="0" ky="0" algn="bl" rotWithShape="0" blurRad="76200" dist="25400" dir="5400000">
+              <a:srgbClr val="0F1E3D">
+                <a:alpha val="18000"/>
+              </a:srgbClr>
+            </a:outerShdw>
+          </a:effectLst>
+        </p:spPr>
+      </p:sp>
+      <p:pic>
+        <p:nvPicPr>
+          <p:cNvPr id="5" name="Captura despacho-pedidos" descr="Pantalla de la aplicación: despacho pedidos">    </p:cNvPr>
+          <p:cNvPicPr>
+            <a:picLocks noChangeAspect="1"/>
+          </p:cNvPicPr>
+          <p:nvPr/>
+        </p:nvPicPr>
+        <p:blipFill>
+          <a:blip r:embed="rId1"/>
+          <a:stretch>
+            <a:fillRect/>
+          </a:stretch>
+        </p:blipFill>
+        <p:spPr>
+          <a:xfrm>
+            <a:off x="548640" y="914400"/>
+            <a:ext cx="1711250" cy="3703320"/>
+          </a:xfrm>
+          <a:prstGeom prst="rect">
+            <a:avLst/>
+          </a:prstGeom>
+        </p:spPr>
+      </p:pic>
+      <p:sp>
+        <p:nvSpPr>
+          <p:cNvPr id="6" name="Marco despacho-pedido"/>
+          <p:cNvSpPr/>
+          <p:nvPr/>
+        </p:nvSpPr>
+        <p:spPr>
+          <a:xfrm>
+            <a:off x="2496312" y="850392"/>
+            <a:ext cx="1839266" cy="3831336"/>
+          </a:xfrm>
+          <a:prstGeom prst="roundRect">
+            <a:avLst>
+              <a:gd name="adj" fmla="val 6960"/>
+            </a:avLst>
+          </a:prstGeom>
+          <a:solidFill>
+            <a:schemeClr val="tx1"/>
+          </a:solidFill>
+          <a:ln w="9525">
+            <a:solidFill>
+              <a:srgbClr val="D3DCEC"/>
+            </a:solidFill>
+            <a:prstDash val="solid"/>
+          </a:ln>
+          <a:effectLst>
+            <a:outerShdw sx="100000" sy="100000" kx="0" ky="0" algn="bl" rotWithShape="0" blurRad="76200" dist="25400" dir="5400000">
+              <a:srgbClr val="0F1E3D">
+                <a:alpha val="18000"/>
+              </a:srgbClr>
+            </a:outerShdw>
+          </a:effectLst>
+        </p:spPr>
+      </p:sp>
+      <p:pic>
+        <p:nvPicPr>
+          <p:cNvPr id="7" name="Captura despacho-pedido" descr="Pantalla de la aplicación: despacho pedido">    </p:cNvPr>
+          <p:cNvPicPr>
+            <a:picLocks noChangeAspect="1"/>
+          </p:cNvPicPr>
+          <p:nvPr/>
+        </p:nvPicPr>
+        <p:blipFill>
+          <a:blip r:embed="rId2"/>
+          <a:stretch>
+            <a:fillRect/>
+          </a:stretch>
+        </p:blipFill>
+        <p:spPr>
+          <a:xfrm>
+            <a:off x="2560320" y="914400"/>
+            <a:ext cx="1711250" cy="3703320"/>
+          </a:xfrm>
+          <a:prstGeom prst="rect">
+            <a:avLst/>
+          </a:prstGeom>
+        </p:spPr>
+      </p:pic>
+      <p:sp>
+        <p:nvSpPr>
+          <p:cNvPr id="8" name="Paso 1"/>
+          <p:cNvSpPr/>
+          <p:nvPr/>
+        </p:nvSpPr>
+        <p:spPr>
+          <a:xfrm>
+            <a:off x="4846320" y="1005840"/>
             <a:ext cx="384048" cy="384048"/>
           </a:xfrm>
           <a:prstGeom prst="ellipse">
@@ -16911,13 +17325,13 @@
       </p:sp>
       <p:sp>
         <p:nvSpPr>
-          <p:cNvPr id="5" name="Número 1"/>
+          <p:cNvPr id="9" name="Número 1"/>
           <p:cNvSpPr txBox="1"/>
           <p:nvPr/>
         </p:nvSpPr>
         <p:spPr>
           <a:xfrm>
-            <a:off x="457200" y="1051560"/>
+            <a:off x="4846320" y="1005840"/>
             <a:ext cx="384048" cy="384048"/>
           </a:xfrm>
           <a:prstGeom prst="rect">
@@ -16934,27 +17348,27 @@
               <a:buNone/>
             </a:pPr>
             <a:r>
-              <a:rPr lang="en-US" sz="1500" b="1" dirty="0">
+              <a:rPr lang="en-US" sz="1400" b="1" dirty="0">
                 <a:solidFill>
                   <a:schemeClr val="bg1"/>
                 </a:solidFill>
               </a:rPr>
               <a:t>1</a:t>
             </a:r>
-            <a:endParaRPr lang="en-US" sz="1500" dirty="0"/>
-          </a:p>
-        </p:txBody>
-      </p:sp>
-      <p:sp>
-        <p:nvSpPr>
-          <p:cNvPr id="6" name="Texto paso 1"/>
+            <a:endParaRPr lang="en-US" sz="1400" dirty="0"/>
+          </a:p>
+        </p:txBody>
+      </p:sp>
+      <p:sp>
+        <p:nvSpPr>
+          <p:cNvPr id="10" name="Texto paso 1"/>
           <p:cNvSpPr txBox="1"/>
           <p:nvPr/>
         </p:nvSpPr>
         <p:spPr>
           <a:xfrm>
-            <a:off x="978408" y="1014984"/>
-            <a:ext cx="7708392" cy="731520"/>
+            <a:off x="5367528" y="969264"/>
+            <a:ext cx="3319272" cy="868680"/>
           </a:xfrm>
           <a:prstGeom prst="rect">
             <a:avLst/>
@@ -16973,14 +17387,14 @@
               <a:buNone/>
             </a:pPr>
             <a:r>
-              <a:rPr lang="en-US" sz="1500" b="1" dirty="0">
+              <a:rPr lang="en-US" sz="1400" b="1" dirty="0">
                 <a:solidFill>
                   <a:schemeClr val="tx2"/>
                 </a:solidFill>
               </a:rPr>
-              <a:t>Siempre primero el cliente</a:t>
-            </a:r>
-            <a:endParaRPr lang="en-US" sz="1500" dirty="0"/>
+              <a:t>Pedidos Listos</a:t>
+            </a:r>
+            <a:endParaRPr lang="en-US" sz="1400" dirty="0"/>
           </a:p>
           <a:p>
             <a:pPr indent="0" marL="0">
@@ -16990,26 +17404,26 @@
               <a:buNone/>
             </a:pPr>
             <a:r>
-              <a:rPr lang="en-US" sz="1500" dirty="0">
+              <a:rPr lang="en-US" sz="1400" dirty="0">
                 <a:solidFill>
                   <a:schemeClr val="tx1"/>
                 </a:solidFill>
               </a:rPr>
-              <a:t>Los precios son de cada cliente</a:t>
-            </a:r>
-            <a:endParaRPr lang="en-US" sz="1500" dirty="0"/>
-          </a:p>
-        </p:txBody>
-      </p:sp>
-      <p:sp>
-        <p:nvSpPr>
-          <p:cNvPr id="7" name="Paso 2"/>
+              <a:t>La lista se abre en ellos</a:t>
+            </a:r>
+            <a:endParaRPr lang="en-US" sz="1400" dirty="0"/>
+          </a:p>
+        </p:txBody>
+      </p:sp>
+      <p:sp>
+        <p:nvSpPr>
+          <p:cNvPr id="11" name="Paso 2"/>
           <p:cNvSpPr/>
           <p:nvPr/>
         </p:nvSpPr>
         <p:spPr>
           <a:xfrm>
-            <a:off x="457200" y="1783080"/>
+            <a:off x="4846320" y="1874520"/>
             <a:ext cx="384048" cy="384048"/>
           </a:xfrm>
           <a:prstGeom prst="ellipse">
@@ -17028,13 +17442,13 @@
       </p:sp>
       <p:sp>
         <p:nvSpPr>
-          <p:cNvPr id="8" name="Número 2"/>
+          <p:cNvPr id="12" name="Número 2"/>
           <p:cNvSpPr txBox="1"/>
           <p:nvPr/>
         </p:nvSpPr>
         <p:spPr>
           <a:xfrm>
-            <a:off x="457200" y="1783080"/>
+            <a:off x="4846320" y="1874520"/>
             <a:ext cx="384048" cy="384048"/>
           </a:xfrm>
           <a:prstGeom prst="rect">
@@ -17051,27 +17465,27 @@
               <a:buNone/>
             </a:pPr>
             <a:r>
-              <a:rPr lang="en-US" sz="1500" b="1" dirty="0">
+              <a:rPr lang="en-US" sz="1400" b="1" dirty="0">
                 <a:solidFill>
                   <a:schemeClr val="bg1"/>
                 </a:solidFill>
               </a:rPr>
               <a:t>2</a:t>
             </a:r>
-            <a:endParaRPr lang="en-US" sz="1500" dirty="0"/>
-          </a:p>
-        </p:txBody>
-      </p:sp>
-      <p:sp>
-        <p:nvSpPr>
-          <p:cNvPr id="9" name="Texto paso 2"/>
+            <a:endParaRPr lang="en-US" sz="1400" dirty="0"/>
+          </a:p>
+        </p:txBody>
+      </p:sp>
+      <p:sp>
+        <p:nvSpPr>
+          <p:cNvPr id="13" name="Texto paso 2"/>
           <p:cNvSpPr txBox="1"/>
           <p:nvPr/>
         </p:nvSpPr>
         <p:spPr>
           <a:xfrm>
-            <a:off x="978408" y="1746504"/>
-            <a:ext cx="7708392" cy="731520"/>
+            <a:off x="5367528" y="1837944"/>
+            <a:ext cx="3319272" cy="868680"/>
           </a:xfrm>
           <a:prstGeom prst="rect">
             <a:avLst/>
@@ -17090,14 +17504,14 @@
               <a:buNone/>
             </a:pPr>
             <a:r>
-              <a:rPr lang="en-US" sz="1500" b="1" dirty="0">
+              <a:rPr lang="en-US" sz="1400" b="1" dirty="0">
                 <a:solidFill>
                   <a:schemeClr val="tx2"/>
                 </a:solidFill>
               </a:rPr>
-              <a:t>Lo que no está en la app, no pasó</a:t>
-            </a:r>
-            <a:endParaRPr lang="en-US" sz="1500" dirty="0"/>
+              <a:t>Revisa el pedido</a:t>
+            </a:r>
+            <a:endParaRPr lang="en-US" sz="1400" dirty="0"/>
           </a:p>
           <a:p>
             <a:pPr indent="0" marL="0">
@@ -17107,26 +17521,26 @@
               <a:buNone/>
             </a:pPr>
             <a:r>
-              <a:rPr lang="en-US" sz="1500" dirty="0">
+              <a:rPr lang="en-US" sz="1400" dirty="0">
                 <a:solidFill>
                   <a:schemeClr val="tx1"/>
                 </a:solidFill>
               </a:rPr>
-              <a:t>Registra cada paso: listo, despacho, entrega, cobro</a:t>
-            </a:r>
-            <a:endParaRPr lang="en-US" sz="1500" dirty="0"/>
-          </a:p>
-        </p:txBody>
-      </p:sp>
-      <p:sp>
-        <p:nvSpPr>
-          <p:cNvPr id="10" name="Paso 3"/>
+              <a:t>Cliente, entrega o agencia y empaque</a:t>
+            </a:r>
+            <a:endParaRPr lang="en-US" sz="1400" dirty="0"/>
+          </a:p>
+        </p:txBody>
+      </p:sp>
+      <p:sp>
+        <p:nvSpPr>
+          <p:cNvPr id="14" name="Paso 3"/>
           <p:cNvSpPr/>
           <p:nvPr/>
         </p:nvSpPr>
         <p:spPr>
           <a:xfrm>
-            <a:off x="457200" y="2514600"/>
+            <a:off x="4846320" y="2743200"/>
             <a:ext cx="384048" cy="384048"/>
           </a:xfrm>
           <a:prstGeom prst="ellipse">
@@ -17145,13 +17559,13 @@
       </p:sp>
       <p:sp>
         <p:nvSpPr>
-          <p:cNvPr id="11" name="Número 3"/>
+          <p:cNvPr id="15" name="Número 3"/>
           <p:cNvSpPr txBox="1"/>
           <p:nvPr/>
         </p:nvSpPr>
         <p:spPr>
           <a:xfrm>
-            <a:off x="457200" y="2514600"/>
+            <a:off x="4846320" y="2743200"/>
             <a:ext cx="384048" cy="384048"/>
           </a:xfrm>
           <a:prstGeom prst="rect">
@@ -17168,27 +17582,27 @@
               <a:buNone/>
             </a:pPr>
             <a:r>
-              <a:rPr lang="en-US" sz="1500" b="1" dirty="0">
+              <a:rPr lang="en-US" sz="1400" b="1" dirty="0">
                 <a:solidFill>
                   <a:schemeClr val="tx1"/>
                 </a:solidFill>
               </a:rPr>
               <a:t>3</a:t>
             </a:r>
-            <a:endParaRPr lang="en-US" sz="1500" dirty="0"/>
-          </a:p>
-        </p:txBody>
-      </p:sp>
-      <p:sp>
-        <p:nvSpPr>
-          <p:cNvPr id="12" name="Texto paso 3"/>
+            <a:endParaRPr lang="en-US" sz="1400" dirty="0"/>
+          </a:p>
+        </p:txBody>
+      </p:sp>
+      <p:sp>
+        <p:nvSpPr>
+          <p:cNvPr id="16" name="Texto paso 3"/>
           <p:cNvSpPr txBox="1"/>
           <p:nvPr/>
         </p:nvSpPr>
         <p:spPr>
           <a:xfrm>
-            <a:off x="978408" y="2478024"/>
-            <a:ext cx="7708392" cy="731520"/>
+            <a:off x="5367528" y="2706624"/>
+            <a:ext cx="3319272" cy="868680"/>
           </a:xfrm>
           <a:prstGeom prst="rect">
             <a:avLst/>
@@ -17207,14 +17621,14 @@
               <a:buNone/>
             </a:pPr>
             <a:r>
-              <a:rPr lang="en-US" sz="1500" b="1" dirty="0">
+              <a:rPr lang="en-US" sz="1400" b="1" dirty="0">
                 <a:solidFill>
                   <a:schemeClr val="tx2"/>
                 </a:solidFill>
               </a:rPr>
-              <a:t>Atiende la franja roja</a:t>
-            </a:r>
-            <a:endParaRPr lang="en-US" sz="1500" dirty="0"/>
+              <a:t>Despachar</a:t>
+            </a:r>
+            <a:endParaRPr lang="en-US" sz="1400" dirty="0"/>
           </a:p>
           <a:p>
             <a:pPr indent="0" marL="0">
@@ -17224,26 +17638,26 @@
               <a:buNone/>
             </a:pPr>
             <a:r>
-              <a:rPr lang="en-US" sz="1500" dirty="0">
+              <a:rPr lang="en-US" sz="1400" dirty="0">
                 <a:solidFill>
                   <a:schemeClr val="tx1"/>
                 </a:solidFill>
               </a:rPr>
-              <a:t>Un pedido en revisión espera por ti</a:t>
-            </a:r>
-            <a:endParaRPr lang="en-US" sz="1500" dirty="0"/>
-          </a:p>
-        </p:txBody>
-      </p:sp>
-      <p:sp>
-        <p:nvSpPr>
-          <p:cNvPr id="13" name="Paso 4"/>
+              <a:t>Cuando sale</a:t>
+            </a:r>
+            <a:endParaRPr lang="en-US" sz="1400" dirty="0"/>
+          </a:p>
+        </p:txBody>
+      </p:sp>
+      <p:sp>
+        <p:nvSpPr>
+          <p:cNvPr id="17" name="Paso 4"/>
           <p:cNvSpPr/>
           <p:nvPr/>
         </p:nvSpPr>
         <p:spPr>
           <a:xfrm>
-            <a:off x="457200" y="3246120"/>
+            <a:off x="4846320" y="3611880"/>
             <a:ext cx="384048" cy="384048"/>
           </a:xfrm>
           <a:prstGeom prst="ellipse">
@@ -17262,13 +17676,13 @@
       </p:sp>
       <p:sp>
         <p:nvSpPr>
-          <p:cNvPr id="14" name="Número 4"/>
+          <p:cNvPr id="18" name="Número 4"/>
           <p:cNvSpPr txBox="1"/>
           <p:nvPr/>
         </p:nvSpPr>
         <p:spPr>
           <a:xfrm>
-            <a:off x="457200" y="3246120"/>
+            <a:off x="4846320" y="3611880"/>
             <a:ext cx="384048" cy="384048"/>
           </a:xfrm>
           <a:prstGeom prst="rect">
@@ -17285,27 +17699,27 @@
               <a:buNone/>
             </a:pPr>
             <a:r>
-              <a:rPr lang="en-US" sz="1500" b="1" dirty="0">
+              <a:rPr lang="en-US" sz="1400" b="1" dirty="0">
                 <a:solidFill>
                   <a:schemeClr val="bg1"/>
                 </a:solidFill>
               </a:rPr>
               <a:t>4</a:t>
             </a:r>
-            <a:endParaRPr lang="en-US" sz="1500" dirty="0"/>
-          </a:p>
-        </p:txBody>
-      </p:sp>
-      <p:sp>
-        <p:nvSpPr>
-          <p:cNvPr id="15" name="Texto paso 4"/>
+            <a:endParaRPr lang="en-US" sz="1400" dirty="0"/>
+          </a:p>
+        </p:txBody>
+      </p:sp>
+      <p:sp>
+        <p:nvSpPr>
+          <p:cNvPr id="19" name="Texto paso 4"/>
           <p:cNvSpPr txBox="1"/>
           <p:nvPr/>
         </p:nvSpPr>
         <p:spPr>
           <a:xfrm>
-            <a:off x="978408" y="3209544"/>
-            <a:ext cx="7708392" cy="731520"/>
+            <a:off x="5367528" y="3575304"/>
+            <a:ext cx="3319272" cy="868680"/>
           </a:xfrm>
           <a:prstGeom prst="rect">
             <a:avLst/>
@@ -17324,14 +17738,14 @@
               <a:buNone/>
             </a:pPr>
             <a:r>
-              <a:rPr lang="en-US" sz="1500" b="1" dirty="0">
+              <a:rPr lang="en-US" sz="1400" b="1" dirty="0">
                 <a:solidFill>
                   <a:schemeClr val="tx2"/>
                 </a:solidFill>
               </a:rPr>
-              <a:t>Avisa los errores</a:t>
-            </a:r>
-            <a:endParaRPr lang="en-US" sz="1500" dirty="0"/>
+              <a:t>Marcar entregado</a:t>
+            </a:r>
+            <a:endParaRPr lang="en-US" sz="1400" dirty="0"/>
           </a:p>
           <a:p>
             <a:pPr indent="0" marL="0">
@@ -17341,131 +17755,14 @@
               <a:buNone/>
             </a:pPr>
             <a:r>
-              <a:rPr lang="en-US" sz="1500" dirty="0">
+              <a:rPr lang="en-US" sz="1400" dirty="0">
                 <a:solidFill>
                   <a:schemeClr val="tx1"/>
                 </a:solidFill>
               </a:rPr>
-              <a:t>Con «Avisar un error», no por mensajes sueltos</a:t>
-            </a:r>
-            <a:endParaRPr lang="en-US" sz="1500" dirty="0"/>
-          </a:p>
-        </p:txBody>
-      </p:sp>
-      <p:sp>
-        <p:nvSpPr>
-          <p:cNvPr id="16" name="Paso 5"/>
-          <p:cNvSpPr/>
-          <p:nvPr/>
-        </p:nvSpPr>
-        <p:spPr>
-          <a:xfrm>
-            <a:off x="457200" y="3977640"/>
-            <a:ext cx="384048" cy="384048"/>
-          </a:xfrm>
-          <a:prstGeom prst="ellipse">
-            <a:avLst/>
-          </a:prstGeom>
-          <a:solidFill>
-            <a:schemeClr val="accent3"/>
-          </a:solidFill>
-          <a:ln w="12700">
-            <a:solidFill>
-              <a:schemeClr val="accent3"/>
-            </a:solidFill>
-            <a:prstDash val="solid"/>
-          </a:ln>
-        </p:spPr>
-      </p:sp>
-      <p:sp>
-        <p:nvSpPr>
-          <p:cNvPr id="17" name="Número 5"/>
-          <p:cNvSpPr txBox="1"/>
-          <p:nvPr/>
-        </p:nvSpPr>
-        <p:spPr>
-          <a:xfrm>
-            <a:off x="457200" y="3977640"/>
-            <a:ext cx="384048" cy="384048"/>
-          </a:xfrm>
-          <a:prstGeom prst="rect">
-            <a:avLst/>
-          </a:prstGeom>
-          <a:noFill/>
-          <a:ln/>
-        </p:spPr>
-        <p:txBody>
-          <a:bodyPr wrap="square" lIns="0" tIns="0" rIns="0" bIns="0" rtlCol="0" anchor="ctr"/>
-          <a:lstStyle/>
-          <a:p>
-            <a:pPr algn="ctr" indent="0" marL="0">
-              <a:buNone/>
-            </a:pPr>
-            <a:r>
-              <a:rPr lang="en-US" sz="1500" b="1" dirty="0">
-                <a:solidFill>
-                  <a:schemeClr val="bg1"/>
-                </a:solidFill>
-              </a:rPr>
-              <a:t>5</a:t>
-            </a:r>
-            <a:endParaRPr lang="en-US" sz="1500" dirty="0"/>
-          </a:p>
-        </p:txBody>
-      </p:sp>
-      <p:sp>
-        <p:nvSpPr>
-          <p:cNvPr id="18" name="Texto paso 5"/>
-          <p:cNvSpPr txBox="1"/>
-          <p:nvPr/>
-        </p:nvSpPr>
-        <p:spPr>
-          <a:xfrm>
-            <a:off x="978408" y="3941064"/>
-            <a:ext cx="7708392" cy="731520"/>
-          </a:xfrm>
-          <a:prstGeom prst="rect">
-            <a:avLst/>
-          </a:prstGeom>
-          <a:noFill/>
-          <a:ln/>
-        </p:spPr>
-        <p:txBody>
-          <a:bodyPr wrap="square" lIns="0" tIns="0" rIns="0" bIns="0" rtlCol="0" anchor="t"/>
-          <a:lstStyle/>
-          <a:p>
-            <a:pPr indent="0" marL="0">
-              <a:spcAft>
-                <a:spcPts val="200"/>
-              </a:spcAft>
-              <a:buNone/>
-            </a:pPr>
-            <a:r>
-              <a:rPr lang="en-US" sz="1500" b="1" dirty="0">
-                <a:solidFill>
-                  <a:schemeClr val="tx2"/>
-                </a:solidFill>
-              </a:rPr>
-              <a:t>Cuida tu contraseña</a:t>
-            </a:r>
-            <a:endParaRPr lang="en-US" sz="1500" dirty="0"/>
-          </a:p>
-          <a:p>
-            <a:pPr indent="0" marL="0">
-              <a:spcAft>
-                <a:spcPts val="200"/>
-              </a:spcAft>
-              <a:buNone/>
-            </a:pPr>
-            <a:r>
-              <a:rPr lang="en-US" sz="1500" dirty="0">
-                <a:solidFill>
-                  <a:schemeClr val="tx1"/>
-                </a:solidFill>
-              </a:rPr>
-              <a:t>Es personal: cada acción queda con tu nombre</a:t>
-            </a:r>
-            <a:endParaRPr lang="en-US" sz="1500" dirty="0"/>
+              <a:t>Cuando el cliente lo recibe</a:t>
+            </a:r>
+            <a:endParaRPr lang="en-US" sz="1400" dirty="0"/>
           </a:p>
         </p:txBody>
       </p:sp>
@@ -17525,6 +17822,1710 @@
 <file path=ppt/slides/slide33.xml><?xml version="1.0" encoding="utf-8"?>
 <p:sld xmlns:a="http://schemas.openxmlformats.org/drawingml/2006/main" xmlns:r="http://schemas.openxmlformats.org/officeDocument/2006/relationships" xmlns:p="http://schemas.openxmlformats.org/presentationml/2006/main">
   <p:cSld name="Slide 33">
+    <p:spTree>
+      <p:nvGrpSpPr>
+        <p:cNvPr id="1" name=""/>
+        <p:cNvGrpSpPr/>
+        <p:nvPr/>
+      </p:nvGrpSpPr>
+      <p:grpSpPr>
+        <a:xfrm>
+          <a:off x="0" y="0"/>
+          <a:ext cx="0" cy="0"/>
+          <a:chOff x="0" y="0"/>
+          <a:chExt cx="0" cy="0"/>
+        </a:xfrm>
+      </p:grpSpPr>
+      <p:sp>
+        <p:nvSpPr>
+          <p:cNvPr id="2" name="Text 0"/>
+          <p:cNvSpPr/>
+          <p:nvPr>
+            <p:ph idx="100" type="title" hasCustomPrompt="1"/>
+          </p:nvPr>
+        </p:nvSpPr>
+        <p:spPr>
+          <a:xfrm>
+            <a:off x="548640" y="1371600"/>
+            <a:ext cx="5669280" cy="914400"/>
+          </a:xfrm>
+          <a:prstGeom prst="rect">
+            <a:avLst/>
+          </a:prstGeom>
+          <a:noFill/>
+          <a:ln/>
+        </p:spPr>
+        <p:txBody>
+          <a:bodyPr wrap="square" lIns="0" tIns="0" rIns="0" bIns="0" rtlCol="0" anchor="b"/>
+          <a:lstStyle/>
+          <a:p>
+            <a:pPr algn="l" indent="0" marL="0">
+              <a:buNone/>
+            </a:pPr>
+            <a:r>
+              <a:rPr lang="en-US" sz="4000" b="1" dirty="0">
+                <a:solidFill>
+                  <a:schemeClr val="bg1"/>
+                </a:solidFill>
+              </a:rPr>
+              <a:t>Laboratorio</a:t>
+            </a:r>
+            <a:endParaRPr lang="en-US" sz="4000" dirty="0"/>
+          </a:p>
+        </p:txBody>
+      </p:sp>
+      <p:sp>
+        <p:nvSpPr>
+          <p:cNvPr id="3" name="Text 0"/>
+          <p:cNvSpPr/>
+          <p:nvPr>
+            <p:ph idx="101" type="body" hasCustomPrompt="1"/>
+          </p:nvPr>
+        </p:nvSpPr>
+        <p:spPr>
+          <a:xfrm>
+            <a:off x="548640" y="2423160"/>
+            <a:ext cx="5669280" cy="1463040"/>
+          </a:xfrm>
+          <a:prstGeom prst="rect">
+            <a:avLst/>
+          </a:prstGeom>
+          <a:noFill/>
+          <a:ln/>
+        </p:spPr>
+        <p:txBody>
+          <a:bodyPr wrap="square" lIns="0" tIns="0" rIns="0" bIns="0" rtlCol="0" anchor="t"/>
+          <a:lstStyle/>
+          <a:p>
+            <a:pPr indent="0" marL="0">
+              <a:buNone/>
+            </a:pPr>
+            <a:r>
+              <a:rPr lang="en-US" sz="1800" dirty="0">
+                <a:solidFill>
+                  <a:schemeClr val="bg1"/>
+                </a:solidFill>
+              </a:rPr>
+              <a:t>Fabricas los lotes que pide el Taller, los validas y los entregas.</a:t>
+            </a:r>
+            <a:endParaRPr lang="en-US" sz="1800" dirty="0"/>
+          </a:p>
+        </p:txBody>
+      </p:sp>
+      <p:sp>
+        <p:nvSpPr>
+          <p:cNvPr id="4" name="Tarjeta perfil"/>
+          <p:cNvSpPr/>
+          <p:nvPr/>
+        </p:nvSpPr>
+        <p:spPr>
+          <a:xfrm>
+            <a:off x="6583680" y="1417320"/>
+            <a:ext cx="2011680" cy="2377440"/>
+          </a:xfrm>
+          <a:prstGeom prst="roundRect">
+            <a:avLst>
+              <a:gd name="adj" fmla="val 6818"/>
+            </a:avLst>
+          </a:prstGeom>
+          <a:solidFill>
+            <a:schemeClr val="bg1"/>
+          </a:solidFill>
+          <a:ln w="12700">
+            <a:solidFill>
+              <a:schemeClr val="bg1"/>
+            </a:solidFill>
+            <a:prstDash val="solid"/>
+          </a:ln>
+        </p:spPr>
+      </p:sp>
+      <p:pic>
+        <p:nvPicPr>
+          <p:cNvPr id="5" name="Logo" descr="/home/claude/pinturas-liz-app/public/logo.png">    </p:cNvPr>
+          <p:cNvPicPr>
+            <a:picLocks noChangeAspect="1"/>
+          </p:cNvPicPr>
+          <p:nvPr/>
+        </p:nvPicPr>
+        <p:blipFill>
+          <a:blip r:embed="rId1"/>
+          <a:stretch>
+            <a:fillRect/>
+          </a:stretch>
+        </p:blipFill>
+        <p:spPr>
+          <a:xfrm>
+            <a:off x="6812280" y="1600200"/>
+            <a:ext cx="1554480" cy="1161288"/>
+          </a:xfrm>
+          <a:prstGeom prst="rect">
+            <a:avLst/>
+          </a:prstGeom>
+        </p:spPr>
+      </p:pic>
+      <p:sp>
+        <p:nvSpPr>
+          <p:cNvPr id="6" name="Quién"/>
+          <p:cNvSpPr txBox="1"/>
+          <p:nvPr/>
+        </p:nvSpPr>
+        <p:spPr>
+          <a:xfrm>
+            <a:off x="6675120" y="2880360"/>
+            <a:ext cx="1828800" cy="822960"/>
+          </a:xfrm>
+          <a:prstGeom prst="rect">
+            <a:avLst/>
+          </a:prstGeom>
+          <a:noFill/>
+          <a:ln/>
+        </p:spPr>
+        <p:txBody>
+          <a:bodyPr wrap="square" lIns="0" tIns="0" rIns="0" bIns="0" rtlCol="0" anchor="ctr"/>
+          <a:lstStyle/>
+          <a:p>
+            <a:pPr algn="ctr" indent="0" marL="0">
+              <a:buNone/>
+            </a:pPr>
+            <a:r>
+              <a:rPr lang="en-US" sz="1300" b="1" dirty="0">
+                <a:solidFill>
+                  <a:schemeClr val="tx2"/>
+                </a:solidFill>
+              </a:rPr>
+              <a:t>Bryan Roldan</a:t>
+            </a:r>
+            <a:endParaRPr lang="en-US" sz="1300" dirty="0"/>
+          </a:p>
+          <a:p>
+            <a:pPr algn="ctr" indent="0" marL="0">
+              <a:buNone/>
+            </a:pPr>
+            <a:r>
+              <a:rPr lang="en-US" sz="1300" b="1" dirty="0">
+                <a:solidFill>
+                  <a:schemeClr val="tx2"/>
+                </a:solidFill>
+              </a:rPr>
+              <a:t>(Laboratorio)</a:t>
+            </a:r>
+            <a:endParaRPr lang="en-US" sz="1300" dirty="0"/>
+          </a:p>
+        </p:txBody>
+      </p:sp>
+    </p:spTree>
+  </p:cSld>
+  <p:clrMapOvr>
+    <a:masterClrMapping/>
+  </p:clrMapOvr>
+</p:sld>
+</file>
+
+<file path=ppt/slides/slide34.xml><?xml version="1.0" encoding="utf-8"?>
+<p:sld xmlns:a="http://schemas.openxmlformats.org/drawingml/2006/main" xmlns:r="http://schemas.openxmlformats.org/officeDocument/2006/relationships" xmlns:p="http://schemas.openxmlformats.org/presentationml/2006/main">
+  <p:cSld name="Slide 34">
+    <p:spTree>
+      <p:nvGrpSpPr>
+        <p:cNvPr id="1" name=""/>
+        <p:cNvGrpSpPr/>
+        <p:nvPr/>
+      </p:nvGrpSpPr>
+      <p:grpSpPr>
+        <a:xfrm>
+          <a:off x="0" y="0"/>
+          <a:ext cx="0" cy="0"/>
+          <a:chOff x="0" y="0"/>
+          <a:chExt cx="0" cy="0"/>
+        </a:xfrm>
+      </p:grpSpPr>
+      <p:sp>
+        <p:nvSpPr>
+          <p:cNvPr id="2" name="Text 0"/>
+          <p:cNvSpPr/>
+          <p:nvPr>
+            <p:ph idx="100" type="title" hasCustomPrompt="1"/>
+          </p:nvPr>
+        </p:nvSpPr>
+        <p:spPr>
+          <a:xfrm>
+            <a:off x="457200" y="256032"/>
+            <a:ext cx="7863840" cy="594360"/>
+          </a:xfrm>
+          <a:prstGeom prst="rect">
+            <a:avLst/>
+          </a:prstGeom>
+          <a:noFill/>
+          <a:ln/>
+        </p:spPr>
+        <p:txBody>
+          <a:bodyPr wrap="square" lIns="0" tIns="0" rIns="0" bIns="0" rtlCol="0" anchor="ctr"/>
+          <a:lstStyle/>
+          <a:p>
+            <a:pPr algn="l" indent="0" marL="0">
+              <a:buNone/>
+            </a:pPr>
+            <a:r>
+              <a:rPr lang="en-US" sz="2800" b="1" dirty="0">
+                <a:solidFill>
+                  <a:schemeClr val="tx2"/>
+                </a:solidFill>
+              </a:rPr>
+              <a:t>Órdenes, lotes y entrega</a:t>
+            </a:r>
+            <a:endParaRPr lang="en-US" sz="2800" dirty="0"/>
+          </a:p>
+        </p:txBody>
+      </p:sp>
+      <p:sp>
+        <p:nvSpPr>
+          <p:cNvPr id="4" name="Marco lab-ordenes"/>
+          <p:cNvSpPr/>
+          <p:nvPr/>
+        </p:nvSpPr>
+        <p:spPr>
+          <a:xfrm>
+            <a:off x="420624" y="923544"/>
+            <a:ext cx="2852928" cy="1810512"/>
+          </a:xfrm>
+          <a:prstGeom prst="roundRect">
+            <a:avLst>
+              <a:gd name="adj" fmla="val 3030"/>
+            </a:avLst>
+          </a:prstGeom>
+          <a:solidFill>
+            <a:schemeClr val="bg1"/>
+          </a:solidFill>
+          <a:ln w="9525">
+            <a:solidFill>
+              <a:srgbClr val="D3DCEC"/>
+            </a:solidFill>
+            <a:prstDash val="solid"/>
+          </a:ln>
+          <a:effectLst>
+            <a:outerShdw sx="100000" sy="100000" kx="0" ky="0" algn="bl" rotWithShape="0" blurRad="76200" dist="25400" dir="5400000">
+              <a:srgbClr val="0F1E3D">
+                <a:alpha val="18000"/>
+              </a:srgbClr>
+            </a:outerShdw>
+          </a:effectLst>
+        </p:spPr>
+      </p:sp>
+      <p:pic>
+        <p:nvPicPr>
+          <p:cNvPr id="5" name="Captura lab-ordenes" descr="Pantalla de la aplicación: lab ordenes">    </p:cNvPr>
+          <p:cNvPicPr>
+            <a:picLocks noChangeAspect="1"/>
+          </p:cNvPicPr>
+          <p:nvPr/>
+        </p:nvPicPr>
+        <p:blipFill>
+          <a:blip r:embed="rId1"/>
+          <a:stretch>
+            <a:fillRect/>
+          </a:stretch>
+        </p:blipFill>
+        <p:spPr>
+          <a:xfrm>
+            <a:off x="457200" y="960120"/>
+            <a:ext cx="2779776" cy="1737360"/>
+          </a:xfrm>
+          <a:prstGeom prst="rect">
+            <a:avLst/>
+          </a:prstGeom>
+        </p:spPr>
+      </p:pic>
+      <p:sp>
+        <p:nvSpPr>
+          <p:cNvPr id="6" name="Marco lab-lotes"/>
+          <p:cNvSpPr/>
+          <p:nvPr/>
+        </p:nvSpPr>
+        <p:spPr>
+          <a:xfrm>
+            <a:off x="420624" y="2843784"/>
+            <a:ext cx="2852928" cy="1810512"/>
+          </a:xfrm>
+          <a:prstGeom prst="roundRect">
+            <a:avLst>
+              <a:gd name="adj" fmla="val 3030"/>
+            </a:avLst>
+          </a:prstGeom>
+          <a:solidFill>
+            <a:schemeClr val="bg1"/>
+          </a:solidFill>
+          <a:ln w="9525">
+            <a:solidFill>
+              <a:srgbClr val="D3DCEC"/>
+            </a:solidFill>
+            <a:prstDash val="solid"/>
+          </a:ln>
+          <a:effectLst>
+            <a:outerShdw sx="100000" sy="100000" kx="0" ky="0" algn="bl" rotWithShape="0" blurRad="76200" dist="25400" dir="5400000">
+              <a:srgbClr val="0F1E3D">
+                <a:alpha val="18000"/>
+              </a:srgbClr>
+            </a:outerShdw>
+          </a:effectLst>
+        </p:spPr>
+      </p:sp>
+      <p:pic>
+        <p:nvPicPr>
+          <p:cNvPr id="7" name="Captura lab-lotes" descr="Pantalla de la aplicación: lab lotes">    </p:cNvPr>
+          <p:cNvPicPr>
+            <a:picLocks noChangeAspect="1"/>
+          </p:cNvPicPr>
+          <p:nvPr/>
+        </p:nvPicPr>
+        <p:blipFill>
+          <a:blip r:embed="rId2"/>
+          <a:stretch>
+            <a:fillRect/>
+          </a:stretch>
+        </p:blipFill>
+        <p:spPr>
+          <a:xfrm>
+            <a:off x="457200" y="2880360"/>
+            <a:ext cx="2779776" cy="1737360"/>
+          </a:xfrm>
+          <a:prstGeom prst="rect">
+            <a:avLst/>
+          </a:prstGeom>
+        </p:spPr>
+      </p:pic>
+      <p:sp>
+        <p:nvSpPr>
+          <p:cNvPr id="8" name="Paso 1"/>
+          <p:cNvSpPr/>
+          <p:nvPr/>
+        </p:nvSpPr>
+        <p:spPr>
+          <a:xfrm>
+            <a:off x="3657600" y="1005840"/>
+            <a:ext cx="384048" cy="384048"/>
+          </a:xfrm>
+          <a:prstGeom prst="ellipse">
+            <a:avLst/>
+          </a:prstGeom>
+          <a:solidFill>
+            <a:schemeClr val="accent1"/>
+          </a:solidFill>
+          <a:ln w="12700">
+            <a:solidFill>
+              <a:schemeClr val="accent1"/>
+            </a:solidFill>
+            <a:prstDash val="solid"/>
+          </a:ln>
+        </p:spPr>
+      </p:sp>
+      <p:sp>
+        <p:nvSpPr>
+          <p:cNvPr id="9" name="Número 1"/>
+          <p:cNvSpPr txBox="1"/>
+          <p:nvPr/>
+        </p:nvSpPr>
+        <p:spPr>
+          <a:xfrm>
+            <a:off x="3657600" y="1005840"/>
+            <a:ext cx="384048" cy="384048"/>
+          </a:xfrm>
+          <a:prstGeom prst="rect">
+            <a:avLst/>
+          </a:prstGeom>
+          <a:noFill/>
+          <a:ln/>
+        </p:spPr>
+        <p:txBody>
+          <a:bodyPr wrap="square" lIns="0" tIns="0" rIns="0" bIns="0" rtlCol="0" anchor="ctr"/>
+          <a:lstStyle/>
+          <a:p>
+            <a:pPr algn="ctr" indent="0" marL="0">
+              <a:buNone/>
+            </a:pPr>
+            <a:r>
+              <a:rPr lang="en-US" sz="1400" b="1" dirty="0">
+                <a:solidFill>
+                  <a:schemeClr val="bg1"/>
+                </a:solidFill>
+              </a:rPr>
+              <a:t>1</a:t>
+            </a:r>
+            <a:endParaRPr lang="en-US" sz="1400" dirty="0"/>
+          </a:p>
+        </p:txBody>
+      </p:sp>
+      <p:sp>
+        <p:nvSpPr>
+          <p:cNvPr id="10" name="Texto paso 1"/>
+          <p:cNvSpPr txBox="1"/>
+          <p:nvPr/>
+        </p:nvSpPr>
+        <p:spPr>
+          <a:xfrm>
+            <a:off x="4178808" y="969264"/>
+            <a:ext cx="4507992" cy="731520"/>
+          </a:xfrm>
+          <a:prstGeom prst="rect">
+            <a:avLst/>
+          </a:prstGeom>
+          <a:noFill/>
+          <a:ln/>
+        </p:spPr>
+        <p:txBody>
+          <a:bodyPr wrap="square" lIns="0" tIns="0" rIns="0" bIns="0" rtlCol="0" anchor="t"/>
+          <a:lstStyle/>
+          <a:p>
+            <a:pPr indent="0" marL="0">
+              <a:spcAft>
+                <a:spcPts val="200"/>
+              </a:spcAft>
+              <a:buNone/>
+            </a:pPr>
+            <a:r>
+              <a:rPr lang="en-US" sz="1400" b="1" dirty="0">
+                <a:solidFill>
+                  <a:schemeClr val="tx2"/>
+                </a:solidFill>
+              </a:rPr>
+              <a:t>Órdenes</a:t>
+            </a:r>
+            <a:endParaRPr lang="en-US" sz="1400" dirty="0"/>
+          </a:p>
+          <a:p>
+            <a:pPr indent="0" marL="0">
+              <a:spcAft>
+                <a:spcPts val="200"/>
+              </a:spcAft>
+              <a:buNone/>
+            </a:pPr>
+            <a:r>
+              <a:rPr lang="en-US" sz="1400" dirty="0">
+                <a:solidFill>
+                  <a:schemeClr val="tx1"/>
+                </a:solidFill>
+              </a:rPr>
+              <a:t>Lo que pide el Taller: color, litros y fecha</a:t>
+            </a:r>
+            <a:endParaRPr lang="en-US" sz="1400" dirty="0"/>
+          </a:p>
+        </p:txBody>
+      </p:sp>
+      <p:sp>
+        <p:nvSpPr>
+          <p:cNvPr id="11" name="Paso 2"/>
+          <p:cNvSpPr/>
+          <p:nvPr/>
+        </p:nvSpPr>
+        <p:spPr>
+          <a:xfrm>
+            <a:off x="3657600" y="1737360"/>
+            <a:ext cx="384048" cy="384048"/>
+          </a:xfrm>
+          <a:prstGeom prst="ellipse">
+            <a:avLst/>
+          </a:prstGeom>
+          <a:solidFill>
+            <a:schemeClr val="accent5"/>
+          </a:solidFill>
+          <a:ln w="12700">
+            <a:solidFill>
+              <a:schemeClr val="accent5"/>
+            </a:solidFill>
+            <a:prstDash val="solid"/>
+          </a:ln>
+        </p:spPr>
+      </p:sp>
+      <p:sp>
+        <p:nvSpPr>
+          <p:cNvPr id="12" name="Número 2"/>
+          <p:cNvSpPr txBox="1"/>
+          <p:nvPr/>
+        </p:nvSpPr>
+        <p:spPr>
+          <a:xfrm>
+            <a:off x="3657600" y="1737360"/>
+            <a:ext cx="384048" cy="384048"/>
+          </a:xfrm>
+          <a:prstGeom prst="rect">
+            <a:avLst/>
+          </a:prstGeom>
+          <a:noFill/>
+          <a:ln/>
+        </p:spPr>
+        <p:txBody>
+          <a:bodyPr wrap="square" lIns="0" tIns="0" rIns="0" bIns="0" rtlCol="0" anchor="ctr"/>
+          <a:lstStyle/>
+          <a:p>
+            <a:pPr algn="ctr" indent="0" marL="0">
+              <a:buNone/>
+            </a:pPr>
+            <a:r>
+              <a:rPr lang="en-US" sz="1400" b="1" dirty="0">
+                <a:solidFill>
+                  <a:schemeClr val="bg1"/>
+                </a:solidFill>
+              </a:rPr>
+              <a:t>2</a:t>
+            </a:r>
+            <a:endParaRPr lang="en-US" sz="1400" dirty="0"/>
+          </a:p>
+        </p:txBody>
+      </p:sp>
+      <p:sp>
+        <p:nvSpPr>
+          <p:cNvPr id="13" name="Texto paso 2"/>
+          <p:cNvSpPr txBox="1"/>
+          <p:nvPr/>
+        </p:nvSpPr>
+        <p:spPr>
+          <a:xfrm>
+            <a:off x="4178808" y="1700784"/>
+            <a:ext cx="4507992" cy="731520"/>
+          </a:xfrm>
+          <a:prstGeom prst="rect">
+            <a:avLst/>
+          </a:prstGeom>
+          <a:noFill/>
+          <a:ln/>
+        </p:spPr>
+        <p:txBody>
+          <a:bodyPr wrap="square" lIns="0" tIns="0" rIns="0" bIns="0" rtlCol="0" anchor="t"/>
+          <a:lstStyle/>
+          <a:p>
+            <a:pPr indent="0" marL="0">
+              <a:spcAft>
+                <a:spcPts val="200"/>
+              </a:spcAft>
+              <a:buNone/>
+            </a:pPr>
+            <a:r>
+              <a:rPr lang="en-US" sz="1400" b="1" dirty="0">
+                <a:solidFill>
+                  <a:schemeClr val="tx2"/>
+                </a:solidFill>
+              </a:rPr>
+              <a:t>Registrar lote</a:t>
+            </a:r>
+            <a:endParaRPr lang="en-US" sz="1400" dirty="0"/>
+          </a:p>
+          <a:p>
+            <a:pPr indent="0" marL="0">
+              <a:spcAft>
+                <a:spcPts val="200"/>
+              </a:spcAft>
+              <a:buNone/>
+            </a:pPr>
+            <a:r>
+              <a:rPr lang="en-US" sz="1400" dirty="0">
+                <a:solidFill>
+                  <a:schemeClr val="tx1"/>
+                </a:solidFill>
+              </a:rPr>
+              <a:t>Litros e insumos usados</a:t>
+            </a:r>
+            <a:endParaRPr lang="en-US" sz="1400" dirty="0"/>
+          </a:p>
+        </p:txBody>
+      </p:sp>
+      <p:sp>
+        <p:nvSpPr>
+          <p:cNvPr id="14" name="Paso 3"/>
+          <p:cNvSpPr/>
+          <p:nvPr/>
+        </p:nvSpPr>
+        <p:spPr>
+          <a:xfrm>
+            <a:off x="3657600" y="2468880"/>
+            <a:ext cx="384048" cy="384048"/>
+          </a:xfrm>
+          <a:prstGeom prst="ellipse">
+            <a:avLst/>
+          </a:prstGeom>
+          <a:solidFill>
+            <a:schemeClr val="accent2"/>
+          </a:solidFill>
+          <a:ln w="12700">
+            <a:solidFill>
+              <a:schemeClr val="accent2"/>
+            </a:solidFill>
+            <a:prstDash val="solid"/>
+          </a:ln>
+        </p:spPr>
+      </p:sp>
+      <p:sp>
+        <p:nvSpPr>
+          <p:cNvPr id="15" name="Número 3"/>
+          <p:cNvSpPr txBox="1"/>
+          <p:nvPr/>
+        </p:nvSpPr>
+        <p:spPr>
+          <a:xfrm>
+            <a:off x="3657600" y="2468880"/>
+            <a:ext cx="384048" cy="384048"/>
+          </a:xfrm>
+          <a:prstGeom prst="rect">
+            <a:avLst/>
+          </a:prstGeom>
+          <a:noFill/>
+          <a:ln/>
+        </p:spPr>
+        <p:txBody>
+          <a:bodyPr wrap="square" lIns="0" tIns="0" rIns="0" bIns="0" rtlCol="0" anchor="ctr"/>
+          <a:lstStyle/>
+          <a:p>
+            <a:pPr algn="ctr" indent="0" marL="0">
+              <a:buNone/>
+            </a:pPr>
+            <a:r>
+              <a:rPr lang="en-US" sz="1400" b="1" dirty="0">
+                <a:solidFill>
+                  <a:schemeClr val="tx1"/>
+                </a:solidFill>
+              </a:rPr>
+              <a:t>3</a:t>
+            </a:r>
+            <a:endParaRPr lang="en-US" sz="1400" dirty="0"/>
+          </a:p>
+        </p:txBody>
+      </p:sp>
+      <p:sp>
+        <p:nvSpPr>
+          <p:cNvPr id="16" name="Texto paso 3"/>
+          <p:cNvSpPr txBox="1"/>
+          <p:nvPr/>
+        </p:nvSpPr>
+        <p:spPr>
+          <a:xfrm>
+            <a:off x="4178808" y="2432304"/>
+            <a:ext cx="4507992" cy="731520"/>
+          </a:xfrm>
+          <a:prstGeom prst="rect">
+            <a:avLst/>
+          </a:prstGeom>
+          <a:noFill/>
+          <a:ln/>
+        </p:spPr>
+        <p:txBody>
+          <a:bodyPr wrap="square" lIns="0" tIns="0" rIns="0" bIns="0" rtlCol="0" anchor="t"/>
+          <a:lstStyle/>
+          <a:p>
+            <a:pPr indent="0" marL="0">
+              <a:spcAft>
+                <a:spcPts val="200"/>
+              </a:spcAft>
+              <a:buNone/>
+            </a:pPr>
+            <a:r>
+              <a:rPr lang="en-US" sz="1400" b="1" dirty="0">
+                <a:solidFill>
+                  <a:schemeClr val="tx2"/>
+                </a:solidFill>
+              </a:rPr>
+              <a:t>Validar</a:t>
+            </a:r>
+            <a:endParaRPr lang="en-US" sz="1400" dirty="0"/>
+          </a:p>
+          <a:p>
+            <a:pPr indent="0" marL="0">
+              <a:spcAft>
+                <a:spcPts val="200"/>
+              </a:spcAft>
+              <a:buNone/>
+            </a:pPr>
+            <a:r>
+              <a:rPr lang="en-US" sz="1400" dirty="0">
+                <a:solidFill>
+                  <a:schemeClr val="tx1"/>
+                </a:solidFill>
+              </a:rPr>
+              <a:t>Viscosidad, transparencia y color</a:t>
+            </a:r>
+            <a:endParaRPr lang="en-US" sz="1400" dirty="0"/>
+          </a:p>
+        </p:txBody>
+      </p:sp>
+      <p:sp>
+        <p:nvSpPr>
+          <p:cNvPr id="17" name="Paso 4"/>
+          <p:cNvSpPr/>
+          <p:nvPr/>
+        </p:nvSpPr>
+        <p:spPr>
+          <a:xfrm>
+            <a:off x="3657600" y="3200400"/>
+            <a:ext cx="384048" cy="384048"/>
+          </a:xfrm>
+          <a:prstGeom prst="ellipse">
+            <a:avLst/>
+          </a:prstGeom>
+          <a:solidFill>
+            <a:schemeClr val="accent4"/>
+          </a:solidFill>
+          <a:ln w="12700">
+            <a:solidFill>
+              <a:schemeClr val="accent4"/>
+            </a:solidFill>
+            <a:prstDash val="solid"/>
+          </a:ln>
+        </p:spPr>
+      </p:sp>
+      <p:sp>
+        <p:nvSpPr>
+          <p:cNvPr id="18" name="Número 4"/>
+          <p:cNvSpPr txBox="1"/>
+          <p:nvPr/>
+        </p:nvSpPr>
+        <p:spPr>
+          <a:xfrm>
+            <a:off x="3657600" y="3200400"/>
+            <a:ext cx="384048" cy="384048"/>
+          </a:xfrm>
+          <a:prstGeom prst="rect">
+            <a:avLst/>
+          </a:prstGeom>
+          <a:noFill/>
+          <a:ln/>
+        </p:spPr>
+        <p:txBody>
+          <a:bodyPr wrap="square" lIns="0" tIns="0" rIns="0" bIns="0" rtlCol="0" anchor="ctr"/>
+          <a:lstStyle/>
+          <a:p>
+            <a:pPr algn="ctr" indent="0" marL="0">
+              <a:buNone/>
+            </a:pPr>
+            <a:r>
+              <a:rPr lang="en-US" sz="1400" b="1" dirty="0">
+                <a:solidFill>
+                  <a:schemeClr val="bg1"/>
+                </a:solidFill>
+              </a:rPr>
+              <a:t>4</a:t>
+            </a:r>
+            <a:endParaRPr lang="en-US" sz="1400" dirty="0"/>
+          </a:p>
+        </p:txBody>
+      </p:sp>
+      <p:sp>
+        <p:nvSpPr>
+          <p:cNvPr id="19" name="Texto paso 4"/>
+          <p:cNvSpPr txBox="1"/>
+          <p:nvPr/>
+        </p:nvSpPr>
+        <p:spPr>
+          <a:xfrm>
+            <a:off x="4178808" y="3163824"/>
+            <a:ext cx="4507992" cy="731520"/>
+          </a:xfrm>
+          <a:prstGeom prst="rect">
+            <a:avLst/>
+          </a:prstGeom>
+          <a:noFill/>
+          <a:ln/>
+        </p:spPr>
+        <p:txBody>
+          <a:bodyPr wrap="square" lIns="0" tIns="0" rIns="0" bIns="0" rtlCol="0" anchor="t"/>
+          <a:lstStyle/>
+          <a:p>
+            <a:pPr indent="0" marL="0">
+              <a:spcAft>
+                <a:spcPts val="200"/>
+              </a:spcAft>
+              <a:buNone/>
+            </a:pPr>
+            <a:r>
+              <a:rPr lang="en-US" sz="1400" b="1" dirty="0">
+                <a:solidFill>
+                  <a:schemeClr val="tx2"/>
+                </a:solidFill>
+              </a:rPr>
+              <a:t>Entregar al Taller</a:t>
+            </a:r>
+            <a:endParaRPr lang="en-US" sz="1400" dirty="0"/>
+          </a:p>
+          <a:p>
+            <a:pPr indent="0" marL="0">
+              <a:spcAft>
+                <a:spcPts val="200"/>
+              </a:spcAft>
+              <a:buNone/>
+            </a:pPr>
+            <a:r>
+              <a:rPr lang="en-US" sz="1400" dirty="0">
+                <a:solidFill>
+                  <a:schemeClr val="tx1"/>
+                </a:solidFill>
+              </a:rPr>
+              <a:t>La orden queda atendida</a:t>
+            </a:r>
+            <a:endParaRPr lang="en-US" sz="1400" dirty="0"/>
+          </a:p>
+        </p:txBody>
+      </p:sp>
+      <p:sp>
+        <p:nvSpPr>
+          <p:cNvPr id="20" name="Paso 5"/>
+          <p:cNvSpPr/>
+          <p:nvPr/>
+        </p:nvSpPr>
+        <p:spPr>
+          <a:xfrm>
+            <a:off x="3657600" y="3931920"/>
+            <a:ext cx="384048" cy="384048"/>
+          </a:xfrm>
+          <a:prstGeom prst="ellipse">
+            <a:avLst/>
+          </a:prstGeom>
+          <a:solidFill>
+            <a:schemeClr val="accent3"/>
+          </a:solidFill>
+          <a:ln w="12700">
+            <a:solidFill>
+              <a:schemeClr val="accent3"/>
+            </a:solidFill>
+            <a:prstDash val="solid"/>
+          </a:ln>
+        </p:spPr>
+      </p:sp>
+      <p:sp>
+        <p:nvSpPr>
+          <p:cNvPr id="21" name="Número 5"/>
+          <p:cNvSpPr txBox="1"/>
+          <p:nvPr/>
+        </p:nvSpPr>
+        <p:spPr>
+          <a:xfrm>
+            <a:off x="3657600" y="3931920"/>
+            <a:ext cx="384048" cy="384048"/>
+          </a:xfrm>
+          <a:prstGeom prst="rect">
+            <a:avLst/>
+          </a:prstGeom>
+          <a:noFill/>
+          <a:ln/>
+        </p:spPr>
+        <p:txBody>
+          <a:bodyPr wrap="square" lIns="0" tIns="0" rIns="0" bIns="0" rtlCol="0" anchor="ctr"/>
+          <a:lstStyle/>
+          <a:p>
+            <a:pPr algn="ctr" indent="0" marL="0">
+              <a:buNone/>
+            </a:pPr>
+            <a:r>
+              <a:rPr lang="en-US" sz="1400" b="1" dirty="0">
+                <a:solidFill>
+                  <a:schemeClr val="bg1"/>
+                </a:solidFill>
+              </a:rPr>
+              <a:t>5</a:t>
+            </a:r>
+            <a:endParaRPr lang="en-US" sz="1400" dirty="0"/>
+          </a:p>
+        </p:txBody>
+      </p:sp>
+      <p:sp>
+        <p:nvSpPr>
+          <p:cNvPr id="22" name="Texto paso 5"/>
+          <p:cNvSpPr txBox="1"/>
+          <p:nvPr/>
+        </p:nvSpPr>
+        <p:spPr>
+          <a:xfrm>
+            <a:off x="4178808" y="3895344"/>
+            <a:ext cx="4507992" cy="731520"/>
+          </a:xfrm>
+          <a:prstGeom prst="rect">
+            <a:avLst/>
+          </a:prstGeom>
+          <a:noFill/>
+          <a:ln/>
+        </p:spPr>
+        <p:txBody>
+          <a:bodyPr wrap="square" lIns="0" tIns="0" rIns="0" bIns="0" rtlCol="0" anchor="t"/>
+          <a:lstStyle/>
+          <a:p>
+            <a:pPr indent="0" marL="0">
+              <a:spcAft>
+                <a:spcPts val="200"/>
+              </a:spcAft>
+              <a:buNone/>
+            </a:pPr>
+            <a:r>
+              <a:rPr lang="en-US" sz="1400" b="1" dirty="0">
+                <a:solidFill>
+                  <a:schemeClr val="tx2"/>
+                </a:solidFill>
+              </a:rPr>
+              <a:t>Insumos</a:t>
+            </a:r>
+            <a:endParaRPr lang="en-US" sz="1400" dirty="0"/>
+          </a:p>
+          <a:p>
+            <a:pPr indent="0" marL="0">
+              <a:spcAft>
+                <a:spcPts val="200"/>
+              </a:spcAft>
+              <a:buNone/>
+            </a:pPr>
+            <a:r>
+              <a:rPr lang="en-US" sz="1400" dirty="0">
+                <a:solidFill>
+                  <a:schemeClr val="tx1"/>
+                </a:solidFill>
+              </a:rPr>
+              <a:t>Compras y ajustes en Almacén</a:t>
+            </a:r>
+            <a:endParaRPr lang="en-US" sz="1400" dirty="0"/>
+          </a:p>
+        </p:txBody>
+      </p:sp>
+      <p:sp>
+        <p:nvSpPr>
+          <p:cNvPr id="25" name="Slide Number Placeholder 0"/>
+          <p:cNvSpPr>
+            <a:spLocks noGrp="1"/>
+          </p:cNvSpPr>
+          <p:nvPr>
+            <p:ph type="sldNum" sz="quarter" idx="4294967295"/>
+          </p:nvPr>
+        </p:nvSpPr>
+        <p:spPr>
+          <a:xfrm>
+            <a:off x="457200" y="4828032"/>
+            <a:ext cx="320040" cy="201168"/>
+          </a:xfrm>
+          <a:prstGeom prst="rect">
+            <a:avLst/>
+          </a:prstGeom>
+          <a:extLst>
+            <a:ext uri="{C572A759-6A51-4108-AA02-DFA0A04FC94B}">
+              <ma14:wrappingTextBoxFlag xmlns:ma14="http://schemas.microsoft.com/office/mac/drawingml/2011/main" val="0"/>
+            </a:ext>
+          </a:extLst>
+        </p:spPr>
+        <p:txBody>
+          <a:bodyPr lIns="0" tIns="0" rIns="0" bIns="0"/>
+          <a:lstStyle>
+            <a:lvl1pPr>
+              <a:defRPr sz="900">
+                <a:solidFill>
+                  <a:schemeClr val="accent6"/>
+                </a:solidFill>
+              </a:defRPr>
+            </a:lvl1pPr>
+          </a:lstStyle>
+          <a:p>
+            <a:pPr algn="l"/>
+            <a:fld id="{F7021451-1387-4CA6-816F-3879F97B5CBC}" type="slidenum">
+              <a:rPr b="0" lang="en-US"/>
+              <a:t>34</a:t>
+            </a:fld>
+            <a:endParaRPr lang="en-US"/>
+          </a:p>
+        </p:txBody>
+      </p:sp>
+    </p:spTree>
+  </p:cSld>
+  <p:clrMapOvr>
+    <a:masterClrMapping/>
+  </p:clrMapOvr>
+</p:sld>
+</file>
+
+<file path=ppt/slides/slide35.xml><?xml version="1.0" encoding="utf-8"?>
+<p:sld xmlns:a="http://schemas.openxmlformats.org/drawingml/2006/main" xmlns:r="http://schemas.openxmlformats.org/officeDocument/2006/relationships" xmlns:p="http://schemas.openxmlformats.org/presentationml/2006/main">
+  <p:cSld name="Slide 35">
+    <p:spTree>
+      <p:nvGrpSpPr>
+        <p:cNvPr id="1" name=""/>
+        <p:cNvGrpSpPr/>
+        <p:nvPr/>
+      </p:nvGrpSpPr>
+      <p:grpSpPr>
+        <a:xfrm>
+          <a:off x="0" y="0"/>
+          <a:ext cx="0" cy="0"/>
+          <a:chOff x="0" y="0"/>
+          <a:chExt cx="0" cy="0"/>
+        </a:xfrm>
+      </p:grpSpPr>
+      <p:sp>
+        <p:nvSpPr>
+          <p:cNvPr id="2" name="Text 0"/>
+          <p:cNvSpPr/>
+          <p:nvPr>
+            <p:ph idx="100" type="title" hasCustomPrompt="1"/>
+          </p:nvPr>
+        </p:nvSpPr>
+        <p:spPr>
+          <a:xfrm>
+            <a:off x="457200" y="256032"/>
+            <a:ext cx="7863840" cy="594360"/>
+          </a:xfrm>
+          <a:prstGeom prst="rect">
+            <a:avLst/>
+          </a:prstGeom>
+          <a:noFill/>
+          <a:ln/>
+        </p:spPr>
+        <p:txBody>
+          <a:bodyPr wrap="square" lIns="0" tIns="0" rIns="0" bIns="0" rtlCol="0" anchor="ctr"/>
+          <a:lstStyle/>
+          <a:p>
+            <a:pPr algn="l" indent="0" marL="0">
+              <a:buNone/>
+            </a:pPr>
+            <a:r>
+              <a:rPr lang="en-US" sz="2800" b="1" dirty="0">
+                <a:solidFill>
+                  <a:schemeClr val="tx2"/>
+                </a:solidFill>
+              </a:rPr>
+              <a:t>Reglas de oro</a:t>
+            </a:r>
+            <a:endParaRPr lang="en-US" sz="2800" dirty="0"/>
+          </a:p>
+        </p:txBody>
+      </p:sp>
+      <p:sp>
+        <p:nvSpPr>
+          <p:cNvPr id="4" name="Paso 1"/>
+          <p:cNvSpPr/>
+          <p:nvPr/>
+        </p:nvSpPr>
+        <p:spPr>
+          <a:xfrm>
+            <a:off x="457200" y="1051560"/>
+            <a:ext cx="384048" cy="384048"/>
+          </a:xfrm>
+          <a:prstGeom prst="ellipse">
+            <a:avLst/>
+          </a:prstGeom>
+          <a:solidFill>
+            <a:schemeClr val="accent1"/>
+          </a:solidFill>
+          <a:ln w="12700">
+            <a:solidFill>
+              <a:schemeClr val="accent1"/>
+            </a:solidFill>
+            <a:prstDash val="solid"/>
+          </a:ln>
+        </p:spPr>
+      </p:sp>
+      <p:sp>
+        <p:nvSpPr>
+          <p:cNvPr id="5" name="Número 1"/>
+          <p:cNvSpPr txBox="1"/>
+          <p:nvPr/>
+        </p:nvSpPr>
+        <p:spPr>
+          <a:xfrm>
+            <a:off x="457200" y="1051560"/>
+            <a:ext cx="384048" cy="384048"/>
+          </a:xfrm>
+          <a:prstGeom prst="rect">
+            <a:avLst/>
+          </a:prstGeom>
+          <a:noFill/>
+          <a:ln/>
+        </p:spPr>
+        <p:txBody>
+          <a:bodyPr wrap="square" lIns="0" tIns="0" rIns="0" bIns="0" rtlCol="0" anchor="ctr"/>
+          <a:lstStyle/>
+          <a:p>
+            <a:pPr algn="ctr" indent="0" marL="0">
+              <a:buNone/>
+            </a:pPr>
+            <a:r>
+              <a:rPr lang="en-US" sz="1500" b="1" dirty="0">
+                <a:solidFill>
+                  <a:schemeClr val="bg1"/>
+                </a:solidFill>
+              </a:rPr>
+              <a:t>1</a:t>
+            </a:r>
+            <a:endParaRPr lang="en-US" sz="1500" dirty="0"/>
+          </a:p>
+        </p:txBody>
+      </p:sp>
+      <p:sp>
+        <p:nvSpPr>
+          <p:cNvPr id="6" name="Texto paso 1"/>
+          <p:cNvSpPr txBox="1"/>
+          <p:nvPr/>
+        </p:nvSpPr>
+        <p:spPr>
+          <a:xfrm>
+            <a:off x="978408" y="1014984"/>
+            <a:ext cx="7708392" cy="731520"/>
+          </a:xfrm>
+          <a:prstGeom prst="rect">
+            <a:avLst/>
+          </a:prstGeom>
+          <a:noFill/>
+          <a:ln/>
+        </p:spPr>
+        <p:txBody>
+          <a:bodyPr wrap="square" lIns="0" tIns="0" rIns="0" bIns="0" rtlCol="0" anchor="t"/>
+          <a:lstStyle/>
+          <a:p>
+            <a:pPr indent="0" marL="0">
+              <a:spcAft>
+                <a:spcPts val="200"/>
+              </a:spcAft>
+              <a:buNone/>
+            </a:pPr>
+            <a:r>
+              <a:rPr lang="en-US" sz="1500" b="1" dirty="0">
+                <a:solidFill>
+                  <a:schemeClr val="tx2"/>
+                </a:solidFill>
+              </a:rPr>
+              <a:t>Siempre primero el cliente</a:t>
+            </a:r>
+            <a:endParaRPr lang="en-US" sz="1500" dirty="0"/>
+          </a:p>
+          <a:p>
+            <a:pPr indent="0" marL="0">
+              <a:spcAft>
+                <a:spcPts val="200"/>
+              </a:spcAft>
+              <a:buNone/>
+            </a:pPr>
+            <a:r>
+              <a:rPr lang="en-US" sz="1500" dirty="0">
+                <a:solidFill>
+                  <a:schemeClr val="tx1"/>
+                </a:solidFill>
+              </a:rPr>
+              <a:t>Los precios son de cada cliente</a:t>
+            </a:r>
+            <a:endParaRPr lang="en-US" sz="1500" dirty="0"/>
+          </a:p>
+        </p:txBody>
+      </p:sp>
+      <p:sp>
+        <p:nvSpPr>
+          <p:cNvPr id="7" name="Paso 2"/>
+          <p:cNvSpPr/>
+          <p:nvPr/>
+        </p:nvSpPr>
+        <p:spPr>
+          <a:xfrm>
+            <a:off x="457200" y="1783080"/>
+            <a:ext cx="384048" cy="384048"/>
+          </a:xfrm>
+          <a:prstGeom prst="ellipse">
+            <a:avLst/>
+          </a:prstGeom>
+          <a:solidFill>
+            <a:schemeClr val="accent5"/>
+          </a:solidFill>
+          <a:ln w="12700">
+            <a:solidFill>
+              <a:schemeClr val="accent5"/>
+            </a:solidFill>
+            <a:prstDash val="solid"/>
+          </a:ln>
+        </p:spPr>
+      </p:sp>
+      <p:sp>
+        <p:nvSpPr>
+          <p:cNvPr id="8" name="Número 2"/>
+          <p:cNvSpPr txBox="1"/>
+          <p:nvPr/>
+        </p:nvSpPr>
+        <p:spPr>
+          <a:xfrm>
+            <a:off x="457200" y="1783080"/>
+            <a:ext cx="384048" cy="384048"/>
+          </a:xfrm>
+          <a:prstGeom prst="rect">
+            <a:avLst/>
+          </a:prstGeom>
+          <a:noFill/>
+          <a:ln/>
+        </p:spPr>
+        <p:txBody>
+          <a:bodyPr wrap="square" lIns="0" tIns="0" rIns="0" bIns="0" rtlCol="0" anchor="ctr"/>
+          <a:lstStyle/>
+          <a:p>
+            <a:pPr algn="ctr" indent="0" marL="0">
+              <a:buNone/>
+            </a:pPr>
+            <a:r>
+              <a:rPr lang="en-US" sz="1500" b="1" dirty="0">
+                <a:solidFill>
+                  <a:schemeClr val="bg1"/>
+                </a:solidFill>
+              </a:rPr>
+              <a:t>2</a:t>
+            </a:r>
+            <a:endParaRPr lang="en-US" sz="1500" dirty="0"/>
+          </a:p>
+        </p:txBody>
+      </p:sp>
+      <p:sp>
+        <p:nvSpPr>
+          <p:cNvPr id="9" name="Texto paso 2"/>
+          <p:cNvSpPr txBox="1"/>
+          <p:nvPr/>
+        </p:nvSpPr>
+        <p:spPr>
+          <a:xfrm>
+            <a:off x="978408" y="1746504"/>
+            <a:ext cx="7708392" cy="731520"/>
+          </a:xfrm>
+          <a:prstGeom prst="rect">
+            <a:avLst/>
+          </a:prstGeom>
+          <a:noFill/>
+          <a:ln/>
+        </p:spPr>
+        <p:txBody>
+          <a:bodyPr wrap="square" lIns="0" tIns="0" rIns="0" bIns="0" rtlCol="0" anchor="t"/>
+          <a:lstStyle/>
+          <a:p>
+            <a:pPr indent="0" marL="0">
+              <a:spcAft>
+                <a:spcPts val="200"/>
+              </a:spcAft>
+              <a:buNone/>
+            </a:pPr>
+            <a:r>
+              <a:rPr lang="en-US" sz="1500" b="1" dirty="0">
+                <a:solidFill>
+                  <a:schemeClr val="tx2"/>
+                </a:solidFill>
+              </a:rPr>
+              <a:t>Lo que no está en la app, no pasó</a:t>
+            </a:r>
+            <a:endParaRPr lang="en-US" sz="1500" dirty="0"/>
+          </a:p>
+          <a:p>
+            <a:pPr indent="0" marL="0">
+              <a:spcAft>
+                <a:spcPts val="200"/>
+              </a:spcAft>
+              <a:buNone/>
+            </a:pPr>
+            <a:r>
+              <a:rPr lang="en-US" sz="1500" dirty="0">
+                <a:solidFill>
+                  <a:schemeClr val="tx1"/>
+                </a:solidFill>
+              </a:rPr>
+              <a:t>Registra cada paso: listo, despacho, entrega, cobro</a:t>
+            </a:r>
+            <a:endParaRPr lang="en-US" sz="1500" dirty="0"/>
+          </a:p>
+        </p:txBody>
+      </p:sp>
+      <p:sp>
+        <p:nvSpPr>
+          <p:cNvPr id="10" name="Paso 3"/>
+          <p:cNvSpPr/>
+          <p:nvPr/>
+        </p:nvSpPr>
+        <p:spPr>
+          <a:xfrm>
+            <a:off x="457200" y="2514600"/>
+            <a:ext cx="384048" cy="384048"/>
+          </a:xfrm>
+          <a:prstGeom prst="ellipse">
+            <a:avLst/>
+          </a:prstGeom>
+          <a:solidFill>
+            <a:schemeClr val="accent2"/>
+          </a:solidFill>
+          <a:ln w="12700">
+            <a:solidFill>
+              <a:schemeClr val="accent2"/>
+            </a:solidFill>
+            <a:prstDash val="solid"/>
+          </a:ln>
+        </p:spPr>
+      </p:sp>
+      <p:sp>
+        <p:nvSpPr>
+          <p:cNvPr id="11" name="Número 3"/>
+          <p:cNvSpPr txBox="1"/>
+          <p:nvPr/>
+        </p:nvSpPr>
+        <p:spPr>
+          <a:xfrm>
+            <a:off x="457200" y="2514600"/>
+            <a:ext cx="384048" cy="384048"/>
+          </a:xfrm>
+          <a:prstGeom prst="rect">
+            <a:avLst/>
+          </a:prstGeom>
+          <a:noFill/>
+          <a:ln/>
+        </p:spPr>
+        <p:txBody>
+          <a:bodyPr wrap="square" lIns="0" tIns="0" rIns="0" bIns="0" rtlCol="0" anchor="ctr"/>
+          <a:lstStyle/>
+          <a:p>
+            <a:pPr algn="ctr" indent="0" marL="0">
+              <a:buNone/>
+            </a:pPr>
+            <a:r>
+              <a:rPr lang="en-US" sz="1500" b="1" dirty="0">
+                <a:solidFill>
+                  <a:schemeClr val="tx1"/>
+                </a:solidFill>
+              </a:rPr>
+              <a:t>3</a:t>
+            </a:r>
+            <a:endParaRPr lang="en-US" sz="1500" dirty="0"/>
+          </a:p>
+        </p:txBody>
+      </p:sp>
+      <p:sp>
+        <p:nvSpPr>
+          <p:cNvPr id="12" name="Texto paso 3"/>
+          <p:cNvSpPr txBox="1"/>
+          <p:nvPr/>
+        </p:nvSpPr>
+        <p:spPr>
+          <a:xfrm>
+            <a:off x="978408" y="2478024"/>
+            <a:ext cx="7708392" cy="731520"/>
+          </a:xfrm>
+          <a:prstGeom prst="rect">
+            <a:avLst/>
+          </a:prstGeom>
+          <a:noFill/>
+          <a:ln/>
+        </p:spPr>
+        <p:txBody>
+          <a:bodyPr wrap="square" lIns="0" tIns="0" rIns="0" bIns="0" rtlCol="0" anchor="t"/>
+          <a:lstStyle/>
+          <a:p>
+            <a:pPr indent="0" marL="0">
+              <a:spcAft>
+                <a:spcPts val="200"/>
+              </a:spcAft>
+              <a:buNone/>
+            </a:pPr>
+            <a:r>
+              <a:rPr lang="en-US" sz="1500" b="1" dirty="0">
+                <a:solidFill>
+                  <a:schemeClr val="tx2"/>
+                </a:solidFill>
+              </a:rPr>
+              <a:t>Atiende la franja roja</a:t>
+            </a:r>
+            <a:endParaRPr lang="en-US" sz="1500" dirty="0"/>
+          </a:p>
+          <a:p>
+            <a:pPr indent="0" marL="0">
+              <a:spcAft>
+                <a:spcPts val="200"/>
+              </a:spcAft>
+              <a:buNone/>
+            </a:pPr>
+            <a:r>
+              <a:rPr lang="en-US" sz="1500" dirty="0">
+                <a:solidFill>
+                  <a:schemeClr val="tx1"/>
+                </a:solidFill>
+              </a:rPr>
+              <a:t>Un pedido en revisión espera por ti</a:t>
+            </a:r>
+            <a:endParaRPr lang="en-US" sz="1500" dirty="0"/>
+          </a:p>
+        </p:txBody>
+      </p:sp>
+      <p:sp>
+        <p:nvSpPr>
+          <p:cNvPr id="13" name="Paso 4"/>
+          <p:cNvSpPr/>
+          <p:nvPr/>
+        </p:nvSpPr>
+        <p:spPr>
+          <a:xfrm>
+            <a:off x="457200" y="3246120"/>
+            <a:ext cx="384048" cy="384048"/>
+          </a:xfrm>
+          <a:prstGeom prst="ellipse">
+            <a:avLst/>
+          </a:prstGeom>
+          <a:solidFill>
+            <a:schemeClr val="accent4"/>
+          </a:solidFill>
+          <a:ln w="12700">
+            <a:solidFill>
+              <a:schemeClr val="accent4"/>
+            </a:solidFill>
+            <a:prstDash val="solid"/>
+          </a:ln>
+        </p:spPr>
+      </p:sp>
+      <p:sp>
+        <p:nvSpPr>
+          <p:cNvPr id="14" name="Número 4"/>
+          <p:cNvSpPr txBox="1"/>
+          <p:nvPr/>
+        </p:nvSpPr>
+        <p:spPr>
+          <a:xfrm>
+            <a:off x="457200" y="3246120"/>
+            <a:ext cx="384048" cy="384048"/>
+          </a:xfrm>
+          <a:prstGeom prst="rect">
+            <a:avLst/>
+          </a:prstGeom>
+          <a:noFill/>
+          <a:ln/>
+        </p:spPr>
+        <p:txBody>
+          <a:bodyPr wrap="square" lIns="0" tIns="0" rIns="0" bIns="0" rtlCol="0" anchor="ctr"/>
+          <a:lstStyle/>
+          <a:p>
+            <a:pPr algn="ctr" indent="0" marL="0">
+              <a:buNone/>
+            </a:pPr>
+            <a:r>
+              <a:rPr lang="en-US" sz="1500" b="1" dirty="0">
+                <a:solidFill>
+                  <a:schemeClr val="bg1"/>
+                </a:solidFill>
+              </a:rPr>
+              <a:t>4</a:t>
+            </a:r>
+            <a:endParaRPr lang="en-US" sz="1500" dirty="0"/>
+          </a:p>
+        </p:txBody>
+      </p:sp>
+      <p:sp>
+        <p:nvSpPr>
+          <p:cNvPr id="15" name="Texto paso 4"/>
+          <p:cNvSpPr txBox="1"/>
+          <p:nvPr/>
+        </p:nvSpPr>
+        <p:spPr>
+          <a:xfrm>
+            <a:off x="978408" y="3209544"/>
+            <a:ext cx="7708392" cy="731520"/>
+          </a:xfrm>
+          <a:prstGeom prst="rect">
+            <a:avLst/>
+          </a:prstGeom>
+          <a:noFill/>
+          <a:ln/>
+        </p:spPr>
+        <p:txBody>
+          <a:bodyPr wrap="square" lIns="0" tIns="0" rIns="0" bIns="0" rtlCol="0" anchor="t"/>
+          <a:lstStyle/>
+          <a:p>
+            <a:pPr indent="0" marL="0">
+              <a:spcAft>
+                <a:spcPts val="200"/>
+              </a:spcAft>
+              <a:buNone/>
+            </a:pPr>
+            <a:r>
+              <a:rPr lang="en-US" sz="1500" b="1" dirty="0">
+                <a:solidFill>
+                  <a:schemeClr val="tx2"/>
+                </a:solidFill>
+              </a:rPr>
+              <a:t>Avisa los errores</a:t>
+            </a:r>
+            <a:endParaRPr lang="en-US" sz="1500" dirty="0"/>
+          </a:p>
+          <a:p>
+            <a:pPr indent="0" marL="0">
+              <a:spcAft>
+                <a:spcPts val="200"/>
+              </a:spcAft>
+              <a:buNone/>
+            </a:pPr>
+            <a:r>
+              <a:rPr lang="en-US" sz="1500" dirty="0">
+                <a:solidFill>
+                  <a:schemeClr val="tx1"/>
+                </a:solidFill>
+              </a:rPr>
+              <a:t>Con «Avisar un error», no por mensajes sueltos</a:t>
+            </a:r>
+            <a:endParaRPr lang="en-US" sz="1500" dirty="0"/>
+          </a:p>
+        </p:txBody>
+      </p:sp>
+      <p:sp>
+        <p:nvSpPr>
+          <p:cNvPr id="16" name="Paso 5"/>
+          <p:cNvSpPr/>
+          <p:nvPr/>
+        </p:nvSpPr>
+        <p:spPr>
+          <a:xfrm>
+            <a:off x="457200" y="3977640"/>
+            <a:ext cx="384048" cy="384048"/>
+          </a:xfrm>
+          <a:prstGeom prst="ellipse">
+            <a:avLst/>
+          </a:prstGeom>
+          <a:solidFill>
+            <a:schemeClr val="accent3"/>
+          </a:solidFill>
+          <a:ln w="12700">
+            <a:solidFill>
+              <a:schemeClr val="accent3"/>
+            </a:solidFill>
+            <a:prstDash val="solid"/>
+          </a:ln>
+        </p:spPr>
+      </p:sp>
+      <p:sp>
+        <p:nvSpPr>
+          <p:cNvPr id="17" name="Número 5"/>
+          <p:cNvSpPr txBox="1"/>
+          <p:nvPr/>
+        </p:nvSpPr>
+        <p:spPr>
+          <a:xfrm>
+            <a:off x="457200" y="3977640"/>
+            <a:ext cx="384048" cy="384048"/>
+          </a:xfrm>
+          <a:prstGeom prst="rect">
+            <a:avLst/>
+          </a:prstGeom>
+          <a:noFill/>
+          <a:ln/>
+        </p:spPr>
+        <p:txBody>
+          <a:bodyPr wrap="square" lIns="0" tIns="0" rIns="0" bIns="0" rtlCol="0" anchor="ctr"/>
+          <a:lstStyle/>
+          <a:p>
+            <a:pPr algn="ctr" indent="0" marL="0">
+              <a:buNone/>
+            </a:pPr>
+            <a:r>
+              <a:rPr lang="en-US" sz="1500" b="1" dirty="0">
+                <a:solidFill>
+                  <a:schemeClr val="bg1"/>
+                </a:solidFill>
+              </a:rPr>
+              <a:t>5</a:t>
+            </a:r>
+            <a:endParaRPr lang="en-US" sz="1500" dirty="0"/>
+          </a:p>
+        </p:txBody>
+      </p:sp>
+      <p:sp>
+        <p:nvSpPr>
+          <p:cNvPr id="18" name="Texto paso 5"/>
+          <p:cNvSpPr txBox="1"/>
+          <p:nvPr/>
+        </p:nvSpPr>
+        <p:spPr>
+          <a:xfrm>
+            <a:off x="978408" y="3941064"/>
+            <a:ext cx="7708392" cy="731520"/>
+          </a:xfrm>
+          <a:prstGeom prst="rect">
+            <a:avLst/>
+          </a:prstGeom>
+          <a:noFill/>
+          <a:ln/>
+        </p:spPr>
+        <p:txBody>
+          <a:bodyPr wrap="square" lIns="0" tIns="0" rIns="0" bIns="0" rtlCol="0" anchor="t"/>
+          <a:lstStyle/>
+          <a:p>
+            <a:pPr indent="0" marL="0">
+              <a:spcAft>
+                <a:spcPts val="200"/>
+              </a:spcAft>
+              <a:buNone/>
+            </a:pPr>
+            <a:r>
+              <a:rPr lang="en-US" sz="1500" b="1" dirty="0">
+                <a:solidFill>
+                  <a:schemeClr val="tx2"/>
+                </a:solidFill>
+              </a:rPr>
+              <a:t>Cuida tu contraseña</a:t>
+            </a:r>
+            <a:endParaRPr lang="en-US" sz="1500" dirty="0"/>
+          </a:p>
+          <a:p>
+            <a:pPr indent="0" marL="0">
+              <a:spcAft>
+                <a:spcPts val="200"/>
+              </a:spcAft>
+              <a:buNone/>
+            </a:pPr>
+            <a:r>
+              <a:rPr lang="en-US" sz="1500" dirty="0">
+                <a:solidFill>
+                  <a:schemeClr val="tx1"/>
+                </a:solidFill>
+              </a:rPr>
+              <a:t>Es personal: cada acción queda con tu nombre</a:t>
+            </a:r>
+            <a:endParaRPr lang="en-US" sz="1500" dirty="0"/>
+          </a:p>
+        </p:txBody>
+      </p:sp>
+      <p:sp>
+        <p:nvSpPr>
+          <p:cNvPr id="25" name="Slide Number Placeholder 0"/>
+          <p:cNvSpPr>
+            <a:spLocks noGrp="1"/>
+          </p:cNvSpPr>
+          <p:nvPr>
+            <p:ph type="sldNum" sz="quarter" idx="4294967295"/>
+          </p:nvPr>
+        </p:nvSpPr>
+        <p:spPr>
+          <a:xfrm>
+            <a:off x="457200" y="4828032"/>
+            <a:ext cx="320040" cy="201168"/>
+          </a:xfrm>
+          <a:prstGeom prst="rect">
+            <a:avLst/>
+          </a:prstGeom>
+          <a:extLst>
+            <a:ext uri="{C572A759-6A51-4108-AA02-DFA0A04FC94B}">
+              <ma14:wrappingTextBoxFlag xmlns:ma14="http://schemas.microsoft.com/office/mac/drawingml/2011/main" val="0"/>
+            </a:ext>
+          </a:extLst>
+        </p:spPr>
+        <p:txBody>
+          <a:bodyPr lIns="0" tIns="0" rIns="0" bIns="0"/>
+          <a:lstStyle>
+            <a:lvl1pPr>
+              <a:defRPr sz="900">
+                <a:solidFill>
+                  <a:schemeClr val="accent6"/>
+                </a:solidFill>
+              </a:defRPr>
+            </a:lvl1pPr>
+          </a:lstStyle>
+          <a:p>
+            <a:pPr algn="l"/>
+            <a:fld id="{F7021451-1387-4CA6-816F-3879F97B5CBC}" type="slidenum">
+              <a:rPr b="0" lang="en-US"/>
+              <a:t>35</a:t>
+            </a:fld>
+            <a:endParaRPr lang="en-US"/>
+          </a:p>
+        </p:txBody>
+      </p:sp>
+    </p:spTree>
+  </p:cSld>
+  <p:clrMapOvr>
+    <a:masterClrMapping/>
+  </p:clrMapOvr>
+</p:sld>
+</file>
+
+<file path=ppt/slides/slide36.xml><?xml version="1.0" encoding="utf-8"?>
+<p:sld xmlns:a="http://schemas.openxmlformats.org/drawingml/2006/main" xmlns:r="http://schemas.openxmlformats.org/officeDocument/2006/relationships" xmlns:p="http://schemas.openxmlformats.org/presentationml/2006/main">
+  <p:cSld name="Slide 36">
     <p:spTree>
       <p:nvGrpSpPr>
         <p:cNvPr id="1" name=""/>
@@ -19438,7 +21439,7 @@
                   <a:schemeClr val="tx1"/>
                 </a:solidFill>
               </a:rPr>
-              <a:t>El manual completo y la hoja de tu perfil, en PDF.</a:t>
+              <a:t>El manual completo y la hoja de tu perfil: se abren en PDF para leer, descargar o imprimir.</a:t>
             </a:r>
             <a:endParaRPr lang="en-US" sz="1400" dirty="0"/>
           </a:p>
